--- a/report-generator/src/report_generator/presets/templates/modernization.pptx
+++ b/report-generator/src/report_generator/presets/templates/modernization.pptx
@@ -192,7 +192,17 @@
   <c:chart>
     <c:autoTitleDeleted val="1"/>
     <c:plotArea>
-      <c:layout/>
+      <c:layout>
+        <c:manualLayout>
+          <c:layoutTarget val="inner"/>
+          <c:xMode val="edge"/>
+          <c:yMode val="edge"/>
+          <c:x val="0.1584043513688066"/>
+          <c:y val="7.1697246744931845E-2"/>
+          <c:w val="0.81894294916779253"/>
+          <c:h val="0.87990308633624048"/>
+        </c:manualLayout>
+      </c:layout>
       <c:barChart>
         <c:barDir val="bar"/>
         <c:grouping val="stacked"/>
@@ -247,7 +257,7 @@
                 </a:outerShdw>
               </a:effectLst>
             </c:spPr>
-            <c:extLst xmlns:w="http://schemas.openxmlformats.org/wordprocessingml/2006/main" xmlns:w15="http://schemas.microsoft.com/office/word/2012/wordml" xmlns:w14="http://schemas.microsoft.com/office/word/2010/wordml" xmlns:m="http://schemas.openxmlformats.org/officeDocument/2006/math" xmlns:wp="http://schemas.openxmlformats.org/drawingml/2006/wordprocessingDrawing" xmlns:wp14="http://schemas.microsoft.com/office/word/2010/wordprocessingDrawing" xmlns:mc="http://schemas.openxmlformats.org/markup-compatibility/2006" xmlns:sl="http://schemas.openxmlformats.org/schemaLibrary/2006/main" xmlns:wne="http://schemas.microsoft.com/office/word/2006/wordml" xmlns:cdr="http://schemas.openxmlformats.org/drawingml/2006/chartDrawing" xmlns:c14="http://schemas.microsoft.com/office/drawing/2007/8/2/chart" xmlns:dgm="http://schemas.openxmlformats.org/drawingml/2006/diagram" xmlns:pic="http://schemas.openxmlformats.org/drawingml/2006/picture" xmlns:xdr="http://schemas.openxmlformats.org/drawingml/2006/spreadsheetDrawing" xmlns:dsp="http://schemas.microsoft.com/office/drawing/2008/diagram" xmlns:xvml="urn:schemas-microsoft-com:office:excel" xmlns:o="urn:schemas-microsoft-com:office:office" xmlns:v="urn:schemas-microsoft-com:vml" xmlns:w10="urn:schemas-microsoft-com:office:word" xmlns:pvml="urn:schemas-microsoft-com:office:powerpoint" xmlns:cppr="http://schemas.microsoft.com/office/2006/coverPageProps" xmlns:odx="http://opendope.org/xpaths" xmlns:odc="http://opendope.org/conditions" xmlns:odq="http://opendope.org/questions" xmlns:oda="http://opendope.org/answers" xmlns:odi="http://opendope.org/components" xmlns:odgm="http://opendope.org/SmartArt/DataHierarchy" xmlns:b="http://schemas.openxmlformats.org/officeDocument/2006/bibliography" xmlns:wps="http://schemas.microsoft.com/office/word/2010/wordprocessingShape" xmlns:w16se="http://schemas.microsoft.com/office/word/2015/wordml/symex" xmlns:w16cid="http://schemas.microsoft.com/office/word/2016/wordml/cid" xmlns:wetp="http://schemas.microsoft.com/office/webextensions/taskpanes/2010/11" xmlns:we="http://schemas.microsoft.com/office/webextensions/webextension/2010/11" xmlns:comp="http://schemas.openxmlformats.org/drawingml/2006/compatibility" xmlns:lc="http://schemas.openxmlformats.org/drawingml/2006/lockedCanvas">
+            <c:extLst xmlns:lc="http://schemas.openxmlformats.org/drawingml/2006/lockedCanvas" xmlns:comp="http://schemas.openxmlformats.org/drawingml/2006/compatibility" xmlns:we="http://schemas.microsoft.com/office/webextensions/webextension/2010/11" xmlns:wetp="http://schemas.microsoft.com/office/webextensions/taskpanes/2010/11" xmlns:w16cid="http://schemas.microsoft.com/office/word/2016/wordml/cid" xmlns:w16se="http://schemas.microsoft.com/office/word/2015/wordml/symex" xmlns:wps="http://schemas.microsoft.com/office/word/2010/wordprocessingShape" xmlns:b="http://schemas.openxmlformats.org/officeDocument/2006/bibliography" xmlns:odgm="http://opendope.org/SmartArt/DataHierarchy" xmlns:odi="http://opendope.org/components" xmlns:oda="http://opendope.org/answers" xmlns:odq="http://opendope.org/questions" xmlns:odc="http://opendope.org/conditions" xmlns:odx="http://opendope.org/xpaths" xmlns:cppr="http://schemas.microsoft.com/office/2006/coverPageProps" xmlns:pvml="urn:schemas-microsoft-com:office:powerpoint" xmlns:w10="urn:schemas-microsoft-com:office:word" xmlns:v="urn:schemas-microsoft-com:vml" xmlns:o="urn:schemas-microsoft-com:office:office" xmlns:xvml="urn:schemas-microsoft-com:office:excel" xmlns:dsp="http://schemas.microsoft.com/office/drawing/2008/diagram" xmlns:xdr="http://schemas.openxmlformats.org/drawingml/2006/spreadsheetDrawing" xmlns:pic="http://schemas.openxmlformats.org/drawingml/2006/picture" xmlns:dgm="http://schemas.openxmlformats.org/drawingml/2006/diagram" xmlns:c14="http://schemas.microsoft.com/office/drawing/2007/8/2/chart" xmlns:cdr="http://schemas.openxmlformats.org/drawingml/2006/chartDrawing" xmlns:wne="http://schemas.microsoft.com/office/word/2006/wordml" xmlns:sl="http://schemas.openxmlformats.org/schemaLibrary/2006/main" xmlns:mc="http://schemas.openxmlformats.org/markup-compatibility/2006" xmlns:wp14="http://schemas.microsoft.com/office/word/2010/wordprocessingDrawing" xmlns:wp="http://schemas.openxmlformats.org/drawingml/2006/wordprocessingDrawing" xmlns:m="http://schemas.openxmlformats.org/officeDocument/2006/math" xmlns:w14="http://schemas.microsoft.com/office/word/2010/wordml" xmlns:w15="http://schemas.microsoft.com/office/word/2012/wordml" xmlns:w="http://schemas.openxmlformats.org/wordprocessingml/2006/main">
               <c:ext xmlns:c16="http://schemas.microsoft.com/office/drawing/2014/chart" uri="{C3380CC4-5D6E-409C-BE32-E72D297353CC}">
                 <c16:uniqueId val="{00000001-8D46-3D4B-996A-4B880DC4E095}"/>
               </c:ext>
@@ -330,7 +340,7 @@
               </c:numCache>
             </c:numRef>
           </c:val>
-          <c:extLst xmlns:w="http://schemas.openxmlformats.org/wordprocessingml/2006/main" xmlns:w15="http://schemas.microsoft.com/office/word/2012/wordml" xmlns:w14="http://schemas.microsoft.com/office/word/2010/wordml" xmlns:m="http://schemas.openxmlformats.org/officeDocument/2006/math" xmlns:wp="http://schemas.openxmlformats.org/drawingml/2006/wordprocessingDrawing" xmlns:wp14="http://schemas.microsoft.com/office/word/2010/wordprocessingDrawing" xmlns:mc="http://schemas.openxmlformats.org/markup-compatibility/2006" xmlns:sl="http://schemas.openxmlformats.org/schemaLibrary/2006/main" xmlns:wne="http://schemas.microsoft.com/office/word/2006/wordml" xmlns:cdr="http://schemas.openxmlformats.org/drawingml/2006/chartDrawing" xmlns:c14="http://schemas.microsoft.com/office/drawing/2007/8/2/chart" xmlns:dgm="http://schemas.openxmlformats.org/drawingml/2006/diagram" xmlns:pic="http://schemas.openxmlformats.org/drawingml/2006/picture" xmlns:xdr="http://schemas.openxmlformats.org/drawingml/2006/spreadsheetDrawing" xmlns:dsp="http://schemas.microsoft.com/office/drawing/2008/diagram" xmlns:xvml="urn:schemas-microsoft-com:office:excel" xmlns:o="urn:schemas-microsoft-com:office:office" xmlns:v="urn:schemas-microsoft-com:vml" xmlns:w10="urn:schemas-microsoft-com:office:word" xmlns:pvml="urn:schemas-microsoft-com:office:powerpoint" xmlns:cppr="http://schemas.microsoft.com/office/2006/coverPageProps" xmlns:odx="http://opendope.org/xpaths" xmlns:odc="http://opendope.org/conditions" xmlns:odq="http://opendope.org/questions" xmlns:oda="http://opendope.org/answers" xmlns:odi="http://opendope.org/components" xmlns:odgm="http://opendope.org/SmartArt/DataHierarchy" xmlns:b="http://schemas.openxmlformats.org/officeDocument/2006/bibliography" xmlns:wps="http://schemas.microsoft.com/office/word/2010/wordprocessingShape" xmlns:w16se="http://schemas.microsoft.com/office/word/2015/wordml/symex" xmlns:w16cid="http://schemas.microsoft.com/office/word/2016/wordml/cid" xmlns:wetp="http://schemas.microsoft.com/office/webextensions/taskpanes/2010/11" xmlns:we="http://schemas.microsoft.com/office/webextensions/webextension/2010/11" xmlns:comp="http://schemas.openxmlformats.org/drawingml/2006/compatibility" xmlns:lc="http://schemas.openxmlformats.org/drawingml/2006/lockedCanvas">
+          <c:extLst xmlns:lc="http://schemas.openxmlformats.org/drawingml/2006/lockedCanvas" xmlns:comp="http://schemas.openxmlformats.org/drawingml/2006/compatibility" xmlns:we="http://schemas.microsoft.com/office/webextensions/webextension/2010/11" xmlns:wetp="http://schemas.microsoft.com/office/webextensions/taskpanes/2010/11" xmlns:w16cid="http://schemas.microsoft.com/office/word/2016/wordml/cid" xmlns:w16se="http://schemas.microsoft.com/office/word/2015/wordml/symex" xmlns:wps="http://schemas.microsoft.com/office/word/2010/wordprocessingShape" xmlns:b="http://schemas.openxmlformats.org/officeDocument/2006/bibliography" xmlns:odgm="http://opendope.org/SmartArt/DataHierarchy" xmlns:odi="http://opendope.org/components" xmlns:oda="http://opendope.org/answers" xmlns:odq="http://opendope.org/questions" xmlns:odc="http://opendope.org/conditions" xmlns:odx="http://opendope.org/xpaths" xmlns:cppr="http://schemas.microsoft.com/office/2006/coverPageProps" xmlns:pvml="urn:schemas-microsoft-com:office:powerpoint" xmlns:w10="urn:schemas-microsoft-com:office:word" xmlns:v="urn:schemas-microsoft-com:vml" xmlns:o="urn:schemas-microsoft-com:office:office" xmlns:xvml="urn:schemas-microsoft-com:office:excel" xmlns:dsp="http://schemas.microsoft.com/office/drawing/2008/diagram" xmlns:xdr="http://schemas.openxmlformats.org/drawingml/2006/spreadsheetDrawing" xmlns:pic="http://schemas.openxmlformats.org/drawingml/2006/picture" xmlns:dgm="http://schemas.openxmlformats.org/drawingml/2006/diagram" xmlns:c14="http://schemas.microsoft.com/office/drawing/2007/8/2/chart" xmlns:cdr="http://schemas.openxmlformats.org/drawingml/2006/chartDrawing" xmlns:wne="http://schemas.microsoft.com/office/word/2006/wordml" xmlns:sl="http://schemas.openxmlformats.org/schemaLibrary/2006/main" xmlns:mc="http://schemas.openxmlformats.org/markup-compatibility/2006" xmlns:wp14="http://schemas.microsoft.com/office/word/2010/wordprocessingDrawing" xmlns:wp="http://schemas.openxmlformats.org/drawingml/2006/wordprocessingDrawing" xmlns:m="http://schemas.openxmlformats.org/officeDocument/2006/math" xmlns:w14="http://schemas.microsoft.com/office/word/2010/wordml" xmlns:w15="http://schemas.microsoft.com/office/word/2012/wordml" xmlns:w="http://schemas.openxmlformats.org/wordprocessingml/2006/main">
             <c:ext xmlns:c16="http://schemas.microsoft.com/office/drawing/2014/chart" uri="{C3380CC4-5D6E-409C-BE32-E72D297353CC}">
               <c16:uniqueId val="{00000004-8D46-3D4B-996A-4B880DC4E095}"/>
             </c:ext>
@@ -569,14 +579,14 @@
     </c:plotArea>
     <c:plotVisOnly val="1"/>
     <c:dispBlanksAs val="gap"/>
-    <c:extLst xmlns:w="http://schemas.openxmlformats.org/wordprocessingml/2006/main" xmlns:w15="http://schemas.microsoft.com/office/word/2012/wordml" xmlns:w14="http://schemas.microsoft.com/office/word/2010/wordml" xmlns:m="http://schemas.openxmlformats.org/officeDocument/2006/math" xmlns:wp="http://schemas.openxmlformats.org/drawingml/2006/wordprocessingDrawing" xmlns:wp14="http://schemas.microsoft.com/office/word/2010/wordprocessingDrawing" xmlns:mc="http://schemas.openxmlformats.org/markup-compatibility/2006" xmlns:sl="http://schemas.openxmlformats.org/schemaLibrary/2006/main" xmlns:wne="http://schemas.microsoft.com/office/word/2006/wordml" xmlns:cdr="http://schemas.openxmlformats.org/drawingml/2006/chartDrawing" xmlns:c14="http://schemas.microsoft.com/office/drawing/2007/8/2/chart" xmlns:dgm="http://schemas.openxmlformats.org/drawingml/2006/diagram" xmlns:pic="http://schemas.openxmlformats.org/drawingml/2006/picture" xmlns:xdr="http://schemas.openxmlformats.org/drawingml/2006/spreadsheetDrawing" xmlns:dsp="http://schemas.microsoft.com/office/drawing/2008/diagram" xmlns:xvml="urn:schemas-microsoft-com:office:excel" xmlns:o="urn:schemas-microsoft-com:office:office" xmlns:v="urn:schemas-microsoft-com:vml" xmlns:w10="urn:schemas-microsoft-com:office:word" xmlns:pvml="urn:schemas-microsoft-com:office:powerpoint" xmlns:cppr="http://schemas.microsoft.com/office/2006/coverPageProps" xmlns:odx="http://opendope.org/xpaths" xmlns:odc="http://opendope.org/conditions" xmlns:odq="http://opendope.org/questions" xmlns:oda="http://opendope.org/answers" xmlns:odi="http://opendope.org/components" xmlns:odgm="http://opendope.org/SmartArt/DataHierarchy" xmlns:b="http://schemas.openxmlformats.org/officeDocument/2006/bibliography" xmlns:wps="http://schemas.microsoft.com/office/word/2010/wordprocessingShape" xmlns:w16se="http://schemas.microsoft.com/office/word/2015/wordml/symex" xmlns:w16cid="http://schemas.microsoft.com/office/word/2016/wordml/cid" xmlns:wetp="http://schemas.microsoft.com/office/webextensions/taskpanes/2010/11" xmlns:we="http://schemas.microsoft.com/office/webextensions/webextension/2010/11" xmlns:comp="http://schemas.openxmlformats.org/drawingml/2006/compatibility" xmlns:lc="http://schemas.openxmlformats.org/drawingml/2006/lockedCanvas">
+    <c:showDLblsOverMax val="0"/>
+    <c:extLst xmlns:lc="http://schemas.openxmlformats.org/drawingml/2006/lockedCanvas" xmlns:comp="http://schemas.openxmlformats.org/drawingml/2006/compatibility" xmlns:we="http://schemas.microsoft.com/office/webextensions/webextension/2010/11" xmlns:wetp="http://schemas.microsoft.com/office/webextensions/taskpanes/2010/11" xmlns:w16cid="http://schemas.microsoft.com/office/word/2016/wordml/cid" xmlns:w16se="http://schemas.microsoft.com/office/word/2015/wordml/symex" xmlns:wps="http://schemas.microsoft.com/office/word/2010/wordprocessingShape" xmlns:b="http://schemas.openxmlformats.org/officeDocument/2006/bibliography" xmlns:odgm="http://opendope.org/SmartArt/DataHierarchy" xmlns:odi="http://opendope.org/components" xmlns:oda="http://opendope.org/answers" xmlns:odq="http://opendope.org/questions" xmlns:odc="http://opendope.org/conditions" xmlns:odx="http://opendope.org/xpaths" xmlns:cppr="http://schemas.microsoft.com/office/2006/coverPageProps" xmlns:pvml="urn:schemas-microsoft-com:office:powerpoint" xmlns:w10="urn:schemas-microsoft-com:office:word" xmlns:v="urn:schemas-microsoft-com:vml" xmlns:o="urn:schemas-microsoft-com:office:office" xmlns:xvml="urn:schemas-microsoft-com:office:excel" xmlns:dsp="http://schemas.microsoft.com/office/drawing/2008/diagram" xmlns:xdr="http://schemas.openxmlformats.org/drawingml/2006/spreadsheetDrawing" xmlns:pic="http://schemas.openxmlformats.org/drawingml/2006/picture" xmlns:dgm="http://schemas.openxmlformats.org/drawingml/2006/diagram" xmlns:c14="http://schemas.microsoft.com/office/drawing/2007/8/2/chart" xmlns:cdr="http://schemas.openxmlformats.org/drawingml/2006/chartDrawing" xmlns:wne="http://schemas.microsoft.com/office/word/2006/wordml" xmlns:sl="http://schemas.openxmlformats.org/schemaLibrary/2006/main" xmlns:mc="http://schemas.openxmlformats.org/markup-compatibility/2006" xmlns:wp14="http://schemas.microsoft.com/office/word/2010/wordprocessingDrawing" xmlns:wp="http://schemas.openxmlformats.org/drawingml/2006/wordprocessingDrawing" xmlns:m="http://schemas.openxmlformats.org/officeDocument/2006/math" xmlns:w14="http://schemas.microsoft.com/office/word/2010/wordml" xmlns:w15="http://schemas.microsoft.com/office/word/2012/wordml" xmlns:w="http://schemas.openxmlformats.org/wordprocessingml/2006/main">
       <c:ext xmlns:c16r3="http://schemas.microsoft.com/office/drawing/2017/03/chart" uri="{56B9EC1D-385E-4148-901F-78D8002777C0}">
         <c16r3:dataDisplayOptions16>
           <c16r3:dispNaAsBlank val="1"/>
         </c16r3:dataDisplayOptions16>
       </c:ext>
     </c:extLst>
-    <c:showDLblsOverMax val="0"/>
   </c:chart>
   <c:spPr>
     <a:noFill/>
@@ -845,6 +855,7 @@
     </c:plotArea>
     <c:plotVisOnly val="1"/>
     <c:dispBlanksAs val="gap"/>
+    <c:showDLblsOverMax val="0"/>
     <c:extLst>
       <c:ext xmlns:c16r3="http://schemas.microsoft.com/office/drawing/2017/03/chart" uri="{56B9EC1D-385E-4148-901F-78D8002777C0}">
         <c16r3:dataDisplayOptions16>
@@ -852,7 +863,6 @@
         </c16r3:dataDisplayOptions16>
       </c:ext>
     </c:extLst>
-    <c:showDLblsOverMax val="0"/>
   </c:chart>
   <c:spPr>
     <a:noFill/>
@@ -2052,7 +2062,7 @@
           <a:p>
             <a:fld id="{C1255C68-584F-174D-BB81-51BF91708794}" type="datetimeFigureOut">
               <a:rPr lang="en-US" smtClean="0"/>
-              <a:t>6/25/25</a:t>
+              <a:t>1/29/26</a:t>
             </a:fld>
             <a:endParaRPr lang="en-US"/>
           </a:p>
@@ -2229,7 +2239,7 @@
           <a:p>
             <a:fld id="{A1EDAAC4-819D-C544-9EA1-C73624CFD70B}" type="datetimeFigureOut">
               <a:rPr lang="en-US" smtClean="0"/>
-              <a:t>6/25/25</a:t>
+              <a:t>1/29/26</a:t>
             </a:fld>
             <a:endParaRPr lang="en-US"/>
           </a:p>
@@ -29910,208 +29920,7 @@
         </p:nvSpPr>
         <p:spPr>
           <a:xfrm>
-            <a:off x="3193634" y="2443642"/>
-            <a:ext cx="5468222" cy="7269"/>
-          </a:xfrm>
-          <a:custGeom>
-            <a:avLst/>
-            <a:gdLst>
-              <a:gd name="connsiteX0" fmla="*/ 0 w 5468222"/>
-              <a:gd name="connsiteY0" fmla="*/ 0 h 7269"/>
-              <a:gd name="connsiteX1" fmla="*/ 5468223 w 5468222"/>
-              <a:gd name="connsiteY1" fmla="*/ 0 h 7269"/>
-            </a:gdLst>
-            <a:ahLst/>
-            <a:cxnLst>
-              <a:cxn ang="0">
-                <a:pos x="connsiteX0" y="connsiteY0"/>
-              </a:cxn>
-              <a:cxn ang="0">
-                <a:pos x="connsiteX1" y="connsiteY1"/>
-              </a:cxn>
-            </a:cxnLst>
-            <a:rect l="l" t="t" r="r" b="b"/>
-            <a:pathLst>
-              <a:path w="5468222" h="7269">
-                <a:moveTo>
-                  <a:pt x="0" y="0"/>
-                </a:moveTo>
-                <a:lnTo>
-                  <a:pt x="5468223" y="0"/>
-                </a:lnTo>
-              </a:path>
-            </a:pathLst>
-          </a:custGeom>
-          <a:noFill/>
-          <a:ln w="7263" cap="flat">
-            <a:solidFill>
-              <a:srgbClr val="9EB5C5">
-                <a:alpha val="40000"/>
-              </a:srgbClr>
-            </a:solidFill>
-            <a:prstDash val="solid"/>
-            <a:miter/>
-          </a:ln>
-        </p:spPr>
-        <p:txBody>
-          <a:bodyPr rtlCol="0" anchor="ctr"/>
-          <a:lstStyle/>
-          <a:p>
-            <a:endParaRPr lang="en-US"/>
-          </a:p>
-        </p:txBody>
-      </p:sp>
-      <p:sp>
-        <p:nvSpPr>
-          <p:cNvPr id="7" name="Freeform 6">
-            <a:extLst>
-              <a:ext uri="{FF2B5EF4-FFF2-40B4-BE49-F238E27FC236}">
-                <a16:creationId xmlns:a16="http://schemas.microsoft.com/office/drawing/2014/main" id="{96E004EC-5DD7-630E-DD97-73BB105447D9}"/>
-              </a:ext>
-            </a:extLst>
-          </p:cNvPr>
-          <p:cNvSpPr/>
-          <p:nvPr/>
-        </p:nvSpPr>
-        <p:spPr>
-          <a:xfrm flipH="1">
-            <a:off x="4585215" y="5358563"/>
-            <a:ext cx="4083908" cy="14538"/>
-          </a:xfrm>
-          <a:custGeom>
-            <a:avLst/>
-            <a:gdLst>
-              <a:gd name="connsiteX0" fmla="*/ 4076642 w 4083908"/>
-              <a:gd name="connsiteY0" fmla="*/ 14538 h 14538"/>
-              <a:gd name="connsiteX1" fmla="*/ 4083909 w 4083908"/>
-              <a:gd name="connsiteY1" fmla="*/ 7269 h 14538"/>
-              <a:gd name="connsiteX2" fmla="*/ 4076642 w 4083908"/>
-              <a:gd name="connsiteY2" fmla="*/ 0 h 14538"/>
-              <a:gd name="connsiteX3" fmla="*/ 4076642 w 4083908"/>
-              <a:gd name="connsiteY3" fmla="*/ 14538 h 14538"/>
-              <a:gd name="connsiteX4" fmla="*/ 0 w 4083908"/>
-              <a:gd name="connsiteY4" fmla="*/ 14538 h 14538"/>
-              <a:gd name="connsiteX5" fmla="*/ 4076642 w 4083908"/>
-              <a:gd name="connsiteY5" fmla="*/ 14538 h 14538"/>
-              <a:gd name="connsiteX6" fmla="*/ 4076642 w 4083908"/>
-              <a:gd name="connsiteY6" fmla="*/ 0 h 14538"/>
-              <a:gd name="connsiteX7" fmla="*/ 0 w 4083908"/>
-              <a:gd name="connsiteY7" fmla="*/ 0 h 14538"/>
-              <a:gd name="connsiteX8" fmla="*/ 0 w 4083908"/>
-              <a:gd name="connsiteY8" fmla="*/ 14538 h 14538"/>
-            </a:gdLst>
-            <a:ahLst/>
-            <a:cxnLst>
-              <a:cxn ang="0">
-                <a:pos x="connsiteX0" y="connsiteY0"/>
-              </a:cxn>
-              <a:cxn ang="0">
-                <a:pos x="connsiteX1" y="connsiteY1"/>
-              </a:cxn>
-              <a:cxn ang="0">
-                <a:pos x="connsiteX2" y="connsiteY2"/>
-              </a:cxn>
-              <a:cxn ang="0">
-                <a:pos x="connsiteX3" y="connsiteY3"/>
-              </a:cxn>
-              <a:cxn ang="0">
-                <a:pos x="connsiteX4" y="connsiteY4"/>
-              </a:cxn>
-              <a:cxn ang="0">
-                <a:pos x="connsiteX5" y="connsiteY5"/>
-              </a:cxn>
-              <a:cxn ang="0">
-                <a:pos x="connsiteX6" y="connsiteY6"/>
-              </a:cxn>
-              <a:cxn ang="0">
-                <a:pos x="connsiteX7" y="connsiteY7"/>
-              </a:cxn>
-              <a:cxn ang="0">
-                <a:pos x="connsiteX8" y="connsiteY8"/>
-              </a:cxn>
-            </a:cxnLst>
-            <a:rect l="l" t="t" r="r" b="b"/>
-            <a:pathLst>
-              <a:path w="4083908" h="14538">
-                <a:moveTo>
-                  <a:pt x="4076642" y="14538"/>
-                </a:moveTo>
-                <a:cubicBezTo>
-                  <a:pt x="4080653" y="14538"/>
-                  <a:pt x="4083909" y="11282"/>
-                  <a:pt x="4083909" y="7269"/>
-                </a:cubicBezTo>
-                <a:cubicBezTo>
-                  <a:pt x="4083909" y="3257"/>
-                  <a:pt x="4080653" y="0"/>
-                  <a:pt x="4076642" y="0"/>
-                </a:cubicBezTo>
-                <a:lnTo>
-                  <a:pt x="4076642" y="14538"/>
-                </a:lnTo>
-                <a:close/>
-                <a:moveTo>
-                  <a:pt x="0" y="14538"/>
-                </a:moveTo>
-                <a:lnTo>
-                  <a:pt x="4076642" y="14538"/>
-                </a:lnTo>
-                <a:lnTo>
-                  <a:pt x="4076642" y="0"/>
-                </a:lnTo>
-                <a:lnTo>
-                  <a:pt x="0" y="0"/>
-                </a:lnTo>
-                <a:lnTo>
-                  <a:pt x="0" y="14538"/>
-                </a:lnTo>
-                <a:close/>
-              </a:path>
-            </a:pathLst>
-          </a:custGeom>
-          <a:gradFill>
-            <a:gsLst>
-              <a:gs pos="0">
-                <a:srgbClr val="DF6838"/>
-              </a:gs>
-              <a:gs pos="50000">
-                <a:srgbClr val="A3A75B"/>
-              </a:gs>
-              <a:gs pos="100000">
-                <a:srgbClr val="67E77F"/>
-              </a:gs>
-            </a:gsLst>
-            <a:lin ang="0" scaled="1"/>
-          </a:gradFill>
-          <a:ln w="7263" cap="flat">
-            <a:noFill/>
-            <a:prstDash val="solid"/>
-            <a:miter/>
-          </a:ln>
-        </p:spPr>
-        <p:txBody>
-          <a:bodyPr rtlCol="0" anchor="ctr"/>
-          <a:lstStyle/>
-          <a:p>
-            <a:endParaRPr lang="en-US"/>
-          </a:p>
-        </p:txBody>
-      </p:sp>
-      <p:sp>
-        <p:nvSpPr>
-          <p:cNvPr id="8" name="Freeform 7">
-            <a:extLst>
-              <a:ext uri="{FF2B5EF4-FFF2-40B4-BE49-F238E27FC236}">
-                <a16:creationId xmlns:a16="http://schemas.microsoft.com/office/drawing/2014/main" id="{E5C56305-2895-3D6B-452A-B162BC9AAEB7}"/>
-              </a:ext>
-            </a:extLst>
-          </p:cNvPr>
-          <p:cNvSpPr/>
-          <p:nvPr/>
-        </p:nvSpPr>
-        <p:spPr>
-          <a:xfrm>
-            <a:off x="3193634" y="3621241"/>
+            <a:off x="3193634" y="2893888"/>
             <a:ext cx="5468222" cy="7269"/>
           </a:xfrm>
           <a:custGeom>
@@ -30176,7 +29985,7 @@
         </p:nvSpPr>
         <p:spPr>
           <a:xfrm>
-            <a:off x="3193634" y="4791571"/>
+            <a:off x="3193634" y="4065644"/>
             <a:ext cx="5468222" cy="7269"/>
           </a:xfrm>
           <a:custGeom>
@@ -30227,2650 +30036,2231 @@
           </a:p>
         </p:txBody>
       </p:sp>
-      <p:sp>
-        <p:nvSpPr>
-          <p:cNvPr id="10" name="Freeform 9">
+      <p:grpSp>
+        <p:nvGrpSpPr>
+          <p:cNvPr id="17" name="Group 16">
             <a:extLst>
               <a:ext uri="{FF2B5EF4-FFF2-40B4-BE49-F238E27FC236}">
-                <a16:creationId xmlns:a16="http://schemas.microsoft.com/office/drawing/2014/main" id="{2B2E99E9-6FC9-F31E-927C-6F26B225088A}"/>
+                <a16:creationId xmlns:a16="http://schemas.microsoft.com/office/drawing/2014/main" id="{5F191D14-9172-C235-983B-F2675F67A7B2}"/>
               </a:ext>
             </a:extLst>
           </p:cNvPr>
-          <p:cNvSpPr/>
+          <p:cNvGrpSpPr/>
           <p:nvPr/>
-        </p:nvSpPr>
-        <p:spPr>
+        </p:nvGrpSpPr>
+        <p:grpSpPr>
           <a:xfrm>
-            <a:off x="3175467" y="1375080"/>
-            <a:ext cx="1090011" cy="988601"/>
+            <a:off x="3175467" y="4160857"/>
+            <a:ext cx="5513433" cy="988601"/>
+            <a:chOff x="3175467" y="3718593"/>
+            <a:chExt cx="5513433" cy="988601"/>
           </a:xfrm>
-          <a:custGeom>
-            <a:avLst/>
-            <a:gdLst>
-              <a:gd name="connsiteX0" fmla="*/ 1053678 w 1090011"/>
-              <a:gd name="connsiteY0" fmla="*/ 0 h 988601"/>
-              <a:gd name="connsiteX1" fmla="*/ 1090011 w 1090011"/>
-              <a:gd name="connsiteY1" fmla="*/ 0 h 988601"/>
-              <a:gd name="connsiteX2" fmla="*/ 1090011 w 1090011"/>
-              <a:gd name="connsiteY2" fmla="*/ 988602 h 988601"/>
-              <a:gd name="connsiteX3" fmla="*/ 1053678 w 1090011"/>
-              <a:gd name="connsiteY3" fmla="*/ 988602 h 988601"/>
-              <a:gd name="connsiteX4" fmla="*/ 36334 w 1090011"/>
-              <a:gd name="connsiteY4" fmla="*/ 988602 h 988601"/>
-              <a:gd name="connsiteX5" fmla="*/ 0 w 1090011"/>
-              <a:gd name="connsiteY5" fmla="*/ 988602 h 988601"/>
-              <a:gd name="connsiteX6" fmla="*/ 0 w 1090011"/>
-              <a:gd name="connsiteY6" fmla="*/ 0 h 988601"/>
-              <a:gd name="connsiteX7" fmla="*/ 36334 w 1090011"/>
-              <a:gd name="connsiteY7" fmla="*/ 0 h 988601"/>
-            </a:gdLst>
-            <a:ahLst/>
-            <a:cxnLst>
-              <a:cxn ang="0">
-                <a:pos x="connsiteX0" y="connsiteY0"/>
-              </a:cxn>
-              <a:cxn ang="0">
-                <a:pos x="connsiteX1" y="connsiteY1"/>
-              </a:cxn>
-              <a:cxn ang="0">
-                <a:pos x="connsiteX2" y="connsiteY2"/>
-              </a:cxn>
-              <a:cxn ang="0">
-                <a:pos x="connsiteX3" y="connsiteY3"/>
-              </a:cxn>
-              <a:cxn ang="0">
-                <a:pos x="connsiteX4" y="connsiteY4"/>
-              </a:cxn>
-              <a:cxn ang="0">
-                <a:pos x="connsiteX5" y="connsiteY5"/>
-              </a:cxn>
-              <a:cxn ang="0">
-                <a:pos x="connsiteX6" y="connsiteY6"/>
-              </a:cxn>
-              <a:cxn ang="0">
-                <a:pos x="connsiteX7" y="connsiteY7"/>
-              </a:cxn>
-            </a:cxnLst>
-            <a:rect l="l" t="t" r="r" b="b"/>
-            <a:pathLst>
-              <a:path w="1090011" h="988601">
-                <a:moveTo>
-                  <a:pt x="1053678" y="0"/>
-                </a:moveTo>
-                <a:cubicBezTo>
-                  <a:pt x="1073744" y="0"/>
-                  <a:pt x="1090011" y="0"/>
-                  <a:pt x="1090011" y="0"/>
-                </a:cubicBezTo>
-                <a:lnTo>
-                  <a:pt x="1090011" y="988602"/>
-                </a:lnTo>
-                <a:cubicBezTo>
-                  <a:pt x="1090011" y="988602"/>
-                  <a:pt x="1073744" y="988602"/>
-                  <a:pt x="1053678" y="988602"/>
-                </a:cubicBezTo>
-                <a:lnTo>
-                  <a:pt x="36334" y="988602"/>
-                </a:lnTo>
-                <a:cubicBezTo>
-                  <a:pt x="16267" y="988602"/>
-                  <a:pt x="0" y="988602"/>
-                  <a:pt x="0" y="988602"/>
-                </a:cubicBezTo>
-                <a:lnTo>
-                  <a:pt x="0" y="0"/>
-                </a:lnTo>
-                <a:cubicBezTo>
-                  <a:pt x="0" y="0"/>
-                  <a:pt x="16267" y="0"/>
-                  <a:pt x="36334" y="0"/>
-                </a:cubicBezTo>
-                <a:close/>
-              </a:path>
-            </a:pathLst>
-          </a:custGeom>
-          <a:gradFill>
-            <a:gsLst>
-              <a:gs pos="0">
-                <a:srgbClr val="1B66FF"/>
-              </a:gs>
-              <a:gs pos="50000">
-                <a:srgbClr val="183E98"/>
-              </a:gs>
-              <a:gs pos="100000">
-                <a:srgbClr val="151632"/>
-              </a:gs>
-            </a:gsLst>
-            <a:lin ang="5400000" scaled="1"/>
-          </a:gradFill>
-          <a:ln w="7263" cap="flat">
+        </p:grpSpPr>
+        <p:sp>
+          <p:nvSpPr>
+            <p:cNvPr id="7" name="Freeform 6">
+              <a:extLst>
+                <a:ext uri="{FF2B5EF4-FFF2-40B4-BE49-F238E27FC236}">
+                  <a16:creationId xmlns:a16="http://schemas.microsoft.com/office/drawing/2014/main" id="{96E004EC-5DD7-630E-DD97-73BB105447D9}"/>
+                </a:ext>
+              </a:extLst>
+            </p:cNvPr>
+            <p:cNvSpPr/>
+            <p:nvPr/>
+          </p:nvSpPr>
+          <p:spPr>
+            <a:xfrm flipH="1">
+              <a:off x="4585215" y="4205625"/>
+              <a:ext cx="4083908" cy="14538"/>
+            </a:xfrm>
+            <a:custGeom>
+              <a:avLst/>
+              <a:gdLst>
+                <a:gd name="connsiteX0" fmla="*/ 4076642 w 4083908"/>
+                <a:gd name="connsiteY0" fmla="*/ 14538 h 14538"/>
+                <a:gd name="connsiteX1" fmla="*/ 4083909 w 4083908"/>
+                <a:gd name="connsiteY1" fmla="*/ 7269 h 14538"/>
+                <a:gd name="connsiteX2" fmla="*/ 4076642 w 4083908"/>
+                <a:gd name="connsiteY2" fmla="*/ 0 h 14538"/>
+                <a:gd name="connsiteX3" fmla="*/ 4076642 w 4083908"/>
+                <a:gd name="connsiteY3" fmla="*/ 14538 h 14538"/>
+                <a:gd name="connsiteX4" fmla="*/ 0 w 4083908"/>
+                <a:gd name="connsiteY4" fmla="*/ 14538 h 14538"/>
+                <a:gd name="connsiteX5" fmla="*/ 4076642 w 4083908"/>
+                <a:gd name="connsiteY5" fmla="*/ 14538 h 14538"/>
+                <a:gd name="connsiteX6" fmla="*/ 4076642 w 4083908"/>
+                <a:gd name="connsiteY6" fmla="*/ 0 h 14538"/>
+                <a:gd name="connsiteX7" fmla="*/ 0 w 4083908"/>
+                <a:gd name="connsiteY7" fmla="*/ 0 h 14538"/>
+                <a:gd name="connsiteX8" fmla="*/ 0 w 4083908"/>
+                <a:gd name="connsiteY8" fmla="*/ 14538 h 14538"/>
+              </a:gdLst>
+              <a:ahLst/>
+              <a:cxnLst>
+                <a:cxn ang="0">
+                  <a:pos x="connsiteX0" y="connsiteY0"/>
+                </a:cxn>
+                <a:cxn ang="0">
+                  <a:pos x="connsiteX1" y="connsiteY1"/>
+                </a:cxn>
+                <a:cxn ang="0">
+                  <a:pos x="connsiteX2" y="connsiteY2"/>
+                </a:cxn>
+                <a:cxn ang="0">
+                  <a:pos x="connsiteX3" y="connsiteY3"/>
+                </a:cxn>
+                <a:cxn ang="0">
+                  <a:pos x="connsiteX4" y="connsiteY4"/>
+                </a:cxn>
+                <a:cxn ang="0">
+                  <a:pos x="connsiteX5" y="connsiteY5"/>
+                </a:cxn>
+                <a:cxn ang="0">
+                  <a:pos x="connsiteX6" y="connsiteY6"/>
+                </a:cxn>
+                <a:cxn ang="0">
+                  <a:pos x="connsiteX7" y="connsiteY7"/>
+                </a:cxn>
+                <a:cxn ang="0">
+                  <a:pos x="connsiteX8" y="connsiteY8"/>
+                </a:cxn>
+              </a:cxnLst>
+              <a:rect l="l" t="t" r="r" b="b"/>
+              <a:pathLst>
+                <a:path w="4083908" h="14538">
+                  <a:moveTo>
+                    <a:pt x="4076642" y="14538"/>
+                  </a:moveTo>
+                  <a:cubicBezTo>
+                    <a:pt x="4080653" y="14538"/>
+                    <a:pt x="4083909" y="11282"/>
+                    <a:pt x="4083909" y="7269"/>
+                  </a:cubicBezTo>
+                  <a:cubicBezTo>
+                    <a:pt x="4083909" y="3257"/>
+                    <a:pt x="4080653" y="0"/>
+                    <a:pt x="4076642" y="0"/>
+                  </a:cubicBezTo>
+                  <a:lnTo>
+                    <a:pt x="4076642" y="14538"/>
+                  </a:lnTo>
+                  <a:close/>
+                  <a:moveTo>
+                    <a:pt x="0" y="14538"/>
+                  </a:moveTo>
+                  <a:lnTo>
+                    <a:pt x="4076642" y="14538"/>
+                  </a:lnTo>
+                  <a:lnTo>
+                    <a:pt x="4076642" y="0"/>
+                  </a:lnTo>
+                  <a:lnTo>
+                    <a:pt x="0" y="0"/>
+                  </a:lnTo>
+                  <a:lnTo>
+                    <a:pt x="0" y="14538"/>
+                  </a:lnTo>
+                  <a:close/>
+                </a:path>
+              </a:pathLst>
+            </a:custGeom>
+            <a:gradFill>
+              <a:gsLst>
+                <a:gs pos="0">
+                  <a:srgbClr val="DF6838"/>
+                </a:gs>
+                <a:gs pos="50000">
+                  <a:srgbClr val="A3A75B"/>
+                </a:gs>
+                <a:gs pos="100000">
+                  <a:srgbClr val="67E77F"/>
+                </a:gs>
+              </a:gsLst>
+              <a:lin ang="0" scaled="1"/>
+            </a:gradFill>
+            <a:ln w="7263" cap="flat">
+              <a:noFill/>
+              <a:prstDash val="solid"/>
+              <a:miter/>
+            </a:ln>
+          </p:spPr>
+          <p:txBody>
+            <a:bodyPr rtlCol="0" anchor="ctr"/>
+            <a:lstStyle/>
+            <a:p>
+              <a:endParaRPr lang="en-US"/>
+            </a:p>
+          </p:txBody>
+        </p:sp>
+        <p:sp>
+          <p:nvSpPr>
+            <p:cNvPr id="63" name="Freeform 62">
+              <a:extLst>
+                <a:ext uri="{FF2B5EF4-FFF2-40B4-BE49-F238E27FC236}">
+                  <a16:creationId xmlns:a16="http://schemas.microsoft.com/office/drawing/2014/main" id="{E09308EB-33D2-D378-2B71-06F03D8AC3BF}"/>
+                </a:ext>
+              </a:extLst>
+            </p:cNvPr>
+            <p:cNvSpPr/>
+            <p:nvPr/>
+          </p:nvSpPr>
+          <p:spPr>
+            <a:xfrm>
+              <a:off x="4399598" y="3991186"/>
+              <a:ext cx="378144" cy="301667"/>
+            </a:xfrm>
+            <a:custGeom>
+              <a:avLst/>
+              <a:gdLst>
+                <a:gd name="connsiteX0" fmla="*/ 184470 w 343767"/>
+                <a:gd name="connsiteY0" fmla="*/ 294400 h 301667"/>
+                <a:gd name="connsiteX1" fmla="*/ 159298 w 343767"/>
+                <a:gd name="connsiteY1" fmla="*/ 294400 h 301667"/>
+                <a:gd name="connsiteX2" fmla="*/ 1966 w 343767"/>
+                <a:gd name="connsiteY2" fmla="*/ 21807 h 301667"/>
+                <a:gd name="connsiteX3" fmla="*/ 14552 w 343767"/>
+                <a:gd name="connsiteY3" fmla="*/ 0 h 301667"/>
+                <a:gd name="connsiteX4" fmla="*/ 329216 w 343767"/>
+                <a:gd name="connsiteY4" fmla="*/ 0 h 301667"/>
+                <a:gd name="connsiteX5" fmla="*/ 341802 w 343767"/>
+                <a:gd name="connsiteY5" fmla="*/ 21807 h 301667"/>
+                <a:gd name="connsiteX6" fmla="*/ 184470 w 343767"/>
+                <a:gd name="connsiteY6" fmla="*/ 294400 h 301667"/>
+              </a:gdLst>
+              <a:ahLst/>
+              <a:cxnLst>
+                <a:cxn ang="0">
+                  <a:pos x="connsiteX0" y="connsiteY0"/>
+                </a:cxn>
+                <a:cxn ang="0">
+                  <a:pos x="connsiteX1" y="connsiteY1"/>
+                </a:cxn>
+                <a:cxn ang="0">
+                  <a:pos x="connsiteX2" y="connsiteY2"/>
+                </a:cxn>
+                <a:cxn ang="0">
+                  <a:pos x="connsiteX3" y="connsiteY3"/>
+                </a:cxn>
+                <a:cxn ang="0">
+                  <a:pos x="connsiteX4" y="connsiteY4"/>
+                </a:cxn>
+                <a:cxn ang="0">
+                  <a:pos x="connsiteX5" y="connsiteY5"/>
+                </a:cxn>
+                <a:cxn ang="0">
+                  <a:pos x="connsiteX6" y="connsiteY6"/>
+                </a:cxn>
+              </a:cxnLst>
+              <a:rect l="l" t="t" r="r" b="b"/>
+              <a:pathLst>
+                <a:path w="343767" h="301667">
+                  <a:moveTo>
+                    <a:pt x="184470" y="294400"/>
+                  </a:moveTo>
+                  <a:cubicBezTo>
+                    <a:pt x="178874" y="304090"/>
+                    <a:pt x="164894" y="304090"/>
+                    <a:pt x="159298" y="294400"/>
+                  </a:cubicBezTo>
+                  <a:lnTo>
+                    <a:pt x="1966" y="21807"/>
+                  </a:lnTo>
+                  <a:cubicBezTo>
+                    <a:pt x="-3622" y="12118"/>
+                    <a:pt x="3368" y="0"/>
+                    <a:pt x="14552" y="0"/>
+                  </a:cubicBezTo>
+                  <a:lnTo>
+                    <a:pt x="329216" y="0"/>
+                  </a:lnTo>
+                  <a:cubicBezTo>
+                    <a:pt x="340400" y="0"/>
+                    <a:pt x="347390" y="12118"/>
+                    <a:pt x="341802" y="21807"/>
+                  </a:cubicBezTo>
+                  <a:lnTo>
+                    <a:pt x="184470" y="294400"/>
+                  </a:lnTo>
+                  <a:close/>
+                </a:path>
+              </a:pathLst>
+            </a:custGeom>
+            <a:solidFill>
+              <a:srgbClr val="0066FF"/>
+            </a:solidFill>
+            <a:ln w="7263" cap="flat">
+              <a:noFill/>
+              <a:prstDash val="solid"/>
+              <a:miter/>
+            </a:ln>
+          </p:spPr>
+          <p:txBody>
+            <a:bodyPr lIns="0" rIns="0" rtlCol="0" anchor="ctr"/>
+            <a:lstStyle/>
+            <a:p>
+              <a:pPr algn="ctr"/>
+              <a:r>
+                <a:rPr lang="en-US" sz="1000" b="1">
+                  <a:solidFill>
+                    <a:srgbClr val="0066FF"/>
+                  </a:solidFill>
+                </a:rPr>
+                <a:t>MARKER_MODERNIZATION_EFFORT</a:t>
+              </a:r>
+            </a:p>
+          </p:txBody>
+        </p:sp>
+        <p:sp>
+          <p:nvSpPr>
+            <p:cNvPr id="80" name="TextBox 79">
+              <a:extLst>
+                <a:ext uri="{FF2B5EF4-FFF2-40B4-BE49-F238E27FC236}">
+                  <a16:creationId xmlns:a16="http://schemas.microsoft.com/office/drawing/2014/main" id="{F80FF2A0-2A6E-3FEB-983A-AF96E9799909}"/>
+                </a:ext>
+              </a:extLst>
+            </p:cNvPr>
+            <p:cNvSpPr txBox="1"/>
+            <p:nvPr/>
+          </p:nvSpPr>
+          <p:spPr>
+            <a:xfrm>
+              <a:off x="8212338" y="4211799"/>
+              <a:ext cx="476562" cy="289438"/>
+            </a:xfrm>
+            <a:prstGeom prst="rect">
+              <a:avLst/>
+            </a:prstGeom>
             <a:noFill/>
-            <a:prstDash val="solid"/>
-            <a:miter/>
-          </a:ln>
-        </p:spPr>
-        <p:txBody>
-          <a:bodyPr rtlCol="0" anchor="ctr"/>
-          <a:lstStyle/>
-          <a:p>
-            <a:endParaRPr lang="en-US"/>
-          </a:p>
-        </p:txBody>
-      </p:sp>
-      <p:sp>
-        <p:nvSpPr>
-          <p:cNvPr id="29" name="Freeform 28">
+          </p:spPr>
+          <p:txBody>
+            <a:bodyPr wrap="none" lIns="90000" rtlCol="0" anchor="t">
+              <a:spAutoFit/>
+            </a:bodyPr>
+            <a:lstStyle/>
+            <a:p>
+              <a:pPr algn="r">
+                <a:lnSpc>
+                  <a:spcPct val="113000"/>
+                </a:lnSpc>
+              </a:pPr>
+              <a:r>
+                <a:rPr lang="en-US" sz="1200" b="1" dirty="0" err="1">
+                  <a:solidFill>
+                    <a:srgbClr val="E17526"/>
+                  </a:solidFill>
+                </a:rPr>
+                <a:t>High</a:t>
+              </a:r>
+            </a:p>
+          </p:txBody>
+        </p:sp>
+        <p:grpSp>
+          <p:nvGrpSpPr>
+            <p:cNvPr id="12" name="Group 11">
+              <a:extLst>
+                <a:ext uri="{FF2B5EF4-FFF2-40B4-BE49-F238E27FC236}">
+                  <a16:creationId xmlns:a16="http://schemas.microsoft.com/office/drawing/2014/main" id="{3F723BDF-6B35-4615-25B1-A780E66F8EDE}"/>
+                </a:ext>
+              </a:extLst>
+            </p:cNvPr>
+            <p:cNvGrpSpPr/>
+            <p:nvPr/>
+          </p:nvGrpSpPr>
+          <p:grpSpPr>
+            <a:xfrm>
+              <a:off x="3175467" y="3718593"/>
+              <a:ext cx="1090012" cy="988601"/>
+              <a:chOff x="3175467" y="3718593"/>
+              <a:chExt cx="1090012" cy="988601"/>
+            </a:xfrm>
+          </p:grpSpPr>
+          <p:sp>
+            <p:nvSpPr>
+              <p:cNvPr id="31" name="Freeform 30">
+                <a:extLst>
+                  <a:ext uri="{FF2B5EF4-FFF2-40B4-BE49-F238E27FC236}">
+                    <a16:creationId xmlns:a16="http://schemas.microsoft.com/office/drawing/2014/main" id="{2D8219B0-F329-793E-CC73-F3C72202561E}"/>
+                  </a:ext>
+                </a:extLst>
+              </p:cNvPr>
+              <p:cNvSpPr/>
+              <p:nvPr/>
+            </p:nvSpPr>
+            <p:spPr>
+              <a:xfrm>
+                <a:off x="3175467" y="3718593"/>
+                <a:ext cx="1090011" cy="988601"/>
+              </a:xfrm>
+              <a:custGeom>
+                <a:avLst/>
+                <a:gdLst>
+                  <a:gd name="connsiteX0" fmla="*/ 1053678 w 1090011"/>
+                  <a:gd name="connsiteY0" fmla="*/ 0 h 988601"/>
+                  <a:gd name="connsiteX1" fmla="*/ 1090011 w 1090011"/>
+                  <a:gd name="connsiteY1" fmla="*/ 0 h 988601"/>
+                  <a:gd name="connsiteX2" fmla="*/ 1090011 w 1090011"/>
+                  <a:gd name="connsiteY2" fmla="*/ 988602 h 988601"/>
+                  <a:gd name="connsiteX3" fmla="*/ 1053678 w 1090011"/>
+                  <a:gd name="connsiteY3" fmla="*/ 988602 h 988601"/>
+                  <a:gd name="connsiteX4" fmla="*/ 36334 w 1090011"/>
+                  <a:gd name="connsiteY4" fmla="*/ 988602 h 988601"/>
+                  <a:gd name="connsiteX5" fmla="*/ 0 w 1090011"/>
+                  <a:gd name="connsiteY5" fmla="*/ 988602 h 988601"/>
+                  <a:gd name="connsiteX6" fmla="*/ 0 w 1090011"/>
+                  <a:gd name="connsiteY6" fmla="*/ 0 h 988601"/>
+                  <a:gd name="connsiteX7" fmla="*/ 36334 w 1090011"/>
+                  <a:gd name="connsiteY7" fmla="*/ 0 h 988601"/>
+                </a:gdLst>
+                <a:ahLst/>
+                <a:cxnLst>
+                  <a:cxn ang="0">
+                    <a:pos x="connsiteX0" y="connsiteY0"/>
+                  </a:cxn>
+                  <a:cxn ang="0">
+                    <a:pos x="connsiteX1" y="connsiteY1"/>
+                  </a:cxn>
+                  <a:cxn ang="0">
+                    <a:pos x="connsiteX2" y="connsiteY2"/>
+                  </a:cxn>
+                  <a:cxn ang="0">
+                    <a:pos x="connsiteX3" y="connsiteY3"/>
+                  </a:cxn>
+                  <a:cxn ang="0">
+                    <a:pos x="connsiteX4" y="connsiteY4"/>
+                  </a:cxn>
+                  <a:cxn ang="0">
+                    <a:pos x="connsiteX5" y="connsiteY5"/>
+                  </a:cxn>
+                  <a:cxn ang="0">
+                    <a:pos x="connsiteX6" y="connsiteY6"/>
+                  </a:cxn>
+                  <a:cxn ang="0">
+                    <a:pos x="connsiteX7" y="connsiteY7"/>
+                  </a:cxn>
+                </a:cxnLst>
+                <a:rect l="l" t="t" r="r" b="b"/>
+                <a:pathLst>
+                  <a:path w="1090011" h="988601">
+                    <a:moveTo>
+                      <a:pt x="1053678" y="0"/>
+                    </a:moveTo>
+                    <a:cubicBezTo>
+                      <a:pt x="1073744" y="0"/>
+                      <a:pt x="1090011" y="0"/>
+                      <a:pt x="1090011" y="0"/>
+                    </a:cubicBezTo>
+                    <a:lnTo>
+                      <a:pt x="1090011" y="988602"/>
+                    </a:lnTo>
+                    <a:cubicBezTo>
+                      <a:pt x="1090011" y="988602"/>
+                      <a:pt x="1073744" y="988602"/>
+                      <a:pt x="1053678" y="988602"/>
+                    </a:cubicBezTo>
+                    <a:lnTo>
+                      <a:pt x="36334" y="988602"/>
+                    </a:lnTo>
+                    <a:cubicBezTo>
+                      <a:pt x="16267" y="988602"/>
+                      <a:pt x="0" y="988602"/>
+                      <a:pt x="0" y="988602"/>
+                    </a:cubicBezTo>
+                    <a:lnTo>
+                      <a:pt x="0" y="0"/>
+                    </a:lnTo>
+                    <a:cubicBezTo>
+                      <a:pt x="0" y="0"/>
+                      <a:pt x="16267" y="0"/>
+                      <a:pt x="36334" y="0"/>
+                    </a:cubicBezTo>
+                    <a:close/>
+                  </a:path>
+                </a:pathLst>
+              </a:custGeom>
+              <a:gradFill>
+                <a:gsLst>
+                  <a:gs pos="0">
+                    <a:srgbClr val="151632"/>
+                  </a:gs>
+                  <a:gs pos="50000">
+                    <a:srgbClr val="183E98"/>
+                  </a:gs>
+                  <a:gs pos="100000">
+                    <a:srgbClr val="1B66FF"/>
+                  </a:gs>
+                </a:gsLst>
+                <a:lin ang="5400000" scaled="1"/>
+              </a:gradFill>
+              <a:ln w="7263" cap="flat">
+                <a:noFill/>
+                <a:prstDash val="solid"/>
+                <a:miter/>
+              </a:ln>
+            </p:spPr>
+            <p:txBody>
+              <a:bodyPr rtlCol="0" anchor="ctr"/>
+              <a:lstStyle/>
+              <a:p>
+                <a:endParaRPr lang="en-US"/>
+              </a:p>
+            </p:txBody>
+          </p:sp>
+          <p:sp>
+            <p:nvSpPr>
+              <p:cNvPr id="74" name="TextBox 73">
+                <a:extLst>
+                  <a:ext uri="{FF2B5EF4-FFF2-40B4-BE49-F238E27FC236}">
+                    <a16:creationId xmlns:a16="http://schemas.microsoft.com/office/drawing/2014/main" id="{8AF88E4A-3FC6-78C6-09AF-810DBCFED102}"/>
+                  </a:ext>
+                </a:extLst>
+              </p:cNvPr>
+              <p:cNvSpPr txBox="1"/>
+              <p:nvPr/>
+            </p:nvSpPr>
+            <p:spPr>
+              <a:xfrm>
+                <a:off x="3175467" y="4416584"/>
+                <a:ext cx="1090012" cy="273023"/>
+              </a:xfrm>
+              <a:prstGeom prst="rect">
+                <a:avLst/>
+              </a:prstGeom>
+              <a:noFill/>
+            </p:spPr>
+            <p:txBody>
+              <a:bodyPr wrap="square" lIns="0" rIns="0" rtlCol="0" anchor="t">
+                <a:spAutoFit/>
+              </a:bodyPr>
+              <a:lstStyle/>
+              <a:p>
+                <a:pPr algn="ctr">
+                  <a:lnSpc>
+                    <a:spcPct val="113000"/>
+                  </a:lnSpc>
+                </a:pPr>
+                <a:r>
+                  <a:rPr lang="en-US" sz="1100" b="1" dirty="0" err="1">
+                    <a:solidFill>
+                      <a:schemeClr val="bg1"/>
+                    </a:solidFill>
+                  </a:rPr>
+                  <a:t>Renovation effort</a:t>
+                </a:r>
+              </a:p>
+            </p:txBody>
+          </p:sp>
+          <p:sp>
+            <p:nvSpPr>
+              <p:cNvPr id="11" name="Freeform 10">
+                <a:extLst>
+                  <a:ext uri="{FF2B5EF4-FFF2-40B4-BE49-F238E27FC236}">
+                    <a16:creationId xmlns:a16="http://schemas.microsoft.com/office/drawing/2014/main" id="{9ED4C63B-3DE4-5CA5-C815-046602139C1B}"/>
+                  </a:ext>
+                </a:extLst>
+              </p:cNvPr>
+              <p:cNvSpPr/>
+              <p:nvPr/>
+            </p:nvSpPr>
+            <p:spPr>
+              <a:xfrm>
+                <a:off x="3582405" y="3877209"/>
+                <a:ext cx="277167" cy="436147"/>
+              </a:xfrm>
+              <a:custGeom>
+                <a:avLst/>
+                <a:gdLst>
+                  <a:gd name="connsiteX0" fmla="*/ 266486 w 277167"/>
+                  <a:gd name="connsiteY0" fmla="*/ 327097 h 436147"/>
+                  <a:gd name="connsiteX1" fmla="*/ 237092 w 277167"/>
+                  <a:gd name="connsiteY1" fmla="*/ 360840 h 436147"/>
+                  <a:gd name="connsiteX2" fmla="*/ 192336 w 277167"/>
+                  <a:gd name="connsiteY2" fmla="*/ 381259 h 436147"/>
+                  <a:gd name="connsiteX3" fmla="*/ 168741 w 277167"/>
+                  <a:gd name="connsiteY3" fmla="*/ 385598 h 436147"/>
+                  <a:gd name="connsiteX4" fmla="*/ 168741 w 277167"/>
+                  <a:gd name="connsiteY4" fmla="*/ 436148 h 436147"/>
+                  <a:gd name="connsiteX5" fmla="*/ 108427 w 277167"/>
+                  <a:gd name="connsiteY5" fmla="*/ 436148 h 436147"/>
+                  <a:gd name="connsiteX6" fmla="*/ 108427 w 277167"/>
+                  <a:gd name="connsiteY6" fmla="*/ 386609 h 436147"/>
+                  <a:gd name="connsiteX7" fmla="*/ 59369 w 277167"/>
+                  <a:gd name="connsiteY7" fmla="*/ 378220 h 436147"/>
+                  <a:gd name="connsiteX8" fmla="*/ 4856 w 277167"/>
+                  <a:gd name="connsiteY8" fmla="*/ 345638 h 436147"/>
+                  <a:gd name="connsiteX9" fmla="*/ 79 w 277167"/>
+                  <a:gd name="connsiteY9" fmla="*/ 338372 h 436147"/>
+                  <a:gd name="connsiteX10" fmla="*/ 2900 w 277167"/>
+                  <a:gd name="connsiteY10" fmla="*/ 330119 h 436147"/>
+                  <a:gd name="connsiteX11" fmla="*/ 33117 w 277167"/>
+                  <a:gd name="connsiteY11" fmla="*/ 299878 h 436147"/>
+                  <a:gd name="connsiteX12" fmla="*/ 45345 w 277167"/>
+                  <a:gd name="connsiteY12" fmla="*/ 298440 h 436147"/>
+                  <a:gd name="connsiteX13" fmla="*/ 85101 w 277167"/>
+                  <a:gd name="connsiteY13" fmla="*/ 322771 h 436147"/>
+                  <a:gd name="connsiteX14" fmla="*/ 136208 w 277167"/>
+                  <a:gd name="connsiteY14" fmla="*/ 329773 h 436147"/>
+                  <a:gd name="connsiteX15" fmla="*/ 189313 w 277167"/>
+                  <a:gd name="connsiteY15" fmla="*/ 318432 h 436147"/>
+                  <a:gd name="connsiteX16" fmla="*/ 210365 w 277167"/>
+                  <a:gd name="connsiteY16" fmla="*/ 282974 h 436147"/>
+                  <a:gd name="connsiteX17" fmla="*/ 200002 w 277167"/>
+                  <a:gd name="connsiteY17" fmla="*/ 255554 h 436147"/>
+                  <a:gd name="connsiteX18" fmla="*/ 164926 w 277167"/>
+                  <a:gd name="connsiteY18" fmla="*/ 242870 h 436147"/>
+                  <a:gd name="connsiteX19" fmla="*/ 110796 w 277167"/>
+                  <a:gd name="connsiteY19" fmla="*/ 238211 h 436147"/>
+                  <a:gd name="connsiteX20" fmla="*/ 36656 w 277167"/>
+                  <a:gd name="connsiteY20" fmla="*/ 211484 h 436147"/>
+                  <a:gd name="connsiteX21" fmla="*/ 10590 w 277167"/>
+                  <a:gd name="connsiteY21" fmla="*/ 144653 h 436147"/>
+                  <a:gd name="connsiteX22" fmla="*/ 20610 w 277167"/>
+                  <a:gd name="connsiteY22" fmla="*/ 100531 h 436147"/>
+                  <a:gd name="connsiteX23" fmla="*/ 48006 w 277167"/>
+                  <a:gd name="connsiteY23" fmla="*/ 67801 h 436147"/>
+                  <a:gd name="connsiteX24" fmla="*/ 88429 w 277167"/>
+                  <a:gd name="connsiteY24" fmla="*/ 47755 h 436147"/>
+                  <a:gd name="connsiteX25" fmla="*/ 108427 w 277167"/>
+                  <a:gd name="connsiteY25" fmla="*/ 43549 h 436147"/>
+                  <a:gd name="connsiteX26" fmla="*/ 108427 w 277167"/>
+                  <a:gd name="connsiteY26" fmla="*/ 0 h 436147"/>
+                  <a:gd name="connsiteX27" fmla="*/ 168741 w 277167"/>
+                  <a:gd name="connsiteY27" fmla="*/ 0 h 436147"/>
+                  <a:gd name="connsiteX28" fmla="*/ 168741 w 277167"/>
+                  <a:gd name="connsiteY28" fmla="*/ 42673 h 436147"/>
+                  <a:gd name="connsiteX29" fmla="*/ 208686 w 277167"/>
+                  <a:gd name="connsiteY29" fmla="*/ 49754 h 436147"/>
+                  <a:gd name="connsiteX30" fmla="*/ 252061 w 277167"/>
+                  <a:gd name="connsiteY30" fmla="*/ 72914 h 436147"/>
+                  <a:gd name="connsiteX31" fmla="*/ 257213 w 277167"/>
+                  <a:gd name="connsiteY31" fmla="*/ 80155 h 436147"/>
+                  <a:gd name="connsiteX32" fmla="*/ 254474 w 277167"/>
+                  <a:gd name="connsiteY32" fmla="*/ 88647 h 436147"/>
+                  <a:gd name="connsiteX33" fmla="*/ 226134 w 277167"/>
+                  <a:gd name="connsiteY33" fmla="*/ 117423 h 436147"/>
+                  <a:gd name="connsiteX34" fmla="*/ 214580 w 277167"/>
+                  <a:gd name="connsiteY34" fmla="*/ 119287 h 436147"/>
+                  <a:gd name="connsiteX35" fmla="*/ 183296 w 277167"/>
+                  <a:gd name="connsiteY35" fmla="*/ 103555 h 436147"/>
+                  <a:gd name="connsiteX36" fmla="*/ 137552 w 277167"/>
+                  <a:gd name="connsiteY36" fmla="*/ 97857 h 436147"/>
+                  <a:gd name="connsiteX37" fmla="*/ 91118 w 277167"/>
+                  <a:gd name="connsiteY37" fmla="*/ 109876 h 436147"/>
+                  <a:gd name="connsiteX38" fmla="*/ 76112 w 277167"/>
+                  <a:gd name="connsiteY38" fmla="*/ 141288 h 436147"/>
+                  <a:gd name="connsiteX39" fmla="*/ 86779 w 277167"/>
+                  <a:gd name="connsiteY39" fmla="*/ 168001 h 436147"/>
+                  <a:gd name="connsiteX40" fmla="*/ 122851 w 277167"/>
+                  <a:gd name="connsiteY40" fmla="*/ 180034 h 436147"/>
+                  <a:gd name="connsiteX41" fmla="*/ 170289 w 277167"/>
+                  <a:gd name="connsiteY41" fmla="*/ 184080 h 436147"/>
+                  <a:gd name="connsiteX42" fmla="*/ 250107 w 277167"/>
+                  <a:gd name="connsiteY42" fmla="*/ 212125 h 436147"/>
+                  <a:gd name="connsiteX43" fmla="*/ 277168 w 277167"/>
+                  <a:gd name="connsiteY43" fmla="*/ 280286 h 436147"/>
+                  <a:gd name="connsiteX44" fmla="*/ 266486 w 277167"/>
+                  <a:gd name="connsiteY44" fmla="*/ 327097 h 436147"/>
+                </a:gdLst>
+                <a:ahLst/>
+                <a:cxnLst>
+                  <a:cxn ang="0">
+                    <a:pos x="connsiteX0" y="connsiteY0"/>
+                  </a:cxn>
+                  <a:cxn ang="0">
+                    <a:pos x="connsiteX1" y="connsiteY1"/>
+                  </a:cxn>
+                  <a:cxn ang="0">
+                    <a:pos x="connsiteX2" y="connsiteY2"/>
+                  </a:cxn>
+                  <a:cxn ang="0">
+                    <a:pos x="connsiteX3" y="connsiteY3"/>
+                  </a:cxn>
+                  <a:cxn ang="0">
+                    <a:pos x="connsiteX4" y="connsiteY4"/>
+                  </a:cxn>
+                  <a:cxn ang="0">
+                    <a:pos x="connsiteX5" y="connsiteY5"/>
+                  </a:cxn>
+                  <a:cxn ang="0">
+                    <a:pos x="connsiteX6" y="connsiteY6"/>
+                  </a:cxn>
+                  <a:cxn ang="0">
+                    <a:pos x="connsiteX7" y="connsiteY7"/>
+                  </a:cxn>
+                  <a:cxn ang="0">
+                    <a:pos x="connsiteX8" y="connsiteY8"/>
+                  </a:cxn>
+                  <a:cxn ang="0">
+                    <a:pos x="connsiteX9" y="connsiteY9"/>
+                  </a:cxn>
+                  <a:cxn ang="0">
+                    <a:pos x="connsiteX10" y="connsiteY10"/>
+                  </a:cxn>
+                  <a:cxn ang="0">
+                    <a:pos x="connsiteX11" y="connsiteY11"/>
+                  </a:cxn>
+                  <a:cxn ang="0">
+                    <a:pos x="connsiteX12" y="connsiteY12"/>
+                  </a:cxn>
+                  <a:cxn ang="0">
+                    <a:pos x="connsiteX13" y="connsiteY13"/>
+                  </a:cxn>
+                  <a:cxn ang="0">
+                    <a:pos x="connsiteX14" y="connsiteY14"/>
+                  </a:cxn>
+                  <a:cxn ang="0">
+                    <a:pos x="connsiteX15" y="connsiteY15"/>
+                  </a:cxn>
+                  <a:cxn ang="0">
+                    <a:pos x="connsiteX16" y="connsiteY16"/>
+                  </a:cxn>
+                  <a:cxn ang="0">
+                    <a:pos x="connsiteX17" y="connsiteY17"/>
+                  </a:cxn>
+                  <a:cxn ang="0">
+                    <a:pos x="connsiteX18" y="connsiteY18"/>
+                  </a:cxn>
+                  <a:cxn ang="0">
+                    <a:pos x="connsiteX19" y="connsiteY19"/>
+                  </a:cxn>
+                  <a:cxn ang="0">
+                    <a:pos x="connsiteX20" y="connsiteY20"/>
+                  </a:cxn>
+                  <a:cxn ang="0">
+                    <a:pos x="connsiteX21" y="connsiteY21"/>
+                  </a:cxn>
+                  <a:cxn ang="0">
+                    <a:pos x="connsiteX22" y="connsiteY22"/>
+                  </a:cxn>
+                  <a:cxn ang="0">
+                    <a:pos x="connsiteX23" y="connsiteY23"/>
+                  </a:cxn>
+                  <a:cxn ang="0">
+                    <a:pos x="connsiteX24" y="connsiteY24"/>
+                  </a:cxn>
+                  <a:cxn ang="0">
+                    <a:pos x="connsiteX25" y="connsiteY25"/>
+                  </a:cxn>
+                  <a:cxn ang="0">
+                    <a:pos x="connsiteX26" y="connsiteY26"/>
+                  </a:cxn>
+                  <a:cxn ang="0">
+                    <a:pos x="connsiteX27" y="connsiteY27"/>
+                  </a:cxn>
+                  <a:cxn ang="0">
+                    <a:pos x="connsiteX28" y="connsiteY28"/>
+                  </a:cxn>
+                  <a:cxn ang="0">
+                    <a:pos x="connsiteX29" y="connsiteY29"/>
+                  </a:cxn>
+                  <a:cxn ang="0">
+                    <a:pos x="connsiteX30" y="connsiteY30"/>
+                  </a:cxn>
+                  <a:cxn ang="0">
+                    <a:pos x="connsiteX31" y="connsiteY31"/>
+                  </a:cxn>
+                  <a:cxn ang="0">
+                    <a:pos x="connsiteX32" y="connsiteY32"/>
+                  </a:cxn>
+                  <a:cxn ang="0">
+                    <a:pos x="connsiteX33" y="connsiteY33"/>
+                  </a:cxn>
+                  <a:cxn ang="0">
+                    <a:pos x="connsiteX34" y="connsiteY34"/>
+                  </a:cxn>
+                  <a:cxn ang="0">
+                    <a:pos x="connsiteX35" y="connsiteY35"/>
+                  </a:cxn>
+                  <a:cxn ang="0">
+                    <a:pos x="connsiteX36" y="connsiteY36"/>
+                  </a:cxn>
+                  <a:cxn ang="0">
+                    <a:pos x="connsiteX37" y="connsiteY37"/>
+                  </a:cxn>
+                  <a:cxn ang="0">
+                    <a:pos x="connsiteX38" y="connsiteY38"/>
+                  </a:cxn>
+                  <a:cxn ang="0">
+                    <a:pos x="connsiteX39" y="connsiteY39"/>
+                  </a:cxn>
+                  <a:cxn ang="0">
+                    <a:pos x="connsiteX40" y="connsiteY40"/>
+                  </a:cxn>
+                  <a:cxn ang="0">
+                    <a:pos x="connsiteX41" y="connsiteY41"/>
+                  </a:cxn>
+                  <a:cxn ang="0">
+                    <a:pos x="connsiteX42" y="connsiteY42"/>
+                  </a:cxn>
+                  <a:cxn ang="0">
+                    <a:pos x="connsiteX43" y="connsiteY43"/>
+                  </a:cxn>
+                  <a:cxn ang="0">
+                    <a:pos x="connsiteX44" y="connsiteY44"/>
+                  </a:cxn>
+                </a:cxnLst>
+                <a:rect l="l" t="t" r="r" b="b"/>
+                <a:pathLst>
+                  <a:path w="277167" h="436147">
+                    <a:moveTo>
+                      <a:pt x="266486" y="327097"/>
+                    </a:moveTo>
+                    <a:cubicBezTo>
+                      <a:pt x="259343" y="340501"/>
+                      <a:pt x="249525" y="351681"/>
+                      <a:pt x="237092" y="360840"/>
+                    </a:cubicBezTo>
+                    <a:cubicBezTo>
+                      <a:pt x="224615" y="369970"/>
+                      <a:pt x="209682" y="376774"/>
+                      <a:pt x="192336" y="381259"/>
+                    </a:cubicBezTo>
+                    <a:cubicBezTo>
+                      <a:pt x="184750" y="383170"/>
+                      <a:pt x="176807" y="384508"/>
+                      <a:pt x="168741" y="385598"/>
+                    </a:cubicBezTo>
+                    <a:lnTo>
+                      <a:pt x="168741" y="436148"/>
+                    </a:lnTo>
+                    <a:lnTo>
+                      <a:pt x="108427" y="436148"/>
+                    </a:lnTo>
+                    <a:lnTo>
+                      <a:pt x="108427" y="386609"/>
+                    </a:lnTo>
+                    <a:cubicBezTo>
+                      <a:pt x="91248" y="385155"/>
+                      <a:pt x="74833" y="382480"/>
+                      <a:pt x="59369" y="378220"/>
+                    </a:cubicBezTo>
+                    <a:cubicBezTo>
+                      <a:pt x="35765" y="371751"/>
+                      <a:pt x="4856" y="345638"/>
+                      <a:pt x="4856" y="345638"/>
+                    </a:cubicBezTo>
+                    <a:cubicBezTo>
+                      <a:pt x="2208" y="344094"/>
+                      <a:pt x="451" y="341379"/>
+                      <a:pt x="79" y="338372"/>
+                    </a:cubicBezTo>
+                    <a:cubicBezTo>
+                      <a:pt x="-307" y="335337"/>
+                      <a:pt x="732" y="332276"/>
+                      <a:pt x="2900" y="330119"/>
+                    </a:cubicBezTo>
+                    <a:lnTo>
+                      <a:pt x="33117" y="299878"/>
+                    </a:lnTo>
+                    <a:cubicBezTo>
+                      <a:pt x="36377" y="296657"/>
+                      <a:pt x="41434" y="296045"/>
+                      <a:pt x="45345" y="298440"/>
+                    </a:cubicBezTo>
+                    <a:cubicBezTo>
+                      <a:pt x="45345" y="298440"/>
+                      <a:pt x="67966" y="318086"/>
+                      <a:pt x="85101" y="322771"/>
+                    </a:cubicBezTo>
+                    <a:cubicBezTo>
+                      <a:pt x="102243" y="327430"/>
+                      <a:pt x="119247" y="329773"/>
+                      <a:pt x="136208" y="329773"/>
+                    </a:cubicBezTo>
+                    <a:cubicBezTo>
+                      <a:pt x="157608" y="329773"/>
+                      <a:pt x="175288" y="325992"/>
+                      <a:pt x="189313" y="318432"/>
+                    </a:cubicBezTo>
+                    <a:cubicBezTo>
+                      <a:pt x="203367" y="310819"/>
+                      <a:pt x="210365" y="299053"/>
+                      <a:pt x="210365" y="282974"/>
+                    </a:cubicBezTo>
+                    <a:cubicBezTo>
+                      <a:pt x="210365" y="271394"/>
+                      <a:pt x="206935" y="262263"/>
+                      <a:pt x="200002" y="255554"/>
+                    </a:cubicBezTo>
+                    <a:cubicBezTo>
+                      <a:pt x="193092" y="248899"/>
+                      <a:pt x="181414" y="244707"/>
+                      <a:pt x="164926" y="242870"/>
+                    </a:cubicBezTo>
+                    <a:lnTo>
+                      <a:pt x="110796" y="238211"/>
+                    </a:lnTo>
+                    <a:cubicBezTo>
+                      <a:pt x="78742" y="235083"/>
+                      <a:pt x="54021" y="226138"/>
+                      <a:pt x="36656" y="211484"/>
+                    </a:cubicBezTo>
+                    <a:cubicBezTo>
+                      <a:pt x="19239" y="196776"/>
+                      <a:pt x="10590" y="174469"/>
+                      <a:pt x="10590" y="144653"/>
+                    </a:cubicBezTo>
+                    <a:cubicBezTo>
+                      <a:pt x="10590" y="128149"/>
+                      <a:pt x="13916" y="113454"/>
+                      <a:pt x="20610" y="100531"/>
+                    </a:cubicBezTo>
+                    <a:cubicBezTo>
+                      <a:pt x="27316" y="87606"/>
+                      <a:pt x="36417" y="76692"/>
+                      <a:pt x="48006" y="67801"/>
+                    </a:cubicBezTo>
+                    <a:cubicBezTo>
+                      <a:pt x="59580" y="58883"/>
+                      <a:pt x="73074" y="52200"/>
+                      <a:pt x="88429" y="47755"/>
+                    </a:cubicBezTo>
+                    <a:cubicBezTo>
+                      <a:pt x="94860" y="45891"/>
+                      <a:pt x="101589" y="44667"/>
+                      <a:pt x="108427" y="43549"/>
+                    </a:cubicBezTo>
+                    <a:lnTo>
+                      <a:pt x="108427" y="0"/>
+                    </a:lnTo>
+                    <a:lnTo>
+                      <a:pt x="168741" y="0"/>
+                    </a:lnTo>
+                    <a:lnTo>
+                      <a:pt x="168741" y="42673"/>
+                    </a:lnTo>
+                    <a:cubicBezTo>
+                      <a:pt x="182824" y="44057"/>
+                      <a:pt x="196216" y="46320"/>
+                      <a:pt x="208686" y="49754"/>
+                    </a:cubicBezTo>
+                    <a:cubicBezTo>
+                      <a:pt x="229840" y="55530"/>
+                      <a:pt x="252061" y="72914"/>
+                      <a:pt x="252061" y="72914"/>
+                    </a:cubicBezTo>
+                    <a:cubicBezTo>
+                      <a:pt x="254845" y="74352"/>
+                      <a:pt x="256734" y="77067"/>
+                      <a:pt x="257213" y="80155"/>
+                    </a:cubicBezTo>
+                    <a:cubicBezTo>
+                      <a:pt x="257693" y="83296"/>
+                      <a:pt x="256669" y="86385"/>
+                      <a:pt x="254474" y="88647"/>
+                    </a:cubicBezTo>
+                    <a:lnTo>
+                      <a:pt x="226134" y="117423"/>
+                    </a:lnTo>
+                    <a:cubicBezTo>
+                      <a:pt x="223111" y="120485"/>
+                      <a:pt x="218438" y="121283"/>
+                      <a:pt x="214580" y="119287"/>
+                    </a:cubicBezTo>
+                    <a:cubicBezTo>
+                      <a:pt x="214580" y="119287"/>
+                      <a:pt x="197801" y="107335"/>
+                      <a:pt x="183296" y="103555"/>
+                    </a:cubicBezTo>
+                    <a:cubicBezTo>
+                      <a:pt x="168806" y="99774"/>
+                      <a:pt x="153590" y="97857"/>
+                      <a:pt x="137552" y="97857"/>
+                    </a:cubicBezTo>
+                    <a:cubicBezTo>
+                      <a:pt x="116595" y="97857"/>
+                      <a:pt x="101109" y="101877"/>
+                      <a:pt x="91118" y="109876"/>
+                    </a:cubicBezTo>
+                    <a:cubicBezTo>
+                      <a:pt x="81082" y="117929"/>
+                      <a:pt x="76112" y="128390"/>
+                      <a:pt x="76112" y="141288"/>
+                    </a:cubicBezTo>
+                    <a:cubicBezTo>
+                      <a:pt x="76112" y="152908"/>
+                      <a:pt x="79607" y="161799"/>
+                      <a:pt x="86779" y="168001"/>
+                    </a:cubicBezTo>
+                    <a:cubicBezTo>
+                      <a:pt x="93901" y="174257"/>
+                      <a:pt x="105913" y="178316"/>
+                      <a:pt x="122851" y="180034"/>
+                    </a:cubicBezTo>
+                    <a:lnTo>
+                      <a:pt x="170289" y="184080"/>
+                    </a:lnTo>
+                    <a:cubicBezTo>
+                      <a:pt x="205453" y="187195"/>
+                      <a:pt x="232078" y="196538"/>
+                      <a:pt x="250107" y="212125"/>
+                    </a:cubicBezTo>
+                    <a:cubicBezTo>
+                      <a:pt x="268165" y="227737"/>
+                      <a:pt x="277168" y="250472"/>
+                      <a:pt x="277168" y="280286"/>
+                    </a:cubicBezTo>
+                    <a:cubicBezTo>
+                      <a:pt x="277175" y="298162"/>
+                      <a:pt x="273607" y="313720"/>
+                      <a:pt x="266486" y="327097"/>
+                    </a:cubicBezTo>
+                    <a:close/>
+                  </a:path>
+                </a:pathLst>
+              </a:custGeom>
+              <a:noFill/>
+              <a:ln w="7263" cap="flat">
+                <a:solidFill>
+                  <a:srgbClr val="FFFFFF"/>
+                </a:solidFill>
+                <a:prstDash val="solid"/>
+                <a:miter/>
+              </a:ln>
+            </p:spPr>
+            <p:txBody>
+              <a:bodyPr rtlCol="0" anchor="ctr"/>
+              <a:lstStyle/>
+              <a:p>
+                <a:endParaRPr lang="en-US"/>
+              </a:p>
+            </p:txBody>
+          </p:sp>
+        </p:grpSp>
+        <p:sp>
+          <p:nvSpPr>
+            <p:cNvPr id="77" name="TextBox 76">
+              <a:extLst>
+                <a:ext uri="{FF2B5EF4-FFF2-40B4-BE49-F238E27FC236}">
+                  <a16:creationId xmlns:a16="http://schemas.microsoft.com/office/drawing/2014/main" id="{F7F66163-B57E-3B36-7B32-0E916195F142}"/>
+                </a:ext>
+              </a:extLst>
+            </p:cNvPr>
+            <p:cNvSpPr txBox="1"/>
+            <p:nvPr/>
+          </p:nvSpPr>
+          <p:spPr>
+            <a:xfrm>
+              <a:off x="4481963" y="4211799"/>
+              <a:ext cx="447387" cy="289438"/>
+            </a:xfrm>
+            <a:prstGeom prst="rect">
+              <a:avLst/>
+            </a:prstGeom>
+            <a:noFill/>
+          </p:spPr>
+          <p:txBody>
+            <a:bodyPr wrap="none" lIns="90000" rtlCol="0" anchor="t">
+              <a:spAutoFit/>
+            </a:bodyPr>
+            <a:lstStyle/>
+            <a:p>
+              <a:pPr algn="l">
+                <a:lnSpc>
+                  <a:spcPct val="113000"/>
+                </a:lnSpc>
+              </a:pPr>
+              <a:r>
+                <a:rPr lang="en-US" sz="1200" b="1" dirty="0" err="1">
+                  <a:solidFill>
+                    <a:srgbClr val="67E77F"/>
+                  </a:solidFill>
+                </a:rPr>
+                <a:t>Low</a:t>
+              </a:r>
+            </a:p>
+          </p:txBody>
+        </p:sp>
+      </p:grpSp>
+      <p:grpSp>
+        <p:nvGrpSpPr>
+          <p:cNvPr id="16" name="Group 15">
             <a:extLst>
               <a:ext uri="{FF2B5EF4-FFF2-40B4-BE49-F238E27FC236}">
-                <a16:creationId xmlns:a16="http://schemas.microsoft.com/office/drawing/2014/main" id="{25F55748-003C-F3CA-BDD3-09DCDC24C4FF}"/>
+                <a16:creationId xmlns:a16="http://schemas.microsoft.com/office/drawing/2014/main" id="{301AA58A-1827-0E81-71E9-3143BF0EBE18}"/>
               </a:ext>
             </a:extLst>
           </p:cNvPr>
-          <p:cNvSpPr/>
+          <p:cNvGrpSpPr/>
           <p:nvPr/>
-        </p:nvSpPr>
-        <p:spPr>
+        </p:nvGrpSpPr>
+        <p:grpSpPr>
           <a:xfrm>
-            <a:off x="3175467" y="2538141"/>
-            <a:ext cx="1090011" cy="995870"/>
+            <a:off x="3175467" y="2989100"/>
+            <a:ext cx="5513433" cy="988601"/>
+            <a:chOff x="3175467" y="2555533"/>
+            <a:chExt cx="5513433" cy="988601"/>
           </a:xfrm>
-          <a:custGeom>
-            <a:avLst/>
-            <a:gdLst>
-              <a:gd name="connsiteX0" fmla="*/ 1053678 w 1090011"/>
-              <a:gd name="connsiteY0" fmla="*/ 0 h 995870"/>
-              <a:gd name="connsiteX1" fmla="*/ 1090011 w 1090011"/>
-              <a:gd name="connsiteY1" fmla="*/ 0 h 995870"/>
-              <a:gd name="connsiteX2" fmla="*/ 1090011 w 1090011"/>
-              <a:gd name="connsiteY2" fmla="*/ 995871 h 995870"/>
-              <a:gd name="connsiteX3" fmla="*/ 1053678 w 1090011"/>
-              <a:gd name="connsiteY3" fmla="*/ 995871 h 995870"/>
-              <a:gd name="connsiteX4" fmla="*/ 36334 w 1090011"/>
-              <a:gd name="connsiteY4" fmla="*/ 995871 h 995870"/>
-              <a:gd name="connsiteX5" fmla="*/ 0 w 1090011"/>
-              <a:gd name="connsiteY5" fmla="*/ 995871 h 995870"/>
-              <a:gd name="connsiteX6" fmla="*/ 0 w 1090011"/>
-              <a:gd name="connsiteY6" fmla="*/ 0 h 995870"/>
-              <a:gd name="connsiteX7" fmla="*/ 36334 w 1090011"/>
-              <a:gd name="connsiteY7" fmla="*/ 0 h 995870"/>
-            </a:gdLst>
-            <a:ahLst/>
-            <a:cxnLst>
-              <a:cxn ang="0">
-                <a:pos x="connsiteX0" y="connsiteY0"/>
-              </a:cxn>
-              <a:cxn ang="0">
-                <a:pos x="connsiteX1" y="connsiteY1"/>
-              </a:cxn>
-              <a:cxn ang="0">
-                <a:pos x="connsiteX2" y="connsiteY2"/>
-              </a:cxn>
-              <a:cxn ang="0">
-                <a:pos x="connsiteX3" y="connsiteY3"/>
-              </a:cxn>
-              <a:cxn ang="0">
-                <a:pos x="connsiteX4" y="connsiteY4"/>
-              </a:cxn>
-              <a:cxn ang="0">
-                <a:pos x="connsiteX5" y="connsiteY5"/>
-              </a:cxn>
-              <a:cxn ang="0">
-                <a:pos x="connsiteX6" y="connsiteY6"/>
-              </a:cxn>
-              <a:cxn ang="0">
-                <a:pos x="connsiteX7" y="connsiteY7"/>
-              </a:cxn>
-            </a:cxnLst>
-            <a:rect l="l" t="t" r="r" b="b"/>
-            <a:pathLst>
-              <a:path w="1090011" h="995870">
-                <a:moveTo>
-                  <a:pt x="1053678" y="0"/>
-                </a:moveTo>
-                <a:cubicBezTo>
-                  <a:pt x="1073744" y="0"/>
-                  <a:pt x="1090011" y="0"/>
-                  <a:pt x="1090011" y="0"/>
-                </a:cubicBezTo>
-                <a:lnTo>
-                  <a:pt x="1090011" y="995871"/>
-                </a:lnTo>
-                <a:cubicBezTo>
-                  <a:pt x="1090011" y="995871"/>
-                  <a:pt x="1073744" y="995871"/>
-                  <a:pt x="1053678" y="995871"/>
-                </a:cubicBezTo>
-                <a:lnTo>
-                  <a:pt x="36334" y="995871"/>
-                </a:lnTo>
-                <a:cubicBezTo>
-                  <a:pt x="16267" y="995871"/>
-                  <a:pt x="0" y="995871"/>
-                  <a:pt x="0" y="995871"/>
-                </a:cubicBezTo>
-                <a:lnTo>
-                  <a:pt x="0" y="0"/>
-                </a:lnTo>
-                <a:cubicBezTo>
-                  <a:pt x="0" y="0"/>
-                  <a:pt x="16267" y="0"/>
-                  <a:pt x="36334" y="0"/>
-                </a:cubicBezTo>
-                <a:close/>
-              </a:path>
-            </a:pathLst>
-          </a:custGeom>
-          <a:gradFill>
-            <a:gsLst>
-              <a:gs pos="0">
-                <a:srgbClr val="151632"/>
-              </a:gs>
-              <a:gs pos="50000">
-                <a:srgbClr val="183E98"/>
-              </a:gs>
-              <a:gs pos="100000">
-                <a:srgbClr val="1B66FF"/>
-              </a:gs>
-            </a:gsLst>
-            <a:lin ang="10800000" scaled="1"/>
-          </a:gradFill>
-          <a:ln w="7263" cap="flat">
+        </p:grpSpPr>
+        <p:sp>
+          <p:nvSpPr>
+            <p:cNvPr id="49" name="Freeform 48">
+              <a:extLst>
+                <a:ext uri="{FF2B5EF4-FFF2-40B4-BE49-F238E27FC236}">
+                  <a16:creationId xmlns:a16="http://schemas.microsoft.com/office/drawing/2014/main" id="{B2AF553E-630F-A3D7-EEE7-C3302EE3FBAC}"/>
+                </a:ext>
+              </a:extLst>
+            </p:cNvPr>
+            <p:cNvSpPr/>
+            <p:nvPr/>
+          </p:nvSpPr>
+          <p:spPr>
+            <a:xfrm>
+              <a:off x="4585215" y="3042564"/>
+              <a:ext cx="4083908" cy="14538"/>
+            </a:xfrm>
+            <a:custGeom>
+              <a:avLst/>
+              <a:gdLst>
+                <a:gd name="connsiteX0" fmla="*/ 4076642 w 4083908"/>
+                <a:gd name="connsiteY0" fmla="*/ 14538 h 14538"/>
+                <a:gd name="connsiteX1" fmla="*/ 4083909 w 4083908"/>
+                <a:gd name="connsiteY1" fmla="*/ 7269 h 14538"/>
+                <a:gd name="connsiteX2" fmla="*/ 4076642 w 4083908"/>
+                <a:gd name="connsiteY2" fmla="*/ 0 h 14538"/>
+                <a:gd name="connsiteX3" fmla="*/ 4076642 w 4083908"/>
+                <a:gd name="connsiteY3" fmla="*/ 14538 h 14538"/>
+                <a:gd name="connsiteX4" fmla="*/ 0 w 4083908"/>
+                <a:gd name="connsiteY4" fmla="*/ 14538 h 14538"/>
+                <a:gd name="connsiteX5" fmla="*/ 4076642 w 4083908"/>
+                <a:gd name="connsiteY5" fmla="*/ 14538 h 14538"/>
+                <a:gd name="connsiteX6" fmla="*/ 4076642 w 4083908"/>
+                <a:gd name="connsiteY6" fmla="*/ 0 h 14538"/>
+                <a:gd name="connsiteX7" fmla="*/ 0 w 4083908"/>
+                <a:gd name="connsiteY7" fmla="*/ 0 h 14538"/>
+                <a:gd name="connsiteX8" fmla="*/ 0 w 4083908"/>
+                <a:gd name="connsiteY8" fmla="*/ 14538 h 14538"/>
+              </a:gdLst>
+              <a:ahLst/>
+              <a:cxnLst>
+                <a:cxn ang="0">
+                  <a:pos x="connsiteX0" y="connsiteY0"/>
+                </a:cxn>
+                <a:cxn ang="0">
+                  <a:pos x="connsiteX1" y="connsiteY1"/>
+                </a:cxn>
+                <a:cxn ang="0">
+                  <a:pos x="connsiteX2" y="connsiteY2"/>
+                </a:cxn>
+                <a:cxn ang="0">
+                  <a:pos x="connsiteX3" y="connsiteY3"/>
+                </a:cxn>
+                <a:cxn ang="0">
+                  <a:pos x="connsiteX4" y="connsiteY4"/>
+                </a:cxn>
+                <a:cxn ang="0">
+                  <a:pos x="connsiteX5" y="connsiteY5"/>
+                </a:cxn>
+                <a:cxn ang="0">
+                  <a:pos x="connsiteX6" y="connsiteY6"/>
+                </a:cxn>
+                <a:cxn ang="0">
+                  <a:pos x="connsiteX7" y="connsiteY7"/>
+                </a:cxn>
+                <a:cxn ang="0">
+                  <a:pos x="connsiteX8" y="connsiteY8"/>
+                </a:cxn>
+              </a:cxnLst>
+              <a:rect l="l" t="t" r="r" b="b"/>
+              <a:pathLst>
+                <a:path w="4083908" h="14538">
+                  <a:moveTo>
+                    <a:pt x="4076642" y="14538"/>
+                  </a:moveTo>
+                  <a:cubicBezTo>
+                    <a:pt x="4080653" y="14538"/>
+                    <a:pt x="4083909" y="11282"/>
+                    <a:pt x="4083909" y="7269"/>
+                  </a:cubicBezTo>
+                  <a:cubicBezTo>
+                    <a:pt x="4083909" y="3257"/>
+                    <a:pt x="4080653" y="0"/>
+                    <a:pt x="4076642" y="0"/>
+                  </a:cubicBezTo>
+                  <a:lnTo>
+                    <a:pt x="4076642" y="14538"/>
+                  </a:lnTo>
+                  <a:close/>
+                  <a:moveTo>
+                    <a:pt x="0" y="14538"/>
+                  </a:moveTo>
+                  <a:lnTo>
+                    <a:pt x="4076642" y="14538"/>
+                  </a:lnTo>
+                  <a:lnTo>
+                    <a:pt x="4076642" y="0"/>
+                  </a:lnTo>
+                  <a:lnTo>
+                    <a:pt x="0" y="0"/>
+                  </a:lnTo>
+                  <a:lnTo>
+                    <a:pt x="0" y="14538"/>
+                  </a:lnTo>
+                  <a:close/>
+                </a:path>
+              </a:pathLst>
+            </a:custGeom>
+            <a:gradFill>
+              <a:gsLst>
+                <a:gs pos="0">
+                  <a:srgbClr val="DF6838"/>
+                </a:gs>
+                <a:gs pos="50000">
+                  <a:srgbClr val="A3A75B"/>
+                </a:gs>
+                <a:gs pos="100000">
+                  <a:srgbClr val="67E77F"/>
+                </a:gs>
+              </a:gsLst>
+              <a:lin ang="0" scaled="1"/>
+            </a:gradFill>
+            <a:ln w="7263" cap="flat">
+              <a:noFill/>
+              <a:prstDash val="solid"/>
+              <a:miter/>
+            </a:ln>
+          </p:spPr>
+          <p:txBody>
+            <a:bodyPr rtlCol="0" anchor="ctr"/>
+            <a:lstStyle/>
+            <a:p>
+              <a:endParaRPr lang="en-US"/>
+            </a:p>
+          </p:txBody>
+        </p:sp>
+        <p:sp>
+          <p:nvSpPr>
+            <p:cNvPr id="62" name="Freeform 61">
+              <a:extLst>
+                <a:ext uri="{FF2B5EF4-FFF2-40B4-BE49-F238E27FC236}">
+                  <a16:creationId xmlns:a16="http://schemas.microsoft.com/office/drawing/2014/main" id="{5AFD0732-87D6-6F51-90E0-5730B444D262}"/>
+                </a:ext>
+              </a:extLst>
+            </p:cNvPr>
+            <p:cNvSpPr/>
+            <p:nvPr/>
+          </p:nvSpPr>
+          <p:spPr>
+            <a:xfrm>
+              <a:off x="4399598" y="2806318"/>
+              <a:ext cx="378145" cy="301667"/>
+            </a:xfrm>
+            <a:custGeom>
+              <a:avLst/>
+              <a:gdLst>
+                <a:gd name="connsiteX0" fmla="*/ 184470 w 343768"/>
+                <a:gd name="connsiteY0" fmla="*/ 294400 h 301667"/>
+                <a:gd name="connsiteX1" fmla="*/ 159298 w 343768"/>
+                <a:gd name="connsiteY1" fmla="*/ 294400 h 301667"/>
+                <a:gd name="connsiteX2" fmla="*/ 1966 w 343768"/>
+                <a:gd name="connsiteY2" fmla="*/ 21807 h 301667"/>
+                <a:gd name="connsiteX3" fmla="*/ 14552 w 343768"/>
+                <a:gd name="connsiteY3" fmla="*/ 0 h 301667"/>
+                <a:gd name="connsiteX4" fmla="*/ 329216 w 343768"/>
+                <a:gd name="connsiteY4" fmla="*/ 0 h 301667"/>
+                <a:gd name="connsiteX5" fmla="*/ 341802 w 343768"/>
+                <a:gd name="connsiteY5" fmla="*/ 21807 h 301667"/>
+                <a:gd name="connsiteX6" fmla="*/ 184470 w 343768"/>
+                <a:gd name="connsiteY6" fmla="*/ 294400 h 301667"/>
+              </a:gdLst>
+              <a:ahLst/>
+              <a:cxnLst>
+                <a:cxn ang="0">
+                  <a:pos x="connsiteX0" y="connsiteY0"/>
+                </a:cxn>
+                <a:cxn ang="0">
+                  <a:pos x="connsiteX1" y="connsiteY1"/>
+                </a:cxn>
+                <a:cxn ang="0">
+                  <a:pos x="connsiteX2" y="connsiteY2"/>
+                </a:cxn>
+                <a:cxn ang="0">
+                  <a:pos x="connsiteX3" y="connsiteY3"/>
+                </a:cxn>
+                <a:cxn ang="0">
+                  <a:pos x="connsiteX4" y="connsiteY4"/>
+                </a:cxn>
+                <a:cxn ang="0">
+                  <a:pos x="connsiteX5" y="connsiteY5"/>
+                </a:cxn>
+                <a:cxn ang="0">
+                  <a:pos x="connsiteX6" y="connsiteY6"/>
+                </a:cxn>
+              </a:cxnLst>
+              <a:rect l="l" t="t" r="r" b="b"/>
+              <a:pathLst>
+                <a:path w="343768" h="301667">
+                  <a:moveTo>
+                    <a:pt x="184470" y="294400"/>
+                  </a:moveTo>
+                  <a:cubicBezTo>
+                    <a:pt x="178875" y="304090"/>
+                    <a:pt x="164893" y="304090"/>
+                    <a:pt x="159298" y="294400"/>
+                  </a:cubicBezTo>
+                  <a:lnTo>
+                    <a:pt x="1966" y="21807"/>
+                  </a:lnTo>
+                  <a:cubicBezTo>
+                    <a:pt x="-3622" y="12118"/>
+                    <a:pt x="3368" y="0"/>
+                    <a:pt x="14552" y="0"/>
+                  </a:cubicBezTo>
+                  <a:lnTo>
+                    <a:pt x="329216" y="0"/>
+                  </a:lnTo>
+                  <a:cubicBezTo>
+                    <a:pt x="340400" y="0"/>
+                    <a:pt x="347390" y="12118"/>
+                    <a:pt x="341802" y="21807"/>
+                  </a:cubicBezTo>
+                  <a:lnTo>
+                    <a:pt x="184470" y="294400"/>
+                  </a:lnTo>
+                  <a:close/>
+                </a:path>
+              </a:pathLst>
+            </a:custGeom>
+            <a:solidFill>
+              <a:srgbClr val="0066FF"/>
+            </a:solidFill>
+            <a:ln w="7263" cap="flat">
+              <a:noFill/>
+              <a:prstDash val="solid"/>
+              <a:miter/>
+            </a:ln>
+          </p:spPr>
+          <p:txBody>
+            <a:bodyPr lIns="0" rIns="0" rtlCol="0" anchor="ctr"/>
+            <a:lstStyle/>
+            <a:p>
+              <a:pPr algn="ctr"/>
+              <a:r>
+                <a:rPr lang="en-US" sz="1000" b="1">
+                  <a:solidFill>
+                    <a:srgbClr val="0066FF"/>
+                  </a:solidFill>
+                </a:rPr>
+                <a:t>MARKER_MODERNIZATION_SPEED</a:t>
+              </a:r>
+            </a:p>
+          </p:txBody>
+        </p:sp>
+        <p:grpSp>
+          <p:nvGrpSpPr>
+            <p:cNvPr id="13" name="Group 12">
+              <a:extLst>
+                <a:ext uri="{FF2B5EF4-FFF2-40B4-BE49-F238E27FC236}">
+                  <a16:creationId xmlns:a16="http://schemas.microsoft.com/office/drawing/2014/main" id="{7AD70E39-AF26-E925-204C-B75F716B4191}"/>
+                </a:ext>
+              </a:extLst>
+            </p:cNvPr>
+            <p:cNvGrpSpPr/>
+            <p:nvPr/>
+          </p:nvGrpSpPr>
+          <p:grpSpPr>
+            <a:xfrm>
+              <a:off x="3175467" y="2555533"/>
+              <a:ext cx="1090012" cy="988601"/>
+              <a:chOff x="3175467" y="2555533"/>
+              <a:chExt cx="1090012" cy="988601"/>
+            </a:xfrm>
+          </p:grpSpPr>
+          <p:sp>
+            <p:nvSpPr>
+              <p:cNvPr id="30" name="Freeform 29">
+                <a:extLst>
+                  <a:ext uri="{FF2B5EF4-FFF2-40B4-BE49-F238E27FC236}">
+                    <a16:creationId xmlns:a16="http://schemas.microsoft.com/office/drawing/2014/main" id="{FC136603-2216-7601-C5DF-D85D8F43160F}"/>
+                  </a:ext>
+                </a:extLst>
+              </p:cNvPr>
+              <p:cNvSpPr/>
+              <p:nvPr/>
+            </p:nvSpPr>
+            <p:spPr>
+              <a:xfrm>
+                <a:off x="3175467" y="2555533"/>
+                <a:ext cx="1090011" cy="988601"/>
+              </a:xfrm>
+              <a:custGeom>
+                <a:avLst/>
+                <a:gdLst>
+                  <a:gd name="connsiteX0" fmla="*/ 1053678 w 1090011"/>
+                  <a:gd name="connsiteY0" fmla="*/ 0 h 988601"/>
+                  <a:gd name="connsiteX1" fmla="*/ 1090011 w 1090011"/>
+                  <a:gd name="connsiteY1" fmla="*/ 0 h 988601"/>
+                  <a:gd name="connsiteX2" fmla="*/ 1090011 w 1090011"/>
+                  <a:gd name="connsiteY2" fmla="*/ 988602 h 988601"/>
+                  <a:gd name="connsiteX3" fmla="*/ 1053678 w 1090011"/>
+                  <a:gd name="connsiteY3" fmla="*/ 988602 h 988601"/>
+                  <a:gd name="connsiteX4" fmla="*/ 36334 w 1090011"/>
+                  <a:gd name="connsiteY4" fmla="*/ 988602 h 988601"/>
+                  <a:gd name="connsiteX5" fmla="*/ 0 w 1090011"/>
+                  <a:gd name="connsiteY5" fmla="*/ 988602 h 988601"/>
+                  <a:gd name="connsiteX6" fmla="*/ 0 w 1090011"/>
+                  <a:gd name="connsiteY6" fmla="*/ 0 h 988601"/>
+                  <a:gd name="connsiteX7" fmla="*/ 36334 w 1090011"/>
+                  <a:gd name="connsiteY7" fmla="*/ 0 h 988601"/>
+                </a:gdLst>
+                <a:ahLst/>
+                <a:cxnLst>
+                  <a:cxn ang="0">
+                    <a:pos x="connsiteX0" y="connsiteY0"/>
+                  </a:cxn>
+                  <a:cxn ang="0">
+                    <a:pos x="connsiteX1" y="connsiteY1"/>
+                  </a:cxn>
+                  <a:cxn ang="0">
+                    <a:pos x="connsiteX2" y="connsiteY2"/>
+                  </a:cxn>
+                  <a:cxn ang="0">
+                    <a:pos x="connsiteX3" y="connsiteY3"/>
+                  </a:cxn>
+                  <a:cxn ang="0">
+                    <a:pos x="connsiteX4" y="connsiteY4"/>
+                  </a:cxn>
+                  <a:cxn ang="0">
+                    <a:pos x="connsiteX5" y="connsiteY5"/>
+                  </a:cxn>
+                  <a:cxn ang="0">
+                    <a:pos x="connsiteX6" y="connsiteY6"/>
+                  </a:cxn>
+                  <a:cxn ang="0">
+                    <a:pos x="connsiteX7" y="connsiteY7"/>
+                  </a:cxn>
+                </a:cxnLst>
+                <a:rect l="l" t="t" r="r" b="b"/>
+                <a:pathLst>
+                  <a:path w="1090011" h="988601">
+                    <a:moveTo>
+                      <a:pt x="1053678" y="0"/>
+                    </a:moveTo>
+                    <a:cubicBezTo>
+                      <a:pt x="1073744" y="0"/>
+                      <a:pt x="1090011" y="0"/>
+                      <a:pt x="1090011" y="0"/>
+                    </a:cubicBezTo>
+                    <a:lnTo>
+                      <a:pt x="1090011" y="988602"/>
+                    </a:lnTo>
+                    <a:cubicBezTo>
+                      <a:pt x="1090011" y="988602"/>
+                      <a:pt x="1073744" y="988602"/>
+                      <a:pt x="1053678" y="988602"/>
+                    </a:cubicBezTo>
+                    <a:lnTo>
+                      <a:pt x="36334" y="988602"/>
+                    </a:lnTo>
+                    <a:cubicBezTo>
+                      <a:pt x="16267" y="988602"/>
+                      <a:pt x="0" y="988602"/>
+                      <a:pt x="0" y="988602"/>
+                    </a:cubicBezTo>
+                    <a:lnTo>
+                      <a:pt x="0" y="0"/>
+                    </a:lnTo>
+                    <a:cubicBezTo>
+                      <a:pt x="0" y="0"/>
+                      <a:pt x="16267" y="0"/>
+                      <a:pt x="36334" y="0"/>
+                    </a:cubicBezTo>
+                    <a:close/>
+                  </a:path>
+                </a:pathLst>
+              </a:custGeom>
+              <a:gradFill>
+                <a:gsLst>
+                  <a:gs pos="0">
+                    <a:srgbClr val="151632"/>
+                  </a:gs>
+                  <a:gs pos="50000">
+                    <a:srgbClr val="183E98"/>
+                  </a:gs>
+                  <a:gs pos="100000">
+                    <a:srgbClr val="1B66FF"/>
+                  </a:gs>
+                </a:gsLst>
+                <a:lin ang="3971604" scaled="1"/>
+              </a:gradFill>
+              <a:ln w="7263" cap="flat">
+                <a:noFill/>
+                <a:prstDash val="solid"/>
+                <a:miter/>
+              </a:ln>
+            </p:spPr>
+            <p:txBody>
+              <a:bodyPr rtlCol="0" anchor="ctr"/>
+              <a:lstStyle/>
+              <a:p>
+                <a:endParaRPr lang="en-US"/>
+              </a:p>
+            </p:txBody>
+          </p:sp>
+          <p:pic>
+            <p:nvPicPr>
+              <p:cNvPr id="68" name="Graphic 67">
+                <a:extLst>
+                  <a:ext uri="{FF2B5EF4-FFF2-40B4-BE49-F238E27FC236}">
+                    <a16:creationId xmlns:a16="http://schemas.microsoft.com/office/drawing/2014/main" id="{5B8B6CE0-96F1-FE31-6A30-9D720FFCF6B0}"/>
+                  </a:ext>
+                </a:extLst>
+              </p:cNvPr>
+              <p:cNvPicPr>
+                <a:picLocks noChangeAspect="1"/>
+              </p:cNvPicPr>
+              <p:nvPr/>
+            </p:nvPicPr>
+            <p:blipFill>
+              <a:blip r:embed="rId2">
+                <a:extLst>
+                  <a:ext uri="{96DAC541-7B7A-43D3-8B79-37D633B846F1}">
+                    <asvg:svgBlip xmlns:asvg="http://schemas.microsoft.com/office/drawing/2016/SVG/main" r:embed="rId3"/>
+                  </a:ext>
+                </a:extLst>
+              </a:blip>
+              <a:stretch>
+                <a:fillRect/>
+              </a:stretch>
+            </p:blipFill>
+            <p:spPr>
+              <a:xfrm>
+                <a:off x="3422441" y="2682083"/>
+                <a:ext cx="582058" cy="498480"/>
+              </a:xfrm>
+              <a:prstGeom prst="rect">
+                <a:avLst/>
+              </a:prstGeom>
+            </p:spPr>
+          </p:pic>
+          <p:sp>
+            <p:nvSpPr>
+              <p:cNvPr id="73" name="TextBox 72">
+                <a:extLst>
+                  <a:ext uri="{FF2B5EF4-FFF2-40B4-BE49-F238E27FC236}">
+                    <a16:creationId xmlns:a16="http://schemas.microsoft.com/office/drawing/2014/main" id="{289C0F40-A36E-1F14-8EA9-2B436B82C6AD}"/>
+                  </a:ext>
+                </a:extLst>
+              </p:cNvPr>
+              <p:cNvSpPr txBox="1"/>
+              <p:nvPr/>
+            </p:nvSpPr>
+            <p:spPr>
+              <a:xfrm>
+                <a:off x="3175467" y="3256157"/>
+                <a:ext cx="1090012" cy="273023"/>
+              </a:xfrm>
+              <a:prstGeom prst="rect">
+                <a:avLst/>
+              </a:prstGeom>
+              <a:noFill/>
+            </p:spPr>
+            <p:txBody>
+              <a:bodyPr wrap="square" lIns="0" rIns="0" rtlCol="0" anchor="t">
+                <a:spAutoFit/>
+              </a:bodyPr>
+              <a:lstStyle/>
+              <a:p>
+                <a:pPr algn="ctr">
+                  <a:lnSpc>
+                    <a:spcPct val="113000"/>
+                  </a:lnSpc>
+                </a:pPr>
+                <a:r>
+                  <a:rPr lang="en-US" sz="1100" b="1" dirty="0" err="1">
+                    <a:solidFill>
+                      <a:schemeClr val="bg1"/>
+                    </a:solidFill>
+                  </a:rPr>
+                  <a:t>Potential return</a:t>
+                </a:r>
+              </a:p>
+            </p:txBody>
+          </p:sp>
+        </p:grpSp>
+        <p:sp>
+          <p:nvSpPr>
+            <p:cNvPr id="76" name="TextBox 75">
+              <a:extLst>
+                <a:ext uri="{FF2B5EF4-FFF2-40B4-BE49-F238E27FC236}">
+                  <a16:creationId xmlns:a16="http://schemas.microsoft.com/office/drawing/2014/main" id="{82AD63B6-A060-37AC-AE10-A89553C98806}"/>
+                </a:ext>
+              </a:extLst>
+            </p:cNvPr>
+            <p:cNvSpPr txBox="1"/>
+            <p:nvPr/>
+          </p:nvSpPr>
+          <p:spPr>
+            <a:xfrm>
+              <a:off x="4481963" y="3051373"/>
+              <a:ext cx="1428296" cy="289438"/>
+            </a:xfrm>
+            <a:prstGeom prst="rect">
+              <a:avLst/>
+            </a:prstGeom>
             <a:noFill/>
-            <a:prstDash val="solid"/>
-            <a:miter/>
-          </a:ln>
-        </p:spPr>
-        <p:txBody>
-          <a:bodyPr rtlCol="0" anchor="ctr"/>
-          <a:lstStyle/>
-          <a:p>
-            <a:endParaRPr lang="en-US"/>
-          </a:p>
-        </p:txBody>
-      </p:sp>
-      <p:sp>
-        <p:nvSpPr>
-          <p:cNvPr id="30" name="Freeform 29">
+          </p:spPr>
+          <p:txBody>
+            <a:bodyPr wrap="none" lIns="90000" rtlCol="0" anchor="t">
+              <a:spAutoFit/>
+            </a:bodyPr>
+            <a:lstStyle/>
+            <a:p>
+              <a:pPr algn="l">
+                <a:lnSpc>
+                  <a:spcPct val="113000"/>
+                </a:lnSpc>
+              </a:pPr>
+              <a:r>
+                <a:rPr lang="en-US" sz="1200" b="1" dirty="0" err="1">
+                  <a:solidFill>
+                    <a:srgbClr val="DF6837"/>
+                  </a:solidFill>
+                </a:rPr>
+                <a:t>Low speed increase</a:t>
+              </a:r>
+            </a:p>
+          </p:txBody>
+        </p:sp>
+        <p:sp>
+          <p:nvSpPr>
+            <p:cNvPr id="79" name="TextBox 78">
+              <a:extLst>
+                <a:ext uri="{FF2B5EF4-FFF2-40B4-BE49-F238E27FC236}">
+                  <a16:creationId xmlns:a16="http://schemas.microsoft.com/office/drawing/2014/main" id="{3E171B44-7D55-3C69-AF53-2A643B381D0B}"/>
+                </a:ext>
+              </a:extLst>
+            </p:cNvPr>
+            <p:cNvSpPr txBox="1"/>
+            <p:nvPr/>
+          </p:nvSpPr>
+          <p:spPr>
+            <a:xfrm>
+              <a:off x="7231430" y="3051373"/>
+              <a:ext cx="1457470" cy="289438"/>
+            </a:xfrm>
+            <a:prstGeom prst="rect">
+              <a:avLst/>
+            </a:prstGeom>
+            <a:noFill/>
+          </p:spPr>
+          <p:txBody>
+            <a:bodyPr wrap="none" lIns="90000" rtlCol="0" anchor="t">
+              <a:spAutoFit/>
+            </a:bodyPr>
+            <a:lstStyle/>
+            <a:p>
+              <a:pPr algn="r">
+                <a:lnSpc>
+                  <a:spcPct val="113000"/>
+                </a:lnSpc>
+              </a:pPr>
+              <a:r>
+                <a:rPr lang="en-US" sz="1200" b="1" dirty="0" err="1">
+                  <a:solidFill>
+                    <a:srgbClr val="67E77F"/>
+                  </a:solidFill>
+                </a:rPr>
+                <a:t>High speed increase</a:t>
+              </a:r>
+            </a:p>
+          </p:txBody>
+        </p:sp>
+      </p:grpSp>
+      <p:grpSp>
+        <p:nvGrpSpPr>
+          <p:cNvPr id="15" name="Group 14">
             <a:extLst>
               <a:ext uri="{FF2B5EF4-FFF2-40B4-BE49-F238E27FC236}">
-                <a16:creationId xmlns:a16="http://schemas.microsoft.com/office/drawing/2014/main" id="{FC136603-2216-7601-C5DF-D85D8F43160F}"/>
+                <a16:creationId xmlns:a16="http://schemas.microsoft.com/office/drawing/2014/main" id="{D4E83F57-1D7F-B025-D7A5-EA55FD7B6A9D}"/>
               </a:ext>
             </a:extLst>
           </p:cNvPr>
-          <p:cNvSpPr/>
+          <p:cNvGrpSpPr/>
           <p:nvPr/>
-        </p:nvSpPr>
-        <p:spPr>
+        </p:nvGrpSpPr>
+        <p:grpSpPr>
           <a:xfrm>
-            <a:off x="3175467" y="3708471"/>
-            <a:ext cx="1090011" cy="988601"/>
+            <a:off x="3175467" y="1817344"/>
+            <a:ext cx="5513433" cy="988601"/>
+            <a:chOff x="3175467" y="1375080"/>
+            <a:chExt cx="5513433" cy="988601"/>
           </a:xfrm>
-          <a:custGeom>
-            <a:avLst/>
-            <a:gdLst>
-              <a:gd name="connsiteX0" fmla="*/ 1053678 w 1090011"/>
-              <a:gd name="connsiteY0" fmla="*/ 0 h 988601"/>
-              <a:gd name="connsiteX1" fmla="*/ 1090011 w 1090011"/>
-              <a:gd name="connsiteY1" fmla="*/ 0 h 988601"/>
-              <a:gd name="connsiteX2" fmla="*/ 1090011 w 1090011"/>
-              <a:gd name="connsiteY2" fmla="*/ 988602 h 988601"/>
-              <a:gd name="connsiteX3" fmla="*/ 1053678 w 1090011"/>
-              <a:gd name="connsiteY3" fmla="*/ 988602 h 988601"/>
-              <a:gd name="connsiteX4" fmla="*/ 36334 w 1090011"/>
-              <a:gd name="connsiteY4" fmla="*/ 988602 h 988601"/>
-              <a:gd name="connsiteX5" fmla="*/ 0 w 1090011"/>
-              <a:gd name="connsiteY5" fmla="*/ 988602 h 988601"/>
-              <a:gd name="connsiteX6" fmla="*/ 0 w 1090011"/>
-              <a:gd name="connsiteY6" fmla="*/ 0 h 988601"/>
-              <a:gd name="connsiteX7" fmla="*/ 36334 w 1090011"/>
-              <a:gd name="connsiteY7" fmla="*/ 0 h 988601"/>
-            </a:gdLst>
-            <a:ahLst/>
-            <a:cxnLst>
-              <a:cxn ang="0">
-                <a:pos x="connsiteX0" y="connsiteY0"/>
-              </a:cxn>
-              <a:cxn ang="0">
-                <a:pos x="connsiteX1" y="connsiteY1"/>
-              </a:cxn>
-              <a:cxn ang="0">
-                <a:pos x="connsiteX2" y="connsiteY2"/>
-              </a:cxn>
-              <a:cxn ang="0">
-                <a:pos x="connsiteX3" y="connsiteY3"/>
-              </a:cxn>
-              <a:cxn ang="0">
-                <a:pos x="connsiteX4" y="connsiteY4"/>
-              </a:cxn>
-              <a:cxn ang="0">
-                <a:pos x="connsiteX5" y="connsiteY5"/>
-              </a:cxn>
-              <a:cxn ang="0">
-                <a:pos x="connsiteX6" y="connsiteY6"/>
-              </a:cxn>
-              <a:cxn ang="0">
-                <a:pos x="connsiteX7" y="connsiteY7"/>
-              </a:cxn>
-            </a:cxnLst>
-            <a:rect l="l" t="t" r="r" b="b"/>
-            <a:pathLst>
-              <a:path w="1090011" h="988601">
-                <a:moveTo>
-                  <a:pt x="1053678" y="0"/>
-                </a:moveTo>
-                <a:cubicBezTo>
-                  <a:pt x="1073744" y="0"/>
-                  <a:pt x="1090011" y="0"/>
-                  <a:pt x="1090011" y="0"/>
-                </a:cubicBezTo>
-                <a:lnTo>
-                  <a:pt x="1090011" y="988602"/>
-                </a:lnTo>
-                <a:cubicBezTo>
-                  <a:pt x="1090011" y="988602"/>
-                  <a:pt x="1073744" y="988602"/>
-                  <a:pt x="1053678" y="988602"/>
-                </a:cubicBezTo>
-                <a:lnTo>
-                  <a:pt x="36334" y="988602"/>
-                </a:lnTo>
-                <a:cubicBezTo>
-                  <a:pt x="16267" y="988602"/>
-                  <a:pt x="0" y="988602"/>
-                  <a:pt x="0" y="988602"/>
-                </a:cubicBezTo>
-                <a:lnTo>
-                  <a:pt x="0" y="0"/>
-                </a:lnTo>
-                <a:cubicBezTo>
-                  <a:pt x="0" y="0"/>
-                  <a:pt x="16267" y="0"/>
-                  <a:pt x="36334" y="0"/>
-                </a:cubicBezTo>
-                <a:close/>
-              </a:path>
-            </a:pathLst>
-          </a:custGeom>
-          <a:gradFill>
-            <a:gsLst>
-              <a:gs pos="0">
-                <a:srgbClr val="151632"/>
-              </a:gs>
-              <a:gs pos="50000">
-                <a:srgbClr val="183E98"/>
-              </a:gs>
-              <a:gs pos="100000">
-                <a:srgbClr val="1B66FF"/>
-              </a:gs>
-            </a:gsLst>
-            <a:lin ang="3971604" scaled="1"/>
-          </a:gradFill>
-          <a:ln w="7263" cap="flat">
+        </p:grpSpPr>
+        <p:grpSp>
+          <p:nvGrpSpPr>
+            <p:cNvPr id="14" name="Group 13">
+              <a:extLst>
+                <a:ext uri="{FF2B5EF4-FFF2-40B4-BE49-F238E27FC236}">
+                  <a16:creationId xmlns:a16="http://schemas.microsoft.com/office/drawing/2014/main" id="{AD716B20-B5AF-DC6F-3740-306AD6C65D67}"/>
+                </a:ext>
+              </a:extLst>
+            </p:cNvPr>
+            <p:cNvGrpSpPr/>
+            <p:nvPr/>
+          </p:nvGrpSpPr>
+          <p:grpSpPr>
+            <a:xfrm>
+              <a:off x="3175467" y="1375080"/>
+              <a:ext cx="1090012" cy="988601"/>
+              <a:chOff x="3175467" y="1375080"/>
+              <a:chExt cx="1090012" cy="988601"/>
+            </a:xfrm>
+          </p:grpSpPr>
+          <p:sp>
+            <p:nvSpPr>
+              <p:cNvPr id="10" name="Freeform 9">
+                <a:extLst>
+                  <a:ext uri="{FF2B5EF4-FFF2-40B4-BE49-F238E27FC236}">
+                    <a16:creationId xmlns:a16="http://schemas.microsoft.com/office/drawing/2014/main" id="{2B2E99E9-6FC9-F31E-927C-6F26B225088A}"/>
+                  </a:ext>
+                </a:extLst>
+              </p:cNvPr>
+              <p:cNvSpPr/>
+              <p:nvPr/>
+            </p:nvSpPr>
+            <p:spPr>
+              <a:xfrm>
+                <a:off x="3175467" y="1375080"/>
+                <a:ext cx="1090011" cy="988601"/>
+              </a:xfrm>
+              <a:custGeom>
+                <a:avLst/>
+                <a:gdLst>
+                  <a:gd name="connsiteX0" fmla="*/ 1053678 w 1090011"/>
+                  <a:gd name="connsiteY0" fmla="*/ 0 h 988601"/>
+                  <a:gd name="connsiteX1" fmla="*/ 1090011 w 1090011"/>
+                  <a:gd name="connsiteY1" fmla="*/ 0 h 988601"/>
+                  <a:gd name="connsiteX2" fmla="*/ 1090011 w 1090011"/>
+                  <a:gd name="connsiteY2" fmla="*/ 988602 h 988601"/>
+                  <a:gd name="connsiteX3" fmla="*/ 1053678 w 1090011"/>
+                  <a:gd name="connsiteY3" fmla="*/ 988602 h 988601"/>
+                  <a:gd name="connsiteX4" fmla="*/ 36334 w 1090011"/>
+                  <a:gd name="connsiteY4" fmla="*/ 988602 h 988601"/>
+                  <a:gd name="connsiteX5" fmla="*/ 0 w 1090011"/>
+                  <a:gd name="connsiteY5" fmla="*/ 988602 h 988601"/>
+                  <a:gd name="connsiteX6" fmla="*/ 0 w 1090011"/>
+                  <a:gd name="connsiteY6" fmla="*/ 0 h 988601"/>
+                  <a:gd name="connsiteX7" fmla="*/ 36334 w 1090011"/>
+                  <a:gd name="connsiteY7" fmla="*/ 0 h 988601"/>
+                </a:gdLst>
+                <a:ahLst/>
+                <a:cxnLst>
+                  <a:cxn ang="0">
+                    <a:pos x="connsiteX0" y="connsiteY0"/>
+                  </a:cxn>
+                  <a:cxn ang="0">
+                    <a:pos x="connsiteX1" y="connsiteY1"/>
+                  </a:cxn>
+                  <a:cxn ang="0">
+                    <a:pos x="connsiteX2" y="connsiteY2"/>
+                  </a:cxn>
+                  <a:cxn ang="0">
+                    <a:pos x="connsiteX3" y="connsiteY3"/>
+                  </a:cxn>
+                  <a:cxn ang="0">
+                    <a:pos x="connsiteX4" y="connsiteY4"/>
+                  </a:cxn>
+                  <a:cxn ang="0">
+                    <a:pos x="connsiteX5" y="connsiteY5"/>
+                  </a:cxn>
+                  <a:cxn ang="0">
+                    <a:pos x="connsiteX6" y="connsiteY6"/>
+                  </a:cxn>
+                  <a:cxn ang="0">
+                    <a:pos x="connsiteX7" y="connsiteY7"/>
+                  </a:cxn>
+                </a:cxnLst>
+                <a:rect l="l" t="t" r="r" b="b"/>
+                <a:pathLst>
+                  <a:path w="1090011" h="988601">
+                    <a:moveTo>
+                      <a:pt x="1053678" y="0"/>
+                    </a:moveTo>
+                    <a:cubicBezTo>
+                      <a:pt x="1073744" y="0"/>
+                      <a:pt x="1090011" y="0"/>
+                      <a:pt x="1090011" y="0"/>
+                    </a:cubicBezTo>
+                    <a:lnTo>
+                      <a:pt x="1090011" y="988602"/>
+                    </a:lnTo>
+                    <a:cubicBezTo>
+                      <a:pt x="1090011" y="988602"/>
+                      <a:pt x="1073744" y="988602"/>
+                      <a:pt x="1053678" y="988602"/>
+                    </a:cubicBezTo>
+                    <a:lnTo>
+                      <a:pt x="36334" y="988602"/>
+                    </a:lnTo>
+                    <a:cubicBezTo>
+                      <a:pt x="16267" y="988602"/>
+                      <a:pt x="0" y="988602"/>
+                      <a:pt x="0" y="988602"/>
+                    </a:cubicBezTo>
+                    <a:lnTo>
+                      <a:pt x="0" y="0"/>
+                    </a:lnTo>
+                    <a:cubicBezTo>
+                      <a:pt x="0" y="0"/>
+                      <a:pt x="16267" y="0"/>
+                      <a:pt x="36334" y="0"/>
+                    </a:cubicBezTo>
+                    <a:close/>
+                  </a:path>
+                </a:pathLst>
+              </a:custGeom>
+              <a:gradFill>
+                <a:gsLst>
+                  <a:gs pos="0">
+                    <a:srgbClr val="1B66FF"/>
+                  </a:gs>
+                  <a:gs pos="50000">
+                    <a:srgbClr val="183E98"/>
+                  </a:gs>
+                  <a:gs pos="100000">
+                    <a:srgbClr val="151632"/>
+                  </a:gs>
+                </a:gsLst>
+                <a:lin ang="5400000" scaled="1"/>
+              </a:gradFill>
+              <a:ln w="7263" cap="flat">
+                <a:noFill/>
+                <a:prstDash val="solid"/>
+                <a:miter/>
+              </a:ln>
+            </p:spPr>
+            <p:txBody>
+              <a:bodyPr rtlCol="0" anchor="ctr"/>
+              <a:lstStyle/>
+              <a:p>
+                <a:endParaRPr lang="en-US"/>
+              </a:p>
+            </p:txBody>
+          </p:sp>
+          <p:pic>
+            <p:nvPicPr>
+              <p:cNvPr id="69" name="Graphic 68">
+                <a:extLst>
+                  <a:ext uri="{FF2B5EF4-FFF2-40B4-BE49-F238E27FC236}">
+                    <a16:creationId xmlns:a16="http://schemas.microsoft.com/office/drawing/2014/main" id="{E418F06E-C20B-037A-E6C6-026F0159DA28}"/>
+                  </a:ext>
+                </a:extLst>
+              </p:cNvPr>
+              <p:cNvPicPr>
+                <a:picLocks noChangeAspect="1"/>
+              </p:cNvPicPr>
+              <p:nvPr/>
+            </p:nvPicPr>
+            <p:blipFill>
+              <a:blip r:embed="rId4">
+                <a:extLst>
+                  <a:ext uri="{96DAC541-7B7A-43D3-8B79-37D633B846F1}">
+                    <asvg:svgBlip xmlns:asvg="http://schemas.microsoft.com/office/drawing/2016/SVG/main" r:embed="rId5"/>
+                  </a:ext>
+                </a:extLst>
+              </a:blip>
+              <a:stretch>
+                <a:fillRect/>
+              </a:stretch>
+            </p:blipFill>
+            <p:spPr>
+              <a:xfrm>
+                <a:off x="3458380" y="1520447"/>
+                <a:ext cx="515100" cy="436659"/>
+              </a:xfrm>
+              <a:prstGeom prst="rect">
+                <a:avLst/>
+              </a:prstGeom>
+            </p:spPr>
+          </p:pic>
+          <p:sp>
+            <p:nvSpPr>
+              <p:cNvPr id="71" name="TextBox 70">
+                <a:extLst>
+                  <a:ext uri="{FF2B5EF4-FFF2-40B4-BE49-F238E27FC236}">
+                    <a16:creationId xmlns:a16="http://schemas.microsoft.com/office/drawing/2014/main" id="{3830E433-EC1A-9E7D-C276-49B7EEF215C7}"/>
+                  </a:ext>
+                </a:extLst>
+              </p:cNvPr>
+              <p:cNvSpPr txBox="1"/>
+              <p:nvPr/>
+            </p:nvSpPr>
+            <p:spPr>
+              <a:xfrm>
+                <a:off x="3175467" y="2067739"/>
+                <a:ext cx="1090012" cy="273023"/>
+              </a:xfrm>
+              <a:prstGeom prst="rect">
+                <a:avLst/>
+              </a:prstGeom>
+              <a:noFill/>
+            </p:spPr>
+            <p:txBody>
+              <a:bodyPr wrap="square" lIns="90000" rtlCol="0" anchor="t">
+                <a:spAutoFit/>
+              </a:bodyPr>
+              <a:lstStyle/>
+              <a:p>
+                <a:pPr algn="ctr">
+                  <a:lnSpc>
+                    <a:spcPct val="113000"/>
+                  </a:lnSpc>
+                </a:pPr>
+                <a:r>
+                  <a:rPr lang="en-US" sz="1100" b="1" dirty="0" err="1">
+                    <a:solidFill>
+                      <a:schemeClr val="bg1"/>
+                    </a:solidFill>
+                  </a:rPr>
+                  <a:t>Portfolio size</a:t>
+                </a:r>
+              </a:p>
+            </p:txBody>
+          </p:sp>
+        </p:grpSp>
+        <p:sp>
+          <p:nvSpPr>
+            <p:cNvPr id="81" name="Freeform 80">
+              <a:extLst>
+                <a:ext uri="{FF2B5EF4-FFF2-40B4-BE49-F238E27FC236}">
+                  <a16:creationId xmlns:a16="http://schemas.microsoft.com/office/drawing/2014/main" id="{659BC7AE-1850-9CF5-C1C7-5F5104F1B756}"/>
+                </a:ext>
+              </a:extLst>
+            </p:cNvPr>
+            <p:cNvSpPr/>
+            <p:nvPr/>
+          </p:nvSpPr>
+          <p:spPr>
+            <a:xfrm flipH="1">
+              <a:off x="4541614" y="1809446"/>
+              <a:ext cx="4083908" cy="14538"/>
+            </a:xfrm>
+            <a:custGeom>
+              <a:avLst/>
+              <a:gdLst>
+                <a:gd name="connsiteX0" fmla="*/ 4076642 w 4083908"/>
+                <a:gd name="connsiteY0" fmla="*/ 14538 h 14538"/>
+                <a:gd name="connsiteX1" fmla="*/ 4083909 w 4083908"/>
+                <a:gd name="connsiteY1" fmla="*/ 7269 h 14538"/>
+                <a:gd name="connsiteX2" fmla="*/ 4076642 w 4083908"/>
+                <a:gd name="connsiteY2" fmla="*/ 0 h 14538"/>
+                <a:gd name="connsiteX3" fmla="*/ 4076642 w 4083908"/>
+                <a:gd name="connsiteY3" fmla="*/ 14538 h 14538"/>
+                <a:gd name="connsiteX4" fmla="*/ 0 w 4083908"/>
+                <a:gd name="connsiteY4" fmla="*/ 14538 h 14538"/>
+                <a:gd name="connsiteX5" fmla="*/ 4076642 w 4083908"/>
+                <a:gd name="connsiteY5" fmla="*/ 14538 h 14538"/>
+                <a:gd name="connsiteX6" fmla="*/ 4076642 w 4083908"/>
+                <a:gd name="connsiteY6" fmla="*/ 0 h 14538"/>
+                <a:gd name="connsiteX7" fmla="*/ 0 w 4083908"/>
+                <a:gd name="connsiteY7" fmla="*/ 0 h 14538"/>
+                <a:gd name="connsiteX8" fmla="*/ 0 w 4083908"/>
+                <a:gd name="connsiteY8" fmla="*/ 14538 h 14538"/>
+              </a:gdLst>
+              <a:ahLst/>
+              <a:cxnLst>
+                <a:cxn ang="0">
+                  <a:pos x="connsiteX0" y="connsiteY0"/>
+                </a:cxn>
+                <a:cxn ang="0">
+                  <a:pos x="connsiteX1" y="connsiteY1"/>
+                </a:cxn>
+                <a:cxn ang="0">
+                  <a:pos x="connsiteX2" y="connsiteY2"/>
+                </a:cxn>
+                <a:cxn ang="0">
+                  <a:pos x="connsiteX3" y="connsiteY3"/>
+                </a:cxn>
+                <a:cxn ang="0">
+                  <a:pos x="connsiteX4" y="connsiteY4"/>
+                </a:cxn>
+                <a:cxn ang="0">
+                  <a:pos x="connsiteX5" y="connsiteY5"/>
+                </a:cxn>
+                <a:cxn ang="0">
+                  <a:pos x="connsiteX6" y="connsiteY6"/>
+                </a:cxn>
+                <a:cxn ang="0">
+                  <a:pos x="connsiteX7" y="connsiteY7"/>
+                </a:cxn>
+                <a:cxn ang="0">
+                  <a:pos x="connsiteX8" y="connsiteY8"/>
+                </a:cxn>
+              </a:cxnLst>
+              <a:rect l="l" t="t" r="r" b="b"/>
+              <a:pathLst>
+                <a:path w="4083908" h="14538">
+                  <a:moveTo>
+                    <a:pt x="4076642" y="14538"/>
+                  </a:moveTo>
+                  <a:cubicBezTo>
+                    <a:pt x="4080653" y="14538"/>
+                    <a:pt x="4083909" y="11282"/>
+                    <a:pt x="4083909" y="7269"/>
+                  </a:cubicBezTo>
+                  <a:cubicBezTo>
+                    <a:pt x="4083909" y="3257"/>
+                    <a:pt x="4080653" y="0"/>
+                    <a:pt x="4076642" y="0"/>
+                  </a:cubicBezTo>
+                  <a:lnTo>
+                    <a:pt x="4076642" y="14538"/>
+                  </a:lnTo>
+                  <a:close/>
+                  <a:moveTo>
+                    <a:pt x="0" y="14538"/>
+                  </a:moveTo>
+                  <a:lnTo>
+                    <a:pt x="4076642" y="14538"/>
+                  </a:lnTo>
+                  <a:lnTo>
+                    <a:pt x="4076642" y="0"/>
+                  </a:lnTo>
+                  <a:lnTo>
+                    <a:pt x="0" y="0"/>
+                  </a:lnTo>
+                  <a:lnTo>
+                    <a:pt x="0" y="14538"/>
+                  </a:lnTo>
+                  <a:close/>
+                </a:path>
+              </a:pathLst>
+            </a:custGeom>
+            <a:gradFill>
+              <a:gsLst>
+                <a:gs pos="0">
+                  <a:srgbClr val="DF6838"/>
+                </a:gs>
+                <a:gs pos="50000">
+                  <a:srgbClr val="A3A75B"/>
+                </a:gs>
+                <a:gs pos="100000">
+                  <a:srgbClr val="67E77F"/>
+                </a:gs>
+              </a:gsLst>
+              <a:lin ang="0" scaled="1"/>
+            </a:gradFill>
+            <a:ln w="7263" cap="flat">
+              <a:noFill/>
+              <a:prstDash val="solid"/>
+              <a:miter/>
+            </a:ln>
+          </p:spPr>
+          <p:txBody>
+            <a:bodyPr rtlCol="0" anchor="ctr"/>
+            <a:lstStyle/>
+            <a:p>
+              <a:endParaRPr lang="en-US"/>
+            </a:p>
+          </p:txBody>
+        </p:sp>
+        <p:sp>
+          <p:nvSpPr>
+            <p:cNvPr id="82" name="Freeform 81">
+              <a:extLst>
+                <a:ext uri="{FF2B5EF4-FFF2-40B4-BE49-F238E27FC236}">
+                  <a16:creationId xmlns:a16="http://schemas.microsoft.com/office/drawing/2014/main" id="{A1436FEF-2734-3E85-C550-879300A56BB7}"/>
+                </a:ext>
+              </a:extLst>
+            </p:cNvPr>
+            <p:cNvSpPr/>
+            <p:nvPr/>
+          </p:nvSpPr>
+          <p:spPr>
+            <a:xfrm>
+              <a:off x="4399598" y="1595006"/>
+              <a:ext cx="378145" cy="301667"/>
+            </a:xfrm>
+            <a:custGeom>
+              <a:avLst/>
+              <a:gdLst>
+                <a:gd name="connsiteX0" fmla="*/ 184470 w 343768"/>
+                <a:gd name="connsiteY0" fmla="*/ 294400 h 301667"/>
+                <a:gd name="connsiteX1" fmla="*/ 159298 w 343768"/>
+                <a:gd name="connsiteY1" fmla="*/ 294400 h 301667"/>
+                <a:gd name="connsiteX2" fmla="*/ 1966 w 343768"/>
+                <a:gd name="connsiteY2" fmla="*/ 21807 h 301667"/>
+                <a:gd name="connsiteX3" fmla="*/ 14552 w 343768"/>
+                <a:gd name="connsiteY3" fmla="*/ 0 h 301667"/>
+                <a:gd name="connsiteX4" fmla="*/ 329216 w 343768"/>
+                <a:gd name="connsiteY4" fmla="*/ 0 h 301667"/>
+                <a:gd name="connsiteX5" fmla="*/ 341802 w 343768"/>
+                <a:gd name="connsiteY5" fmla="*/ 21807 h 301667"/>
+                <a:gd name="connsiteX6" fmla="*/ 184470 w 343768"/>
+                <a:gd name="connsiteY6" fmla="*/ 294400 h 301667"/>
+              </a:gdLst>
+              <a:ahLst/>
+              <a:cxnLst>
+                <a:cxn ang="0">
+                  <a:pos x="connsiteX0" y="connsiteY0"/>
+                </a:cxn>
+                <a:cxn ang="0">
+                  <a:pos x="connsiteX1" y="connsiteY1"/>
+                </a:cxn>
+                <a:cxn ang="0">
+                  <a:pos x="connsiteX2" y="connsiteY2"/>
+                </a:cxn>
+                <a:cxn ang="0">
+                  <a:pos x="connsiteX3" y="connsiteY3"/>
+                </a:cxn>
+                <a:cxn ang="0">
+                  <a:pos x="connsiteX4" y="connsiteY4"/>
+                </a:cxn>
+                <a:cxn ang="0">
+                  <a:pos x="connsiteX5" y="connsiteY5"/>
+                </a:cxn>
+                <a:cxn ang="0">
+                  <a:pos x="connsiteX6" y="connsiteY6"/>
+                </a:cxn>
+              </a:cxnLst>
+              <a:rect l="l" t="t" r="r" b="b"/>
+              <a:pathLst>
+                <a:path w="343768" h="301667">
+                  <a:moveTo>
+                    <a:pt x="184470" y="294400"/>
+                  </a:moveTo>
+                  <a:cubicBezTo>
+                    <a:pt x="178875" y="304090"/>
+                    <a:pt x="164893" y="304090"/>
+                    <a:pt x="159298" y="294400"/>
+                  </a:cubicBezTo>
+                  <a:lnTo>
+                    <a:pt x="1966" y="21807"/>
+                  </a:lnTo>
+                  <a:cubicBezTo>
+                    <a:pt x="-3622" y="12118"/>
+                    <a:pt x="3368" y="0"/>
+                    <a:pt x="14552" y="0"/>
+                  </a:cubicBezTo>
+                  <a:lnTo>
+                    <a:pt x="329216" y="0"/>
+                  </a:lnTo>
+                  <a:cubicBezTo>
+                    <a:pt x="340400" y="0"/>
+                    <a:pt x="347390" y="12118"/>
+                    <a:pt x="341802" y="21807"/>
+                  </a:cubicBezTo>
+                  <a:lnTo>
+                    <a:pt x="184470" y="294400"/>
+                  </a:lnTo>
+                  <a:close/>
+                </a:path>
+              </a:pathLst>
+            </a:custGeom>
+            <a:solidFill>
+              <a:srgbClr val="0066FF"/>
+            </a:solidFill>
+            <a:ln w="7263" cap="flat">
+              <a:noFill/>
+              <a:prstDash val="solid"/>
+              <a:miter/>
+            </a:ln>
+          </p:spPr>
+          <p:txBody>
+            <a:bodyPr lIns="0" rIns="0" rtlCol="0" anchor="ctr"/>
+            <a:lstStyle/>
+            <a:p>
+              <a:pPr algn="ctr"/>
+              <a:r>
+                <a:rPr lang="en-US" sz="1000" b="1">
+                  <a:solidFill>
+                    <a:srgbClr val="0066FF"/>
+                  </a:solidFill>
+                </a:rPr>
+                <a:t>MARKER_MODERNIZATION_VOLUME</a:t>
+              </a:r>
+            </a:p>
+          </p:txBody>
+        </p:sp>
+        <p:sp>
+          <p:nvSpPr>
+            <p:cNvPr id="83" name="TextBox 82">
+              <a:extLst>
+                <a:ext uri="{FF2B5EF4-FFF2-40B4-BE49-F238E27FC236}">
+                  <a16:creationId xmlns:a16="http://schemas.microsoft.com/office/drawing/2014/main" id="{B4B64E5A-9179-448E-090A-5864C363F480}"/>
+                </a:ext>
+              </a:extLst>
+            </p:cNvPr>
+            <p:cNvSpPr txBox="1"/>
+            <p:nvPr/>
+          </p:nvSpPr>
+          <p:spPr>
+            <a:xfrm>
+              <a:off x="4481963" y="1818652"/>
+              <a:ext cx="591978" cy="322268"/>
+            </a:xfrm>
+            <a:prstGeom prst="rect">
+              <a:avLst/>
+            </a:prstGeom>
             <a:noFill/>
-            <a:prstDash val="solid"/>
-            <a:miter/>
-          </a:ln>
-        </p:spPr>
-        <p:txBody>
-          <a:bodyPr rtlCol="0" anchor="ctr"/>
-          <a:lstStyle/>
-          <a:p>
-            <a:endParaRPr lang="en-US"/>
-          </a:p>
-        </p:txBody>
-      </p:sp>
-      <p:sp>
-        <p:nvSpPr>
-          <p:cNvPr id="31" name="Freeform 30">
-            <a:extLst>
-              <a:ext uri="{FF2B5EF4-FFF2-40B4-BE49-F238E27FC236}">
-                <a16:creationId xmlns:a16="http://schemas.microsoft.com/office/drawing/2014/main" id="{2D8219B0-F329-793E-CC73-F3C72202561E}"/>
-              </a:ext>
-            </a:extLst>
-          </p:cNvPr>
-          <p:cNvSpPr/>
-          <p:nvPr/>
-        </p:nvSpPr>
-        <p:spPr>
-          <a:xfrm>
-            <a:off x="3175467" y="4871531"/>
-            <a:ext cx="1090011" cy="988601"/>
-          </a:xfrm>
-          <a:custGeom>
-            <a:avLst/>
-            <a:gdLst>
-              <a:gd name="connsiteX0" fmla="*/ 1053678 w 1090011"/>
-              <a:gd name="connsiteY0" fmla="*/ 0 h 988601"/>
-              <a:gd name="connsiteX1" fmla="*/ 1090011 w 1090011"/>
-              <a:gd name="connsiteY1" fmla="*/ 0 h 988601"/>
-              <a:gd name="connsiteX2" fmla="*/ 1090011 w 1090011"/>
-              <a:gd name="connsiteY2" fmla="*/ 988602 h 988601"/>
-              <a:gd name="connsiteX3" fmla="*/ 1053678 w 1090011"/>
-              <a:gd name="connsiteY3" fmla="*/ 988602 h 988601"/>
-              <a:gd name="connsiteX4" fmla="*/ 36334 w 1090011"/>
-              <a:gd name="connsiteY4" fmla="*/ 988602 h 988601"/>
-              <a:gd name="connsiteX5" fmla="*/ 0 w 1090011"/>
-              <a:gd name="connsiteY5" fmla="*/ 988602 h 988601"/>
-              <a:gd name="connsiteX6" fmla="*/ 0 w 1090011"/>
-              <a:gd name="connsiteY6" fmla="*/ 0 h 988601"/>
-              <a:gd name="connsiteX7" fmla="*/ 36334 w 1090011"/>
-              <a:gd name="connsiteY7" fmla="*/ 0 h 988601"/>
-            </a:gdLst>
-            <a:ahLst/>
-            <a:cxnLst>
-              <a:cxn ang="0">
-                <a:pos x="connsiteX0" y="connsiteY0"/>
-              </a:cxn>
-              <a:cxn ang="0">
-                <a:pos x="connsiteX1" y="connsiteY1"/>
-              </a:cxn>
-              <a:cxn ang="0">
-                <a:pos x="connsiteX2" y="connsiteY2"/>
-              </a:cxn>
-              <a:cxn ang="0">
-                <a:pos x="connsiteX3" y="connsiteY3"/>
-              </a:cxn>
-              <a:cxn ang="0">
-                <a:pos x="connsiteX4" y="connsiteY4"/>
-              </a:cxn>
-              <a:cxn ang="0">
-                <a:pos x="connsiteX5" y="connsiteY5"/>
-              </a:cxn>
-              <a:cxn ang="0">
-                <a:pos x="connsiteX6" y="connsiteY6"/>
-              </a:cxn>
-              <a:cxn ang="0">
-                <a:pos x="connsiteX7" y="connsiteY7"/>
-              </a:cxn>
-            </a:cxnLst>
-            <a:rect l="l" t="t" r="r" b="b"/>
-            <a:pathLst>
-              <a:path w="1090011" h="988601">
-                <a:moveTo>
-                  <a:pt x="1053678" y="0"/>
-                </a:moveTo>
-                <a:cubicBezTo>
-                  <a:pt x="1073744" y="0"/>
-                  <a:pt x="1090011" y="0"/>
-                  <a:pt x="1090011" y="0"/>
-                </a:cubicBezTo>
-                <a:lnTo>
-                  <a:pt x="1090011" y="988602"/>
-                </a:lnTo>
-                <a:cubicBezTo>
-                  <a:pt x="1090011" y="988602"/>
-                  <a:pt x="1073744" y="988602"/>
-                  <a:pt x="1053678" y="988602"/>
-                </a:cubicBezTo>
-                <a:lnTo>
-                  <a:pt x="36334" y="988602"/>
-                </a:lnTo>
-                <a:cubicBezTo>
-                  <a:pt x="16267" y="988602"/>
-                  <a:pt x="0" y="988602"/>
-                  <a:pt x="0" y="988602"/>
-                </a:cubicBezTo>
-                <a:lnTo>
-                  <a:pt x="0" y="0"/>
-                </a:lnTo>
-                <a:cubicBezTo>
-                  <a:pt x="0" y="0"/>
-                  <a:pt x="16267" y="0"/>
-                  <a:pt x="36334" y="0"/>
-                </a:cubicBezTo>
-                <a:close/>
-              </a:path>
-            </a:pathLst>
-          </a:custGeom>
-          <a:gradFill>
-            <a:gsLst>
-              <a:gs pos="0">
-                <a:srgbClr val="151632"/>
-              </a:gs>
-              <a:gs pos="50000">
-                <a:srgbClr val="183E98"/>
-              </a:gs>
-              <a:gs pos="100000">
-                <a:srgbClr val="1B66FF"/>
-              </a:gs>
-            </a:gsLst>
-            <a:lin ang="5400000" scaled="1"/>
-          </a:gradFill>
-          <a:ln w="7263" cap="flat">
+          </p:spPr>
+          <p:txBody>
+            <a:bodyPr wrap="none" lIns="90000" rtlCol="0" anchor="t">
+              <a:spAutoFit/>
+            </a:bodyPr>
+            <a:lstStyle/>
+            <a:p>
+              <a:pPr algn="l">
+                <a:lnSpc>
+                  <a:spcPct val="113000"/>
+                </a:lnSpc>
+              </a:pPr>
+              <a:r>
+                <a:rPr lang="en-US" sz="1400" b="1" dirty="0" err="1">
+                  <a:solidFill>
+                    <a:srgbClr val="67E77F"/>
+                  </a:solidFill>
+                </a:rPr>
+                <a:t>Small</a:t>
+              </a:r>
+            </a:p>
+          </p:txBody>
+        </p:sp>
+        <p:sp>
+          <p:nvSpPr>
+            <p:cNvPr id="84" name="TextBox 83">
+              <a:extLst>
+                <a:ext uri="{FF2B5EF4-FFF2-40B4-BE49-F238E27FC236}">
+                  <a16:creationId xmlns:a16="http://schemas.microsoft.com/office/drawing/2014/main" id="{02B9148E-E5DB-E38E-63D0-559E35AAA3C9}"/>
+                </a:ext>
+              </a:extLst>
+            </p:cNvPr>
+            <p:cNvSpPr txBox="1"/>
+            <p:nvPr/>
+          </p:nvSpPr>
+          <p:spPr>
+            <a:xfrm>
+              <a:off x="8107374" y="1818652"/>
+              <a:ext cx="581526" cy="322268"/>
+            </a:xfrm>
+            <a:prstGeom prst="rect">
+              <a:avLst/>
+            </a:prstGeom>
             <a:noFill/>
-            <a:prstDash val="solid"/>
-            <a:miter/>
-          </a:ln>
-        </p:spPr>
-        <p:txBody>
-          <a:bodyPr rtlCol="0" anchor="ctr"/>
-          <a:lstStyle/>
-          <a:p>
-            <a:endParaRPr lang="en-US"/>
-          </a:p>
-        </p:txBody>
-      </p:sp>
-      <p:sp>
-        <p:nvSpPr>
-          <p:cNvPr id="36" name="Freeform 35">
-            <a:extLst>
-              <a:ext uri="{FF2B5EF4-FFF2-40B4-BE49-F238E27FC236}">
-                <a16:creationId xmlns:a16="http://schemas.microsoft.com/office/drawing/2014/main" id="{B9E9D148-4862-69E9-BA53-F8B9D84E3E99}"/>
-              </a:ext>
-            </a:extLst>
-          </p:cNvPr>
-          <p:cNvSpPr/>
-          <p:nvPr/>
-        </p:nvSpPr>
-        <p:spPr>
-          <a:xfrm flipH="1">
-            <a:off x="4541614" y="3046980"/>
-            <a:ext cx="4083908" cy="14538"/>
-          </a:xfrm>
-          <a:custGeom>
-            <a:avLst/>
-            <a:gdLst>
-              <a:gd name="connsiteX0" fmla="*/ 4076642 w 4083908"/>
-              <a:gd name="connsiteY0" fmla="*/ 14538 h 14538"/>
-              <a:gd name="connsiteX1" fmla="*/ 4083909 w 4083908"/>
-              <a:gd name="connsiteY1" fmla="*/ 7269 h 14538"/>
-              <a:gd name="connsiteX2" fmla="*/ 4076642 w 4083908"/>
-              <a:gd name="connsiteY2" fmla="*/ 0 h 14538"/>
-              <a:gd name="connsiteX3" fmla="*/ 4076642 w 4083908"/>
-              <a:gd name="connsiteY3" fmla="*/ 14538 h 14538"/>
-              <a:gd name="connsiteX4" fmla="*/ 0 w 4083908"/>
-              <a:gd name="connsiteY4" fmla="*/ 14538 h 14538"/>
-              <a:gd name="connsiteX5" fmla="*/ 4076642 w 4083908"/>
-              <a:gd name="connsiteY5" fmla="*/ 14538 h 14538"/>
-              <a:gd name="connsiteX6" fmla="*/ 4076642 w 4083908"/>
-              <a:gd name="connsiteY6" fmla="*/ 0 h 14538"/>
-              <a:gd name="connsiteX7" fmla="*/ 0 w 4083908"/>
-              <a:gd name="connsiteY7" fmla="*/ 0 h 14538"/>
-              <a:gd name="connsiteX8" fmla="*/ 0 w 4083908"/>
-              <a:gd name="connsiteY8" fmla="*/ 14538 h 14538"/>
-            </a:gdLst>
-            <a:ahLst/>
-            <a:cxnLst>
-              <a:cxn ang="0">
-                <a:pos x="connsiteX0" y="connsiteY0"/>
-              </a:cxn>
-              <a:cxn ang="0">
-                <a:pos x="connsiteX1" y="connsiteY1"/>
-              </a:cxn>
-              <a:cxn ang="0">
-                <a:pos x="connsiteX2" y="connsiteY2"/>
-              </a:cxn>
-              <a:cxn ang="0">
-                <a:pos x="connsiteX3" y="connsiteY3"/>
-              </a:cxn>
-              <a:cxn ang="0">
-                <a:pos x="connsiteX4" y="connsiteY4"/>
-              </a:cxn>
-              <a:cxn ang="0">
-                <a:pos x="connsiteX5" y="connsiteY5"/>
-              </a:cxn>
-              <a:cxn ang="0">
-                <a:pos x="connsiteX6" y="connsiteY6"/>
-              </a:cxn>
-              <a:cxn ang="0">
-                <a:pos x="connsiteX7" y="connsiteY7"/>
-              </a:cxn>
-              <a:cxn ang="0">
-                <a:pos x="connsiteX8" y="connsiteY8"/>
-              </a:cxn>
-            </a:cxnLst>
-            <a:rect l="l" t="t" r="r" b="b"/>
-            <a:pathLst>
-              <a:path w="4083908" h="14538">
-                <a:moveTo>
-                  <a:pt x="4076642" y="14538"/>
-                </a:moveTo>
-                <a:cubicBezTo>
-                  <a:pt x="4080653" y="14538"/>
-                  <a:pt x="4083909" y="11282"/>
-                  <a:pt x="4083909" y="7269"/>
-                </a:cubicBezTo>
-                <a:cubicBezTo>
-                  <a:pt x="4083909" y="3257"/>
-                  <a:pt x="4080653" y="0"/>
-                  <a:pt x="4076642" y="0"/>
-                </a:cubicBezTo>
-                <a:lnTo>
-                  <a:pt x="4076642" y="14538"/>
-                </a:lnTo>
-                <a:close/>
-                <a:moveTo>
-                  <a:pt x="0" y="14538"/>
-                </a:moveTo>
-                <a:lnTo>
-                  <a:pt x="4076642" y="14538"/>
-                </a:lnTo>
-                <a:lnTo>
-                  <a:pt x="4076642" y="0"/>
-                </a:lnTo>
-                <a:lnTo>
-                  <a:pt x="0" y="0"/>
-                </a:lnTo>
-                <a:lnTo>
-                  <a:pt x="0" y="14538"/>
-                </a:lnTo>
-                <a:close/>
-              </a:path>
-            </a:pathLst>
-          </a:custGeom>
-          <a:gradFill>
-            <a:gsLst>
-              <a:gs pos="0">
-                <a:srgbClr val="DF6838"/>
-              </a:gs>
-              <a:gs pos="50000">
-                <a:srgbClr val="A3A75B"/>
-              </a:gs>
-              <a:gs pos="100000">
-                <a:srgbClr val="67E77F"/>
-              </a:gs>
-            </a:gsLst>
-            <a:lin ang="0" scaled="1"/>
-          </a:gradFill>
-          <a:ln w="7263" cap="flat">
-            <a:noFill/>
-            <a:prstDash val="solid"/>
-            <a:miter/>
-          </a:ln>
-        </p:spPr>
-        <p:txBody>
-          <a:bodyPr rtlCol="0" anchor="ctr"/>
-          <a:lstStyle/>
-          <a:p>
-            <a:endParaRPr lang="en-US"/>
-          </a:p>
-        </p:txBody>
-      </p:sp>
-      <p:sp>
-        <p:nvSpPr>
-          <p:cNvPr id="48" name="Freeform 47">
-            <a:extLst>
-              <a:ext uri="{FF2B5EF4-FFF2-40B4-BE49-F238E27FC236}">
-                <a16:creationId xmlns:a16="http://schemas.microsoft.com/office/drawing/2014/main" id="{46575717-713F-D704-3EC6-F5580B9C6370}"/>
-              </a:ext>
-            </a:extLst>
-          </p:cNvPr>
-          <p:cNvSpPr/>
-          <p:nvPr/>
-        </p:nvSpPr>
-        <p:spPr>
-          <a:xfrm>
-            <a:off x="4399598" y="2832540"/>
-            <a:ext cx="378145" cy="301667"/>
-          </a:xfrm>
-          <a:custGeom>
-            <a:avLst/>
-            <a:gdLst>
-              <a:gd name="connsiteX0" fmla="*/ 184470 w 343768"/>
-              <a:gd name="connsiteY0" fmla="*/ 294400 h 301667"/>
-              <a:gd name="connsiteX1" fmla="*/ 159298 w 343768"/>
-              <a:gd name="connsiteY1" fmla="*/ 294400 h 301667"/>
-              <a:gd name="connsiteX2" fmla="*/ 1966 w 343768"/>
-              <a:gd name="connsiteY2" fmla="*/ 21807 h 301667"/>
-              <a:gd name="connsiteX3" fmla="*/ 14552 w 343768"/>
-              <a:gd name="connsiteY3" fmla="*/ 0 h 301667"/>
-              <a:gd name="connsiteX4" fmla="*/ 329216 w 343768"/>
-              <a:gd name="connsiteY4" fmla="*/ 0 h 301667"/>
-              <a:gd name="connsiteX5" fmla="*/ 341802 w 343768"/>
-              <a:gd name="connsiteY5" fmla="*/ 21807 h 301667"/>
-              <a:gd name="connsiteX6" fmla="*/ 184470 w 343768"/>
-              <a:gd name="connsiteY6" fmla="*/ 294400 h 301667"/>
-            </a:gdLst>
-            <a:ahLst/>
-            <a:cxnLst>
-              <a:cxn ang="0">
-                <a:pos x="connsiteX0" y="connsiteY0"/>
-              </a:cxn>
-              <a:cxn ang="0">
-                <a:pos x="connsiteX1" y="connsiteY1"/>
-              </a:cxn>
-              <a:cxn ang="0">
-                <a:pos x="connsiteX2" y="connsiteY2"/>
-              </a:cxn>
-              <a:cxn ang="0">
-                <a:pos x="connsiteX3" y="connsiteY3"/>
-              </a:cxn>
-              <a:cxn ang="0">
-                <a:pos x="connsiteX4" y="connsiteY4"/>
-              </a:cxn>
-              <a:cxn ang="0">
-                <a:pos x="connsiteX5" y="connsiteY5"/>
-              </a:cxn>
-              <a:cxn ang="0">
-                <a:pos x="connsiteX6" y="connsiteY6"/>
-              </a:cxn>
-            </a:cxnLst>
-            <a:rect l="l" t="t" r="r" b="b"/>
-            <a:pathLst>
-              <a:path w="343768" h="301667">
-                <a:moveTo>
-                  <a:pt x="184470" y="294400"/>
-                </a:moveTo>
-                <a:cubicBezTo>
-                  <a:pt x="178875" y="304090"/>
-                  <a:pt x="164893" y="304090"/>
-                  <a:pt x="159298" y="294400"/>
-                </a:cubicBezTo>
-                <a:lnTo>
-                  <a:pt x="1966" y="21807"/>
-                </a:lnTo>
-                <a:cubicBezTo>
-                  <a:pt x="-3622" y="12118"/>
-                  <a:pt x="3368" y="0"/>
-                  <a:pt x="14552" y="0"/>
-                </a:cubicBezTo>
-                <a:lnTo>
-                  <a:pt x="329216" y="0"/>
-                </a:lnTo>
-                <a:cubicBezTo>
-                  <a:pt x="340400" y="0"/>
-                  <a:pt x="347390" y="12118"/>
-                  <a:pt x="341802" y="21807"/>
-                </a:cubicBezTo>
-                <a:lnTo>
-                  <a:pt x="184470" y="294400"/>
-                </a:lnTo>
-                <a:close/>
-              </a:path>
-            </a:pathLst>
-          </a:custGeom>
-          <a:solidFill>
-            <a:srgbClr val="0066FF"/>
-          </a:solidFill>
-          <a:ln w="7263" cap="flat">
-            <a:noFill/>
-            <a:prstDash val="solid"/>
-            <a:miter/>
-          </a:ln>
-        </p:spPr>
-        <p:txBody>
-          <a:bodyPr lIns="0" rIns="0" rtlCol="0" anchor="ctr"/>
-          <a:lstStyle/>
-          <a:p>
-            <a:pPr algn="ctr"/>
-            <a:r>
-              <a:rPr lang="en-US" sz="1000" b="1">
-                <a:solidFill>
-                  <a:srgbClr val="0066FF"/>
-                </a:solidFill>
-              </a:rPr>
-              <a:t>MARKER_MODERNIZATION_TECHNICAL_DEBT</a:t>
-            </a:r>
-          </a:p>
-        </p:txBody>
-      </p:sp>
-      <p:sp>
-        <p:nvSpPr>
-          <p:cNvPr id="49" name="Freeform 48">
-            <a:extLst>
-              <a:ext uri="{FF2B5EF4-FFF2-40B4-BE49-F238E27FC236}">
-                <a16:creationId xmlns:a16="http://schemas.microsoft.com/office/drawing/2014/main" id="{B2AF553E-630F-A3D7-EEE7-C3302EE3FBAC}"/>
-              </a:ext>
-            </a:extLst>
-          </p:cNvPr>
-          <p:cNvSpPr/>
-          <p:nvPr/>
-        </p:nvSpPr>
-        <p:spPr>
-          <a:xfrm>
-            <a:off x="4585215" y="4195502"/>
-            <a:ext cx="4083908" cy="14538"/>
-          </a:xfrm>
-          <a:custGeom>
-            <a:avLst/>
-            <a:gdLst>
-              <a:gd name="connsiteX0" fmla="*/ 4076642 w 4083908"/>
-              <a:gd name="connsiteY0" fmla="*/ 14538 h 14538"/>
-              <a:gd name="connsiteX1" fmla="*/ 4083909 w 4083908"/>
-              <a:gd name="connsiteY1" fmla="*/ 7269 h 14538"/>
-              <a:gd name="connsiteX2" fmla="*/ 4076642 w 4083908"/>
-              <a:gd name="connsiteY2" fmla="*/ 0 h 14538"/>
-              <a:gd name="connsiteX3" fmla="*/ 4076642 w 4083908"/>
-              <a:gd name="connsiteY3" fmla="*/ 14538 h 14538"/>
-              <a:gd name="connsiteX4" fmla="*/ 0 w 4083908"/>
-              <a:gd name="connsiteY4" fmla="*/ 14538 h 14538"/>
-              <a:gd name="connsiteX5" fmla="*/ 4076642 w 4083908"/>
-              <a:gd name="connsiteY5" fmla="*/ 14538 h 14538"/>
-              <a:gd name="connsiteX6" fmla="*/ 4076642 w 4083908"/>
-              <a:gd name="connsiteY6" fmla="*/ 0 h 14538"/>
-              <a:gd name="connsiteX7" fmla="*/ 0 w 4083908"/>
-              <a:gd name="connsiteY7" fmla="*/ 0 h 14538"/>
-              <a:gd name="connsiteX8" fmla="*/ 0 w 4083908"/>
-              <a:gd name="connsiteY8" fmla="*/ 14538 h 14538"/>
-            </a:gdLst>
-            <a:ahLst/>
-            <a:cxnLst>
-              <a:cxn ang="0">
-                <a:pos x="connsiteX0" y="connsiteY0"/>
-              </a:cxn>
-              <a:cxn ang="0">
-                <a:pos x="connsiteX1" y="connsiteY1"/>
-              </a:cxn>
-              <a:cxn ang="0">
-                <a:pos x="connsiteX2" y="connsiteY2"/>
-              </a:cxn>
-              <a:cxn ang="0">
-                <a:pos x="connsiteX3" y="connsiteY3"/>
-              </a:cxn>
-              <a:cxn ang="0">
-                <a:pos x="connsiteX4" y="connsiteY4"/>
-              </a:cxn>
-              <a:cxn ang="0">
-                <a:pos x="connsiteX5" y="connsiteY5"/>
-              </a:cxn>
-              <a:cxn ang="0">
-                <a:pos x="connsiteX6" y="connsiteY6"/>
-              </a:cxn>
-              <a:cxn ang="0">
-                <a:pos x="connsiteX7" y="connsiteY7"/>
-              </a:cxn>
-              <a:cxn ang="0">
-                <a:pos x="connsiteX8" y="connsiteY8"/>
-              </a:cxn>
-            </a:cxnLst>
-            <a:rect l="l" t="t" r="r" b="b"/>
-            <a:pathLst>
-              <a:path w="4083908" h="14538">
-                <a:moveTo>
-                  <a:pt x="4076642" y="14538"/>
-                </a:moveTo>
-                <a:cubicBezTo>
-                  <a:pt x="4080653" y="14538"/>
-                  <a:pt x="4083909" y="11282"/>
-                  <a:pt x="4083909" y="7269"/>
-                </a:cubicBezTo>
-                <a:cubicBezTo>
-                  <a:pt x="4083909" y="3257"/>
-                  <a:pt x="4080653" y="0"/>
-                  <a:pt x="4076642" y="0"/>
-                </a:cubicBezTo>
-                <a:lnTo>
-                  <a:pt x="4076642" y="14538"/>
-                </a:lnTo>
-                <a:close/>
-                <a:moveTo>
-                  <a:pt x="0" y="14538"/>
-                </a:moveTo>
-                <a:lnTo>
-                  <a:pt x="4076642" y="14538"/>
-                </a:lnTo>
-                <a:lnTo>
-                  <a:pt x="4076642" y="0"/>
-                </a:lnTo>
-                <a:lnTo>
-                  <a:pt x="0" y="0"/>
-                </a:lnTo>
-                <a:lnTo>
-                  <a:pt x="0" y="14538"/>
-                </a:lnTo>
-                <a:close/>
-              </a:path>
-            </a:pathLst>
-          </a:custGeom>
-          <a:gradFill>
-            <a:gsLst>
-              <a:gs pos="0">
-                <a:srgbClr val="DF6838"/>
-              </a:gs>
-              <a:gs pos="50000">
-                <a:srgbClr val="A3A75B"/>
-              </a:gs>
-              <a:gs pos="100000">
-                <a:srgbClr val="67E77F"/>
-              </a:gs>
-            </a:gsLst>
-            <a:lin ang="0" scaled="1"/>
-          </a:gradFill>
-          <a:ln w="7263" cap="flat">
-            <a:noFill/>
-            <a:prstDash val="solid"/>
-            <a:miter/>
-          </a:ln>
-        </p:spPr>
-        <p:txBody>
-          <a:bodyPr rtlCol="0" anchor="ctr"/>
-          <a:lstStyle/>
-          <a:p>
-            <a:endParaRPr lang="en-US"/>
-          </a:p>
-        </p:txBody>
-      </p:sp>
-      <p:sp>
-        <p:nvSpPr>
-          <p:cNvPr id="62" name="Freeform 61">
-            <a:extLst>
-              <a:ext uri="{FF2B5EF4-FFF2-40B4-BE49-F238E27FC236}">
-                <a16:creationId xmlns:a16="http://schemas.microsoft.com/office/drawing/2014/main" id="{5AFD0732-87D6-6F51-90E0-5730B444D262}"/>
-              </a:ext>
-            </a:extLst>
-          </p:cNvPr>
-          <p:cNvSpPr/>
-          <p:nvPr/>
-        </p:nvSpPr>
-        <p:spPr>
-          <a:xfrm>
-            <a:off x="4399598" y="3959256"/>
-            <a:ext cx="378145" cy="301667"/>
-          </a:xfrm>
-          <a:custGeom>
-            <a:avLst/>
-            <a:gdLst>
-              <a:gd name="connsiteX0" fmla="*/ 184470 w 343768"/>
-              <a:gd name="connsiteY0" fmla="*/ 294400 h 301667"/>
-              <a:gd name="connsiteX1" fmla="*/ 159298 w 343768"/>
-              <a:gd name="connsiteY1" fmla="*/ 294400 h 301667"/>
-              <a:gd name="connsiteX2" fmla="*/ 1966 w 343768"/>
-              <a:gd name="connsiteY2" fmla="*/ 21807 h 301667"/>
-              <a:gd name="connsiteX3" fmla="*/ 14552 w 343768"/>
-              <a:gd name="connsiteY3" fmla="*/ 0 h 301667"/>
-              <a:gd name="connsiteX4" fmla="*/ 329216 w 343768"/>
-              <a:gd name="connsiteY4" fmla="*/ 0 h 301667"/>
-              <a:gd name="connsiteX5" fmla="*/ 341802 w 343768"/>
-              <a:gd name="connsiteY5" fmla="*/ 21807 h 301667"/>
-              <a:gd name="connsiteX6" fmla="*/ 184470 w 343768"/>
-              <a:gd name="connsiteY6" fmla="*/ 294400 h 301667"/>
-            </a:gdLst>
-            <a:ahLst/>
-            <a:cxnLst>
-              <a:cxn ang="0">
-                <a:pos x="connsiteX0" y="connsiteY0"/>
-              </a:cxn>
-              <a:cxn ang="0">
-                <a:pos x="connsiteX1" y="connsiteY1"/>
-              </a:cxn>
-              <a:cxn ang="0">
-                <a:pos x="connsiteX2" y="connsiteY2"/>
-              </a:cxn>
-              <a:cxn ang="0">
-                <a:pos x="connsiteX3" y="connsiteY3"/>
-              </a:cxn>
-              <a:cxn ang="0">
-                <a:pos x="connsiteX4" y="connsiteY4"/>
-              </a:cxn>
-              <a:cxn ang="0">
-                <a:pos x="connsiteX5" y="connsiteY5"/>
-              </a:cxn>
-              <a:cxn ang="0">
-                <a:pos x="connsiteX6" y="connsiteY6"/>
-              </a:cxn>
-            </a:cxnLst>
-            <a:rect l="l" t="t" r="r" b="b"/>
-            <a:pathLst>
-              <a:path w="343768" h="301667">
-                <a:moveTo>
-                  <a:pt x="184470" y="294400"/>
-                </a:moveTo>
-                <a:cubicBezTo>
-                  <a:pt x="178875" y="304090"/>
-                  <a:pt x="164893" y="304090"/>
-                  <a:pt x="159298" y="294400"/>
-                </a:cubicBezTo>
-                <a:lnTo>
-                  <a:pt x="1966" y="21807"/>
-                </a:lnTo>
-                <a:cubicBezTo>
-                  <a:pt x="-3622" y="12118"/>
-                  <a:pt x="3368" y="0"/>
-                  <a:pt x="14552" y="0"/>
-                </a:cubicBezTo>
-                <a:lnTo>
-                  <a:pt x="329216" y="0"/>
-                </a:lnTo>
-                <a:cubicBezTo>
-                  <a:pt x="340400" y="0"/>
-                  <a:pt x="347390" y="12118"/>
-                  <a:pt x="341802" y="21807"/>
-                </a:cubicBezTo>
-                <a:lnTo>
-                  <a:pt x="184470" y="294400"/>
-                </a:lnTo>
-                <a:close/>
-              </a:path>
-            </a:pathLst>
-          </a:custGeom>
-          <a:solidFill>
-            <a:srgbClr val="0066FF"/>
-          </a:solidFill>
-          <a:ln w="7263" cap="flat">
-            <a:noFill/>
-            <a:prstDash val="solid"/>
-            <a:miter/>
-          </a:ln>
-        </p:spPr>
-        <p:txBody>
-          <a:bodyPr lIns="0" rIns="0" rtlCol="0" anchor="ctr"/>
-          <a:lstStyle/>
-          <a:p>
-            <a:pPr algn="ctr"/>
-            <a:r>
-              <a:rPr lang="en-US" sz="1000" b="1">
-                <a:solidFill>
-                  <a:srgbClr val="0066FF"/>
-                </a:solidFill>
-              </a:rPr>
-              <a:t>MARKER_MODERNIZATION_SPEED</a:t>
-            </a:r>
-          </a:p>
-        </p:txBody>
-      </p:sp>
-      <p:sp>
-        <p:nvSpPr>
-          <p:cNvPr id="63" name="Freeform 62">
-            <a:extLst>
-              <a:ext uri="{FF2B5EF4-FFF2-40B4-BE49-F238E27FC236}">
-                <a16:creationId xmlns:a16="http://schemas.microsoft.com/office/drawing/2014/main" id="{E09308EB-33D2-D378-2B71-06F03D8AC3BF}"/>
-              </a:ext>
-            </a:extLst>
-          </p:cNvPr>
-          <p:cNvSpPr/>
-          <p:nvPr/>
-        </p:nvSpPr>
-        <p:spPr>
-          <a:xfrm>
-            <a:off x="4399598" y="5144124"/>
-            <a:ext cx="378144" cy="301667"/>
-          </a:xfrm>
-          <a:custGeom>
-            <a:avLst/>
-            <a:gdLst>
-              <a:gd name="connsiteX0" fmla="*/ 184470 w 343767"/>
-              <a:gd name="connsiteY0" fmla="*/ 294400 h 301667"/>
-              <a:gd name="connsiteX1" fmla="*/ 159298 w 343767"/>
-              <a:gd name="connsiteY1" fmla="*/ 294400 h 301667"/>
-              <a:gd name="connsiteX2" fmla="*/ 1966 w 343767"/>
-              <a:gd name="connsiteY2" fmla="*/ 21807 h 301667"/>
-              <a:gd name="connsiteX3" fmla="*/ 14552 w 343767"/>
-              <a:gd name="connsiteY3" fmla="*/ 0 h 301667"/>
-              <a:gd name="connsiteX4" fmla="*/ 329216 w 343767"/>
-              <a:gd name="connsiteY4" fmla="*/ 0 h 301667"/>
-              <a:gd name="connsiteX5" fmla="*/ 341802 w 343767"/>
-              <a:gd name="connsiteY5" fmla="*/ 21807 h 301667"/>
-              <a:gd name="connsiteX6" fmla="*/ 184470 w 343767"/>
-              <a:gd name="connsiteY6" fmla="*/ 294400 h 301667"/>
-            </a:gdLst>
-            <a:ahLst/>
-            <a:cxnLst>
-              <a:cxn ang="0">
-                <a:pos x="connsiteX0" y="connsiteY0"/>
-              </a:cxn>
-              <a:cxn ang="0">
-                <a:pos x="connsiteX1" y="connsiteY1"/>
-              </a:cxn>
-              <a:cxn ang="0">
-                <a:pos x="connsiteX2" y="connsiteY2"/>
-              </a:cxn>
-              <a:cxn ang="0">
-                <a:pos x="connsiteX3" y="connsiteY3"/>
-              </a:cxn>
-              <a:cxn ang="0">
-                <a:pos x="connsiteX4" y="connsiteY4"/>
-              </a:cxn>
-              <a:cxn ang="0">
-                <a:pos x="connsiteX5" y="connsiteY5"/>
-              </a:cxn>
-              <a:cxn ang="0">
-                <a:pos x="connsiteX6" y="connsiteY6"/>
-              </a:cxn>
-            </a:cxnLst>
-            <a:rect l="l" t="t" r="r" b="b"/>
-            <a:pathLst>
-              <a:path w="343767" h="301667">
-                <a:moveTo>
-                  <a:pt x="184470" y="294400"/>
-                </a:moveTo>
-                <a:cubicBezTo>
-                  <a:pt x="178874" y="304090"/>
-                  <a:pt x="164894" y="304090"/>
-                  <a:pt x="159298" y="294400"/>
-                </a:cubicBezTo>
-                <a:lnTo>
-                  <a:pt x="1966" y="21807"/>
-                </a:lnTo>
-                <a:cubicBezTo>
-                  <a:pt x="-3622" y="12118"/>
-                  <a:pt x="3368" y="0"/>
-                  <a:pt x="14552" y="0"/>
-                </a:cubicBezTo>
-                <a:lnTo>
-                  <a:pt x="329216" y="0"/>
-                </a:lnTo>
-                <a:cubicBezTo>
-                  <a:pt x="340400" y="0"/>
-                  <a:pt x="347390" y="12118"/>
-                  <a:pt x="341802" y="21807"/>
-                </a:cubicBezTo>
-                <a:lnTo>
-                  <a:pt x="184470" y="294400"/>
-                </a:lnTo>
-                <a:close/>
-              </a:path>
-            </a:pathLst>
-          </a:custGeom>
-          <a:solidFill>
-            <a:srgbClr val="0066FF"/>
-          </a:solidFill>
-          <a:ln w="7263" cap="flat">
-            <a:noFill/>
-            <a:prstDash val="solid"/>
-            <a:miter/>
-          </a:ln>
-        </p:spPr>
-        <p:txBody>
-          <a:bodyPr lIns="0" rIns="0" rtlCol="0" anchor="ctr"/>
-          <a:lstStyle/>
-          <a:p>
-            <a:pPr algn="ctr"/>
-            <a:r>
-              <a:rPr lang="en-US" sz="1000" b="1">
-                <a:solidFill>
-                  <a:srgbClr val="0066FF"/>
-                </a:solidFill>
-              </a:rPr>
-              <a:t>MARKER_MODERNIZATION_EFFORT</a:t>
-            </a:r>
-          </a:p>
-        </p:txBody>
-      </p:sp>
-      <p:sp>
-        <p:nvSpPr>
-          <p:cNvPr id="64" name="Freeform 63">
-            <a:extLst>
-              <a:ext uri="{FF2B5EF4-FFF2-40B4-BE49-F238E27FC236}">
-                <a16:creationId xmlns:a16="http://schemas.microsoft.com/office/drawing/2014/main" id="{AD7217BB-9C0A-9421-773D-16A8A688C1E1}"/>
-              </a:ext>
-            </a:extLst>
-          </p:cNvPr>
-          <p:cNvSpPr/>
-          <p:nvPr/>
-        </p:nvSpPr>
-        <p:spPr>
-          <a:xfrm>
-            <a:off x="3502470" y="2727138"/>
-            <a:ext cx="436006" cy="436147"/>
-          </a:xfrm>
-          <a:custGeom>
-            <a:avLst/>
-            <a:gdLst>
-              <a:gd name="connsiteX0" fmla="*/ 430293 w 436006"/>
-              <a:gd name="connsiteY0" fmla="*/ 356485 h 436147"/>
-              <a:gd name="connsiteX1" fmla="*/ 250216 w 436006"/>
-              <a:gd name="connsiteY1" fmla="*/ 175259 h 436147"/>
-              <a:gd name="connsiteX2" fmla="*/ 220531 w 436006"/>
-              <a:gd name="connsiteY2" fmla="*/ 37843 h 436147"/>
-              <a:gd name="connsiteX3" fmla="*/ 74097 w 436006"/>
-              <a:gd name="connsiteY3" fmla="*/ 11950 h 436147"/>
-              <a:gd name="connsiteX4" fmla="*/ 159185 w 436006"/>
-              <a:gd name="connsiteY4" fmla="*/ 97588 h 436147"/>
-              <a:gd name="connsiteX5" fmla="*/ 99822 w 436006"/>
-              <a:gd name="connsiteY5" fmla="*/ 157333 h 436147"/>
-              <a:gd name="connsiteX6" fmla="*/ 12752 w 436006"/>
-              <a:gd name="connsiteY6" fmla="*/ 71695 h 436147"/>
-              <a:gd name="connsiteX7" fmla="*/ 38477 w 436006"/>
-              <a:gd name="connsiteY7" fmla="*/ 219070 h 436147"/>
-              <a:gd name="connsiteX8" fmla="*/ 175019 w 436006"/>
-              <a:gd name="connsiteY8" fmla="*/ 248946 h 436147"/>
-              <a:gd name="connsiteX9" fmla="*/ 355097 w 436006"/>
-              <a:gd name="connsiteY9" fmla="*/ 430173 h 436147"/>
-              <a:gd name="connsiteX10" fmla="*/ 382805 w 436006"/>
-              <a:gd name="connsiteY10" fmla="*/ 430173 h 436147"/>
-              <a:gd name="connsiteX11" fmla="*/ 428316 w 436006"/>
-              <a:gd name="connsiteY11" fmla="*/ 384370 h 436147"/>
-              <a:gd name="connsiteX12" fmla="*/ 430293 w 436006"/>
-              <a:gd name="connsiteY12" fmla="*/ 356485 h 436147"/>
-            </a:gdLst>
-            <a:ahLst/>
-            <a:cxnLst>
-              <a:cxn ang="0">
-                <a:pos x="connsiteX0" y="connsiteY0"/>
-              </a:cxn>
-              <a:cxn ang="0">
-                <a:pos x="connsiteX1" y="connsiteY1"/>
-              </a:cxn>
-              <a:cxn ang="0">
-                <a:pos x="connsiteX2" y="connsiteY2"/>
-              </a:cxn>
-              <a:cxn ang="0">
-                <a:pos x="connsiteX3" y="connsiteY3"/>
-              </a:cxn>
-              <a:cxn ang="0">
-                <a:pos x="connsiteX4" y="connsiteY4"/>
-              </a:cxn>
-              <a:cxn ang="0">
-                <a:pos x="connsiteX5" y="connsiteY5"/>
-              </a:cxn>
-              <a:cxn ang="0">
-                <a:pos x="connsiteX6" y="connsiteY6"/>
-              </a:cxn>
-              <a:cxn ang="0">
-                <a:pos x="connsiteX7" y="connsiteY7"/>
-              </a:cxn>
-              <a:cxn ang="0">
-                <a:pos x="connsiteX8" y="connsiteY8"/>
-              </a:cxn>
-              <a:cxn ang="0">
-                <a:pos x="connsiteX9" y="connsiteY9"/>
-              </a:cxn>
-              <a:cxn ang="0">
-                <a:pos x="connsiteX10" y="connsiteY10"/>
-              </a:cxn>
-              <a:cxn ang="0">
-                <a:pos x="connsiteX11" y="connsiteY11"/>
-              </a:cxn>
-              <a:cxn ang="0">
-                <a:pos x="connsiteX12" y="connsiteY12"/>
-              </a:cxn>
-            </a:cxnLst>
-            <a:rect l="l" t="t" r="r" b="b"/>
-            <a:pathLst>
-              <a:path w="436006" h="436147">
-                <a:moveTo>
-                  <a:pt x="430293" y="356485"/>
-                </a:moveTo>
-                <a:lnTo>
-                  <a:pt x="250216" y="175259"/>
-                </a:lnTo>
-                <a:cubicBezTo>
-                  <a:pt x="268027" y="129456"/>
-                  <a:pt x="258129" y="75679"/>
-                  <a:pt x="220531" y="37843"/>
-                </a:cubicBezTo>
-                <a:cubicBezTo>
-                  <a:pt x="180956" y="-1992"/>
-                  <a:pt x="121589" y="-9951"/>
-                  <a:pt x="74097" y="11950"/>
-                </a:cubicBezTo>
-                <a:lnTo>
-                  <a:pt x="159185" y="97588"/>
-                </a:lnTo>
-                <a:lnTo>
-                  <a:pt x="99822" y="157333"/>
-                </a:lnTo>
-                <a:lnTo>
-                  <a:pt x="12752" y="71695"/>
-                </a:lnTo>
-                <a:cubicBezTo>
-                  <a:pt x="-10995" y="119497"/>
-                  <a:pt x="-1101" y="179242"/>
-                  <a:pt x="38477" y="219070"/>
-                </a:cubicBezTo>
-                <a:cubicBezTo>
-                  <a:pt x="76076" y="256913"/>
-                  <a:pt x="129505" y="266872"/>
-                  <a:pt x="175019" y="248946"/>
-                </a:cubicBezTo>
-                <a:lnTo>
-                  <a:pt x="355097" y="430173"/>
-                </a:lnTo>
-                <a:cubicBezTo>
-                  <a:pt x="363010" y="438139"/>
-                  <a:pt x="374884" y="438139"/>
-                  <a:pt x="382805" y="430173"/>
-                </a:cubicBezTo>
-                <a:lnTo>
-                  <a:pt x="428316" y="384370"/>
-                </a:lnTo>
-                <a:cubicBezTo>
-                  <a:pt x="438214" y="376403"/>
-                  <a:pt x="438214" y="362461"/>
-                  <a:pt x="430293" y="356485"/>
-                </a:cubicBezTo>
-                <a:close/>
-              </a:path>
-            </a:pathLst>
-          </a:custGeom>
-          <a:noFill/>
-          <a:ln w="7263" cap="flat">
-            <a:solidFill>
-              <a:srgbClr val="FFFFFF"/>
-            </a:solidFill>
-            <a:prstDash val="solid"/>
-            <a:miter/>
-          </a:ln>
-        </p:spPr>
-        <p:txBody>
-          <a:bodyPr rtlCol="0" anchor="ctr"/>
-          <a:lstStyle/>
-          <a:p>
-            <a:endParaRPr lang="en-US"/>
-          </a:p>
-        </p:txBody>
-      </p:sp>
-      <p:pic>
-        <p:nvPicPr>
-          <p:cNvPr id="68" name="Graphic 67">
-            <a:extLst>
-              <a:ext uri="{FF2B5EF4-FFF2-40B4-BE49-F238E27FC236}">
-                <a16:creationId xmlns:a16="http://schemas.microsoft.com/office/drawing/2014/main" id="{5B8B6CE0-96F1-FE31-6A30-9D720FFCF6B0}"/>
-              </a:ext>
-            </a:extLst>
-          </p:cNvPr>
-          <p:cNvPicPr>
-            <a:picLocks noChangeAspect="1"/>
-          </p:cNvPicPr>
-          <p:nvPr/>
-        </p:nvPicPr>
-        <p:blipFill>
-          <a:blip r:embed="rId2">
-            <a:extLst>
-              <a:ext uri="{96DAC541-7B7A-43D3-8B79-37D633B846F1}">
-                <asvg:svgBlip xmlns:asvg="http://schemas.microsoft.com/office/drawing/2016/SVG/main" r:embed="rId3"/>
-              </a:ext>
-            </a:extLst>
-          </a:blip>
-          <a:stretch>
-            <a:fillRect/>
-          </a:stretch>
-        </p:blipFill>
-        <p:spPr>
-          <a:xfrm>
-            <a:off x="3422441" y="3835021"/>
-            <a:ext cx="582058" cy="498480"/>
-          </a:xfrm>
-          <a:prstGeom prst="rect">
-            <a:avLst/>
-          </a:prstGeom>
-        </p:spPr>
-      </p:pic>
-      <p:pic>
-        <p:nvPicPr>
-          <p:cNvPr id="69" name="Graphic 68">
-            <a:extLst>
-              <a:ext uri="{FF2B5EF4-FFF2-40B4-BE49-F238E27FC236}">
-                <a16:creationId xmlns:a16="http://schemas.microsoft.com/office/drawing/2014/main" id="{E418F06E-C20B-037A-E6C6-026F0159DA28}"/>
-              </a:ext>
-            </a:extLst>
-          </p:cNvPr>
-          <p:cNvPicPr>
-            <a:picLocks noChangeAspect="1"/>
-          </p:cNvPicPr>
-          <p:nvPr/>
-        </p:nvPicPr>
-        <p:blipFill>
-          <a:blip r:embed="rId4">
-            <a:extLst>
-              <a:ext uri="{96DAC541-7B7A-43D3-8B79-37D633B846F1}">
-                <asvg:svgBlip xmlns:asvg="http://schemas.microsoft.com/office/drawing/2016/SVG/main" r:embed="rId5"/>
-              </a:ext>
-            </a:extLst>
-          </a:blip>
-          <a:stretch>
-            <a:fillRect/>
-          </a:stretch>
-        </p:blipFill>
-        <p:spPr>
-          <a:xfrm>
-            <a:off x="3458380" y="1520447"/>
-            <a:ext cx="515100" cy="436659"/>
-          </a:xfrm>
-          <a:prstGeom prst="rect">
-            <a:avLst/>
-          </a:prstGeom>
-        </p:spPr>
-      </p:pic>
-      <p:sp>
-        <p:nvSpPr>
-          <p:cNvPr id="71" name="TextBox 70">
-            <a:extLst>
-              <a:ext uri="{FF2B5EF4-FFF2-40B4-BE49-F238E27FC236}">
-                <a16:creationId xmlns:a16="http://schemas.microsoft.com/office/drawing/2014/main" id="{3830E433-EC1A-9E7D-C276-49B7EEF215C7}"/>
-              </a:ext>
-            </a:extLst>
-          </p:cNvPr>
-          <p:cNvSpPr txBox="1"/>
-          <p:nvPr/>
-        </p:nvSpPr>
-        <p:spPr>
-          <a:xfrm>
-            <a:off x="3175467" y="2067739"/>
-            <a:ext cx="1090012" cy="273023"/>
-          </a:xfrm>
-          <a:prstGeom prst="rect">
-            <a:avLst/>
-          </a:prstGeom>
-          <a:noFill/>
-        </p:spPr>
-        <p:txBody>
-          <a:bodyPr wrap="square" lIns="90000" rtlCol="0" anchor="t">
-            <a:spAutoFit/>
-          </a:bodyPr>
-          <a:lstStyle/>
-          <a:p>
-            <a:pPr algn="ctr">
-              <a:lnSpc>
-                <a:spcPct val="113000"/>
-              </a:lnSpc>
-            </a:pPr>
-            <a:r>
-              <a:rPr lang="en-US" sz="1100" b="1" dirty="0" err="1">
-                <a:solidFill>
-                  <a:schemeClr val="bg1"/>
-                </a:solidFill>
-              </a:rPr>
-              <a:t>Portfolio size</a:t>
-            </a:r>
-          </a:p>
-        </p:txBody>
-      </p:sp>
-      <p:sp>
-        <p:nvSpPr>
-          <p:cNvPr id="72" name="TextBox 71">
-            <a:extLst>
-              <a:ext uri="{FF2B5EF4-FFF2-40B4-BE49-F238E27FC236}">
-                <a16:creationId xmlns:a16="http://schemas.microsoft.com/office/drawing/2014/main" id="{4412F752-0CE5-8B8B-AF34-A1B61ECF1CEA}"/>
-              </a:ext>
-            </a:extLst>
-          </p:cNvPr>
-          <p:cNvSpPr txBox="1"/>
-          <p:nvPr/>
-        </p:nvSpPr>
-        <p:spPr>
-          <a:xfrm>
-            <a:off x="3175467" y="3240468"/>
-            <a:ext cx="1090012" cy="273023"/>
-          </a:xfrm>
-          <a:prstGeom prst="rect">
-            <a:avLst/>
-          </a:prstGeom>
-          <a:noFill/>
-        </p:spPr>
-        <p:txBody>
-          <a:bodyPr wrap="square" lIns="0" rIns="0" rtlCol="0" anchor="t">
-            <a:spAutoFit/>
-          </a:bodyPr>
-          <a:lstStyle/>
-          <a:p>
-            <a:pPr algn="ctr">
-              <a:lnSpc>
-                <a:spcPct val="113000"/>
-              </a:lnSpc>
-            </a:pPr>
-            <a:r>
-              <a:rPr lang="en-US" sz="1100" b="1" dirty="0" err="1">
-                <a:solidFill>
-                  <a:schemeClr val="bg1"/>
-                </a:solidFill>
-              </a:rPr>
-              <a:t>Technical debt</a:t>
-            </a:r>
-          </a:p>
-        </p:txBody>
-      </p:sp>
-      <p:sp>
-        <p:nvSpPr>
-          <p:cNvPr id="73" name="TextBox 72">
-            <a:extLst>
-              <a:ext uri="{FF2B5EF4-FFF2-40B4-BE49-F238E27FC236}">
-                <a16:creationId xmlns:a16="http://schemas.microsoft.com/office/drawing/2014/main" id="{289C0F40-A36E-1F14-8EA9-2B436B82C6AD}"/>
-              </a:ext>
-            </a:extLst>
-          </p:cNvPr>
-          <p:cNvSpPr txBox="1"/>
-          <p:nvPr/>
-        </p:nvSpPr>
-        <p:spPr>
-          <a:xfrm>
-            <a:off x="3175467" y="4409095"/>
-            <a:ext cx="1090012" cy="273023"/>
-          </a:xfrm>
-          <a:prstGeom prst="rect">
-            <a:avLst/>
-          </a:prstGeom>
-          <a:noFill/>
-        </p:spPr>
-        <p:txBody>
-          <a:bodyPr wrap="square" lIns="0" rIns="0" rtlCol="0" anchor="t">
-            <a:spAutoFit/>
-          </a:bodyPr>
-          <a:lstStyle/>
-          <a:p>
-            <a:pPr algn="ctr">
-              <a:lnSpc>
-                <a:spcPct val="113000"/>
-              </a:lnSpc>
-            </a:pPr>
-            <a:r>
-              <a:rPr lang="en-US" sz="1100" b="1" dirty="0" err="1">
-                <a:solidFill>
-                  <a:schemeClr val="bg1"/>
-                </a:solidFill>
-              </a:rPr>
-              <a:t>Potential return</a:t>
-            </a:r>
-          </a:p>
-        </p:txBody>
-      </p:sp>
-      <p:sp>
-        <p:nvSpPr>
-          <p:cNvPr id="74" name="TextBox 73">
-            <a:extLst>
-              <a:ext uri="{FF2B5EF4-FFF2-40B4-BE49-F238E27FC236}">
-                <a16:creationId xmlns:a16="http://schemas.microsoft.com/office/drawing/2014/main" id="{8AF88E4A-3FC6-78C6-09AF-810DBCFED102}"/>
-              </a:ext>
-            </a:extLst>
-          </p:cNvPr>
-          <p:cNvSpPr txBox="1"/>
-          <p:nvPr/>
-        </p:nvSpPr>
-        <p:spPr>
-          <a:xfrm>
-            <a:off x="3175467" y="5569522"/>
-            <a:ext cx="1090012" cy="273023"/>
-          </a:xfrm>
-          <a:prstGeom prst="rect">
-            <a:avLst/>
-          </a:prstGeom>
-          <a:noFill/>
-        </p:spPr>
-        <p:txBody>
-          <a:bodyPr wrap="square" lIns="0" rIns="0" rtlCol="0" anchor="t">
-            <a:spAutoFit/>
-          </a:bodyPr>
-          <a:lstStyle/>
-          <a:p>
-            <a:pPr algn="ctr">
-              <a:lnSpc>
-                <a:spcPct val="113000"/>
-              </a:lnSpc>
-            </a:pPr>
-            <a:r>
-              <a:rPr lang="en-US" sz="1100" b="1" dirty="0" err="1">
-                <a:solidFill>
-                  <a:schemeClr val="bg1"/>
-                </a:solidFill>
-              </a:rPr>
-              <a:t>Renovation effort</a:t>
-            </a:r>
-          </a:p>
-        </p:txBody>
-      </p:sp>
-      <p:sp>
-        <p:nvSpPr>
-          <p:cNvPr id="11" name="Freeform 10">
-            <a:extLst>
-              <a:ext uri="{FF2B5EF4-FFF2-40B4-BE49-F238E27FC236}">
-                <a16:creationId xmlns:a16="http://schemas.microsoft.com/office/drawing/2014/main" id="{9ED4C63B-3DE4-5CA5-C815-046602139C1B}"/>
-              </a:ext>
-            </a:extLst>
-          </p:cNvPr>
-          <p:cNvSpPr/>
-          <p:nvPr/>
-        </p:nvSpPr>
-        <p:spPr>
-          <a:xfrm>
-            <a:off x="3582405" y="5030147"/>
-            <a:ext cx="277167" cy="436147"/>
-          </a:xfrm>
-          <a:custGeom>
-            <a:avLst/>
-            <a:gdLst>
-              <a:gd name="connsiteX0" fmla="*/ 266486 w 277167"/>
-              <a:gd name="connsiteY0" fmla="*/ 327097 h 436147"/>
-              <a:gd name="connsiteX1" fmla="*/ 237092 w 277167"/>
-              <a:gd name="connsiteY1" fmla="*/ 360840 h 436147"/>
-              <a:gd name="connsiteX2" fmla="*/ 192336 w 277167"/>
-              <a:gd name="connsiteY2" fmla="*/ 381259 h 436147"/>
-              <a:gd name="connsiteX3" fmla="*/ 168741 w 277167"/>
-              <a:gd name="connsiteY3" fmla="*/ 385598 h 436147"/>
-              <a:gd name="connsiteX4" fmla="*/ 168741 w 277167"/>
-              <a:gd name="connsiteY4" fmla="*/ 436148 h 436147"/>
-              <a:gd name="connsiteX5" fmla="*/ 108427 w 277167"/>
-              <a:gd name="connsiteY5" fmla="*/ 436148 h 436147"/>
-              <a:gd name="connsiteX6" fmla="*/ 108427 w 277167"/>
-              <a:gd name="connsiteY6" fmla="*/ 386609 h 436147"/>
-              <a:gd name="connsiteX7" fmla="*/ 59369 w 277167"/>
-              <a:gd name="connsiteY7" fmla="*/ 378220 h 436147"/>
-              <a:gd name="connsiteX8" fmla="*/ 4856 w 277167"/>
-              <a:gd name="connsiteY8" fmla="*/ 345638 h 436147"/>
-              <a:gd name="connsiteX9" fmla="*/ 79 w 277167"/>
-              <a:gd name="connsiteY9" fmla="*/ 338372 h 436147"/>
-              <a:gd name="connsiteX10" fmla="*/ 2900 w 277167"/>
-              <a:gd name="connsiteY10" fmla="*/ 330119 h 436147"/>
-              <a:gd name="connsiteX11" fmla="*/ 33117 w 277167"/>
-              <a:gd name="connsiteY11" fmla="*/ 299878 h 436147"/>
-              <a:gd name="connsiteX12" fmla="*/ 45345 w 277167"/>
-              <a:gd name="connsiteY12" fmla="*/ 298440 h 436147"/>
-              <a:gd name="connsiteX13" fmla="*/ 85101 w 277167"/>
-              <a:gd name="connsiteY13" fmla="*/ 322771 h 436147"/>
-              <a:gd name="connsiteX14" fmla="*/ 136208 w 277167"/>
-              <a:gd name="connsiteY14" fmla="*/ 329773 h 436147"/>
-              <a:gd name="connsiteX15" fmla="*/ 189313 w 277167"/>
-              <a:gd name="connsiteY15" fmla="*/ 318432 h 436147"/>
-              <a:gd name="connsiteX16" fmla="*/ 210365 w 277167"/>
-              <a:gd name="connsiteY16" fmla="*/ 282974 h 436147"/>
-              <a:gd name="connsiteX17" fmla="*/ 200002 w 277167"/>
-              <a:gd name="connsiteY17" fmla="*/ 255554 h 436147"/>
-              <a:gd name="connsiteX18" fmla="*/ 164926 w 277167"/>
-              <a:gd name="connsiteY18" fmla="*/ 242870 h 436147"/>
-              <a:gd name="connsiteX19" fmla="*/ 110796 w 277167"/>
-              <a:gd name="connsiteY19" fmla="*/ 238211 h 436147"/>
-              <a:gd name="connsiteX20" fmla="*/ 36656 w 277167"/>
-              <a:gd name="connsiteY20" fmla="*/ 211484 h 436147"/>
-              <a:gd name="connsiteX21" fmla="*/ 10590 w 277167"/>
-              <a:gd name="connsiteY21" fmla="*/ 144653 h 436147"/>
-              <a:gd name="connsiteX22" fmla="*/ 20610 w 277167"/>
-              <a:gd name="connsiteY22" fmla="*/ 100531 h 436147"/>
-              <a:gd name="connsiteX23" fmla="*/ 48006 w 277167"/>
-              <a:gd name="connsiteY23" fmla="*/ 67801 h 436147"/>
-              <a:gd name="connsiteX24" fmla="*/ 88429 w 277167"/>
-              <a:gd name="connsiteY24" fmla="*/ 47755 h 436147"/>
-              <a:gd name="connsiteX25" fmla="*/ 108427 w 277167"/>
-              <a:gd name="connsiteY25" fmla="*/ 43549 h 436147"/>
-              <a:gd name="connsiteX26" fmla="*/ 108427 w 277167"/>
-              <a:gd name="connsiteY26" fmla="*/ 0 h 436147"/>
-              <a:gd name="connsiteX27" fmla="*/ 168741 w 277167"/>
-              <a:gd name="connsiteY27" fmla="*/ 0 h 436147"/>
-              <a:gd name="connsiteX28" fmla="*/ 168741 w 277167"/>
-              <a:gd name="connsiteY28" fmla="*/ 42673 h 436147"/>
-              <a:gd name="connsiteX29" fmla="*/ 208686 w 277167"/>
-              <a:gd name="connsiteY29" fmla="*/ 49754 h 436147"/>
-              <a:gd name="connsiteX30" fmla="*/ 252061 w 277167"/>
-              <a:gd name="connsiteY30" fmla="*/ 72914 h 436147"/>
-              <a:gd name="connsiteX31" fmla="*/ 257213 w 277167"/>
-              <a:gd name="connsiteY31" fmla="*/ 80155 h 436147"/>
-              <a:gd name="connsiteX32" fmla="*/ 254474 w 277167"/>
-              <a:gd name="connsiteY32" fmla="*/ 88647 h 436147"/>
-              <a:gd name="connsiteX33" fmla="*/ 226134 w 277167"/>
-              <a:gd name="connsiteY33" fmla="*/ 117423 h 436147"/>
-              <a:gd name="connsiteX34" fmla="*/ 214580 w 277167"/>
-              <a:gd name="connsiteY34" fmla="*/ 119287 h 436147"/>
-              <a:gd name="connsiteX35" fmla="*/ 183296 w 277167"/>
-              <a:gd name="connsiteY35" fmla="*/ 103555 h 436147"/>
-              <a:gd name="connsiteX36" fmla="*/ 137552 w 277167"/>
-              <a:gd name="connsiteY36" fmla="*/ 97857 h 436147"/>
-              <a:gd name="connsiteX37" fmla="*/ 91118 w 277167"/>
-              <a:gd name="connsiteY37" fmla="*/ 109876 h 436147"/>
-              <a:gd name="connsiteX38" fmla="*/ 76112 w 277167"/>
-              <a:gd name="connsiteY38" fmla="*/ 141288 h 436147"/>
-              <a:gd name="connsiteX39" fmla="*/ 86779 w 277167"/>
-              <a:gd name="connsiteY39" fmla="*/ 168001 h 436147"/>
-              <a:gd name="connsiteX40" fmla="*/ 122851 w 277167"/>
-              <a:gd name="connsiteY40" fmla="*/ 180034 h 436147"/>
-              <a:gd name="connsiteX41" fmla="*/ 170289 w 277167"/>
-              <a:gd name="connsiteY41" fmla="*/ 184080 h 436147"/>
-              <a:gd name="connsiteX42" fmla="*/ 250107 w 277167"/>
-              <a:gd name="connsiteY42" fmla="*/ 212125 h 436147"/>
-              <a:gd name="connsiteX43" fmla="*/ 277168 w 277167"/>
-              <a:gd name="connsiteY43" fmla="*/ 280286 h 436147"/>
-              <a:gd name="connsiteX44" fmla="*/ 266486 w 277167"/>
-              <a:gd name="connsiteY44" fmla="*/ 327097 h 436147"/>
-            </a:gdLst>
-            <a:ahLst/>
-            <a:cxnLst>
-              <a:cxn ang="0">
-                <a:pos x="connsiteX0" y="connsiteY0"/>
-              </a:cxn>
-              <a:cxn ang="0">
-                <a:pos x="connsiteX1" y="connsiteY1"/>
-              </a:cxn>
-              <a:cxn ang="0">
-                <a:pos x="connsiteX2" y="connsiteY2"/>
-              </a:cxn>
-              <a:cxn ang="0">
-                <a:pos x="connsiteX3" y="connsiteY3"/>
-              </a:cxn>
-              <a:cxn ang="0">
-                <a:pos x="connsiteX4" y="connsiteY4"/>
-              </a:cxn>
-              <a:cxn ang="0">
-                <a:pos x="connsiteX5" y="connsiteY5"/>
-              </a:cxn>
-              <a:cxn ang="0">
-                <a:pos x="connsiteX6" y="connsiteY6"/>
-              </a:cxn>
-              <a:cxn ang="0">
-                <a:pos x="connsiteX7" y="connsiteY7"/>
-              </a:cxn>
-              <a:cxn ang="0">
-                <a:pos x="connsiteX8" y="connsiteY8"/>
-              </a:cxn>
-              <a:cxn ang="0">
-                <a:pos x="connsiteX9" y="connsiteY9"/>
-              </a:cxn>
-              <a:cxn ang="0">
-                <a:pos x="connsiteX10" y="connsiteY10"/>
-              </a:cxn>
-              <a:cxn ang="0">
-                <a:pos x="connsiteX11" y="connsiteY11"/>
-              </a:cxn>
-              <a:cxn ang="0">
-                <a:pos x="connsiteX12" y="connsiteY12"/>
-              </a:cxn>
-              <a:cxn ang="0">
-                <a:pos x="connsiteX13" y="connsiteY13"/>
-              </a:cxn>
-              <a:cxn ang="0">
-                <a:pos x="connsiteX14" y="connsiteY14"/>
-              </a:cxn>
-              <a:cxn ang="0">
-                <a:pos x="connsiteX15" y="connsiteY15"/>
-              </a:cxn>
-              <a:cxn ang="0">
-                <a:pos x="connsiteX16" y="connsiteY16"/>
-              </a:cxn>
-              <a:cxn ang="0">
-                <a:pos x="connsiteX17" y="connsiteY17"/>
-              </a:cxn>
-              <a:cxn ang="0">
-                <a:pos x="connsiteX18" y="connsiteY18"/>
-              </a:cxn>
-              <a:cxn ang="0">
-                <a:pos x="connsiteX19" y="connsiteY19"/>
-              </a:cxn>
-              <a:cxn ang="0">
-                <a:pos x="connsiteX20" y="connsiteY20"/>
-              </a:cxn>
-              <a:cxn ang="0">
-                <a:pos x="connsiteX21" y="connsiteY21"/>
-              </a:cxn>
-              <a:cxn ang="0">
-                <a:pos x="connsiteX22" y="connsiteY22"/>
-              </a:cxn>
-              <a:cxn ang="0">
-                <a:pos x="connsiteX23" y="connsiteY23"/>
-              </a:cxn>
-              <a:cxn ang="0">
-                <a:pos x="connsiteX24" y="connsiteY24"/>
-              </a:cxn>
-              <a:cxn ang="0">
-                <a:pos x="connsiteX25" y="connsiteY25"/>
-              </a:cxn>
-              <a:cxn ang="0">
-                <a:pos x="connsiteX26" y="connsiteY26"/>
-              </a:cxn>
-              <a:cxn ang="0">
-                <a:pos x="connsiteX27" y="connsiteY27"/>
-              </a:cxn>
-              <a:cxn ang="0">
-                <a:pos x="connsiteX28" y="connsiteY28"/>
-              </a:cxn>
-              <a:cxn ang="0">
-                <a:pos x="connsiteX29" y="connsiteY29"/>
-              </a:cxn>
-              <a:cxn ang="0">
-                <a:pos x="connsiteX30" y="connsiteY30"/>
-              </a:cxn>
-              <a:cxn ang="0">
-                <a:pos x="connsiteX31" y="connsiteY31"/>
-              </a:cxn>
-              <a:cxn ang="0">
-                <a:pos x="connsiteX32" y="connsiteY32"/>
-              </a:cxn>
-              <a:cxn ang="0">
-                <a:pos x="connsiteX33" y="connsiteY33"/>
-              </a:cxn>
-              <a:cxn ang="0">
-                <a:pos x="connsiteX34" y="connsiteY34"/>
-              </a:cxn>
-              <a:cxn ang="0">
-                <a:pos x="connsiteX35" y="connsiteY35"/>
-              </a:cxn>
-              <a:cxn ang="0">
-                <a:pos x="connsiteX36" y="connsiteY36"/>
-              </a:cxn>
-              <a:cxn ang="0">
-                <a:pos x="connsiteX37" y="connsiteY37"/>
-              </a:cxn>
-              <a:cxn ang="0">
-                <a:pos x="connsiteX38" y="connsiteY38"/>
-              </a:cxn>
-              <a:cxn ang="0">
-                <a:pos x="connsiteX39" y="connsiteY39"/>
-              </a:cxn>
-              <a:cxn ang="0">
-                <a:pos x="connsiteX40" y="connsiteY40"/>
-              </a:cxn>
-              <a:cxn ang="0">
-                <a:pos x="connsiteX41" y="connsiteY41"/>
-              </a:cxn>
-              <a:cxn ang="0">
-                <a:pos x="connsiteX42" y="connsiteY42"/>
-              </a:cxn>
-              <a:cxn ang="0">
-                <a:pos x="connsiteX43" y="connsiteY43"/>
-              </a:cxn>
-              <a:cxn ang="0">
-                <a:pos x="connsiteX44" y="connsiteY44"/>
-              </a:cxn>
-            </a:cxnLst>
-            <a:rect l="l" t="t" r="r" b="b"/>
-            <a:pathLst>
-              <a:path w="277167" h="436147">
-                <a:moveTo>
-                  <a:pt x="266486" y="327097"/>
-                </a:moveTo>
-                <a:cubicBezTo>
-                  <a:pt x="259343" y="340501"/>
-                  <a:pt x="249525" y="351681"/>
-                  <a:pt x="237092" y="360840"/>
-                </a:cubicBezTo>
-                <a:cubicBezTo>
-                  <a:pt x="224615" y="369970"/>
-                  <a:pt x="209682" y="376774"/>
-                  <a:pt x="192336" y="381259"/>
-                </a:cubicBezTo>
-                <a:cubicBezTo>
-                  <a:pt x="184750" y="383170"/>
-                  <a:pt x="176807" y="384508"/>
-                  <a:pt x="168741" y="385598"/>
-                </a:cubicBezTo>
-                <a:lnTo>
-                  <a:pt x="168741" y="436148"/>
-                </a:lnTo>
-                <a:lnTo>
-                  <a:pt x="108427" y="436148"/>
-                </a:lnTo>
-                <a:lnTo>
-                  <a:pt x="108427" y="386609"/>
-                </a:lnTo>
-                <a:cubicBezTo>
-                  <a:pt x="91248" y="385155"/>
-                  <a:pt x="74833" y="382480"/>
-                  <a:pt x="59369" y="378220"/>
-                </a:cubicBezTo>
-                <a:cubicBezTo>
-                  <a:pt x="35765" y="371751"/>
-                  <a:pt x="4856" y="345638"/>
-                  <a:pt x="4856" y="345638"/>
-                </a:cubicBezTo>
-                <a:cubicBezTo>
-                  <a:pt x="2208" y="344094"/>
-                  <a:pt x="451" y="341379"/>
-                  <a:pt x="79" y="338372"/>
-                </a:cubicBezTo>
-                <a:cubicBezTo>
-                  <a:pt x="-307" y="335337"/>
-                  <a:pt x="732" y="332276"/>
-                  <a:pt x="2900" y="330119"/>
-                </a:cubicBezTo>
-                <a:lnTo>
-                  <a:pt x="33117" y="299878"/>
-                </a:lnTo>
-                <a:cubicBezTo>
-                  <a:pt x="36377" y="296657"/>
-                  <a:pt x="41434" y="296045"/>
-                  <a:pt x="45345" y="298440"/>
-                </a:cubicBezTo>
-                <a:cubicBezTo>
-                  <a:pt x="45345" y="298440"/>
-                  <a:pt x="67966" y="318086"/>
-                  <a:pt x="85101" y="322771"/>
-                </a:cubicBezTo>
-                <a:cubicBezTo>
-                  <a:pt x="102243" y="327430"/>
-                  <a:pt x="119247" y="329773"/>
-                  <a:pt x="136208" y="329773"/>
-                </a:cubicBezTo>
-                <a:cubicBezTo>
-                  <a:pt x="157608" y="329773"/>
-                  <a:pt x="175288" y="325992"/>
-                  <a:pt x="189313" y="318432"/>
-                </a:cubicBezTo>
-                <a:cubicBezTo>
-                  <a:pt x="203367" y="310819"/>
-                  <a:pt x="210365" y="299053"/>
-                  <a:pt x="210365" y="282974"/>
-                </a:cubicBezTo>
-                <a:cubicBezTo>
-                  <a:pt x="210365" y="271394"/>
-                  <a:pt x="206935" y="262263"/>
-                  <a:pt x="200002" y="255554"/>
-                </a:cubicBezTo>
-                <a:cubicBezTo>
-                  <a:pt x="193092" y="248899"/>
-                  <a:pt x="181414" y="244707"/>
-                  <a:pt x="164926" y="242870"/>
-                </a:cubicBezTo>
-                <a:lnTo>
-                  <a:pt x="110796" y="238211"/>
-                </a:lnTo>
-                <a:cubicBezTo>
-                  <a:pt x="78742" y="235083"/>
-                  <a:pt x="54021" y="226138"/>
-                  <a:pt x="36656" y="211484"/>
-                </a:cubicBezTo>
-                <a:cubicBezTo>
-                  <a:pt x="19239" y="196776"/>
-                  <a:pt x="10590" y="174469"/>
-                  <a:pt x="10590" y="144653"/>
-                </a:cubicBezTo>
-                <a:cubicBezTo>
-                  <a:pt x="10590" y="128149"/>
-                  <a:pt x="13916" y="113454"/>
-                  <a:pt x="20610" y="100531"/>
-                </a:cubicBezTo>
-                <a:cubicBezTo>
-                  <a:pt x="27316" y="87606"/>
-                  <a:pt x="36417" y="76692"/>
-                  <a:pt x="48006" y="67801"/>
-                </a:cubicBezTo>
-                <a:cubicBezTo>
-                  <a:pt x="59580" y="58883"/>
-                  <a:pt x="73074" y="52200"/>
-                  <a:pt x="88429" y="47755"/>
-                </a:cubicBezTo>
-                <a:cubicBezTo>
-                  <a:pt x="94860" y="45891"/>
-                  <a:pt x="101589" y="44667"/>
-                  <a:pt x="108427" y="43549"/>
-                </a:cubicBezTo>
-                <a:lnTo>
-                  <a:pt x="108427" y="0"/>
-                </a:lnTo>
-                <a:lnTo>
-                  <a:pt x="168741" y="0"/>
-                </a:lnTo>
-                <a:lnTo>
-                  <a:pt x="168741" y="42673"/>
-                </a:lnTo>
-                <a:cubicBezTo>
-                  <a:pt x="182824" y="44057"/>
-                  <a:pt x="196216" y="46320"/>
-                  <a:pt x="208686" y="49754"/>
-                </a:cubicBezTo>
-                <a:cubicBezTo>
-                  <a:pt x="229840" y="55530"/>
-                  <a:pt x="252061" y="72914"/>
-                  <a:pt x="252061" y="72914"/>
-                </a:cubicBezTo>
-                <a:cubicBezTo>
-                  <a:pt x="254845" y="74352"/>
-                  <a:pt x="256734" y="77067"/>
-                  <a:pt x="257213" y="80155"/>
-                </a:cubicBezTo>
-                <a:cubicBezTo>
-                  <a:pt x="257693" y="83296"/>
-                  <a:pt x="256669" y="86385"/>
-                  <a:pt x="254474" y="88647"/>
-                </a:cubicBezTo>
-                <a:lnTo>
-                  <a:pt x="226134" y="117423"/>
-                </a:lnTo>
-                <a:cubicBezTo>
-                  <a:pt x="223111" y="120485"/>
-                  <a:pt x="218438" y="121283"/>
-                  <a:pt x="214580" y="119287"/>
-                </a:cubicBezTo>
-                <a:cubicBezTo>
-                  <a:pt x="214580" y="119287"/>
-                  <a:pt x="197801" y="107335"/>
-                  <a:pt x="183296" y="103555"/>
-                </a:cubicBezTo>
-                <a:cubicBezTo>
-                  <a:pt x="168806" y="99774"/>
-                  <a:pt x="153590" y="97857"/>
-                  <a:pt x="137552" y="97857"/>
-                </a:cubicBezTo>
-                <a:cubicBezTo>
-                  <a:pt x="116595" y="97857"/>
-                  <a:pt x="101109" y="101877"/>
-                  <a:pt x="91118" y="109876"/>
-                </a:cubicBezTo>
-                <a:cubicBezTo>
-                  <a:pt x="81082" y="117929"/>
-                  <a:pt x="76112" y="128390"/>
-                  <a:pt x="76112" y="141288"/>
-                </a:cubicBezTo>
-                <a:cubicBezTo>
-                  <a:pt x="76112" y="152908"/>
-                  <a:pt x="79607" y="161799"/>
-                  <a:pt x="86779" y="168001"/>
-                </a:cubicBezTo>
-                <a:cubicBezTo>
-                  <a:pt x="93901" y="174257"/>
-                  <a:pt x="105913" y="178316"/>
-                  <a:pt x="122851" y="180034"/>
-                </a:cubicBezTo>
-                <a:lnTo>
-                  <a:pt x="170289" y="184080"/>
-                </a:lnTo>
-                <a:cubicBezTo>
-                  <a:pt x="205453" y="187195"/>
-                  <a:pt x="232078" y="196538"/>
-                  <a:pt x="250107" y="212125"/>
-                </a:cubicBezTo>
-                <a:cubicBezTo>
-                  <a:pt x="268165" y="227737"/>
-                  <a:pt x="277168" y="250472"/>
-                  <a:pt x="277168" y="280286"/>
-                </a:cubicBezTo>
-                <a:cubicBezTo>
-                  <a:pt x="277175" y="298162"/>
-                  <a:pt x="273607" y="313720"/>
-                  <a:pt x="266486" y="327097"/>
-                </a:cubicBezTo>
-                <a:close/>
-              </a:path>
-            </a:pathLst>
-          </a:custGeom>
-          <a:noFill/>
-          <a:ln w="7263" cap="flat">
-            <a:solidFill>
-              <a:srgbClr val="FFFFFF"/>
-            </a:solidFill>
-            <a:prstDash val="solid"/>
-            <a:miter/>
-          </a:ln>
-        </p:spPr>
-        <p:txBody>
-          <a:bodyPr rtlCol="0" anchor="ctr"/>
-          <a:lstStyle/>
-          <a:p>
-            <a:endParaRPr lang="en-US"/>
-          </a:p>
-        </p:txBody>
-      </p:sp>
-      <p:sp>
-        <p:nvSpPr>
-          <p:cNvPr id="75" name="TextBox 74">
-            <a:extLst>
-              <a:ext uri="{FF2B5EF4-FFF2-40B4-BE49-F238E27FC236}">
-                <a16:creationId xmlns:a16="http://schemas.microsoft.com/office/drawing/2014/main" id="{9E0714D8-2BA9-352D-6DFA-C4C0D883E977}"/>
-              </a:ext>
-            </a:extLst>
-          </p:cNvPr>
-          <p:cNvSpPr txBox="1"/>
-          <p:nvPr/>
-        </p:nvSpPr>
-        <p:spPr>
-          <a:xfrm>
-            <a:off x="4481963" y="3056186"/>
-            <a:ext cx="447387" cy="289438"/>
-          </a:xfrm>
-          <a:prstGeom prst="rect">
-            <a:avLst/>
-          </a:prstGeom>
-          <a:noFill/>
-        </p:spPr>
-        <p:txBody>
-          <a:bodyPr wrap="none" lIns="90000" rtlCol="0" anchor="t">
-            <a:spAutoFit/>
-          </a:bodyPr>
-          <a:lstStyle/>
-          <a:p>
-            <a:pPr algn="l">
-              <a:lnSpc>
-                <a:spcPct val="113000"/>
-              </a:lnSpc>
-            </a:pPr>
-            <a:r>
-              <a:rPr lang="en-US" sz="1200" b="1" dirty="0" err="1">
-                <a:solidFill>
-                  <a:srgbClr val="67E77F"/>
-                </a:solidFill>
-              </a:rPr>
-              <a:t>Low</a:t>
-            </a:r>
-          </a:p>
-        </p:txBody>
-      </p:sp>
-      <p:sp>
-        <p:nvSpPr>
-          <p:cNvPr id="76" name="TextBox 75">
-            <a:extLst>
-              <a:ext uri="{FF2B5EF4-FFF2-40B4-BE49-F238E27FC236}">
-                <a16:creationId xmlns:a16="http://schemas.microsoft.com/office/drawing/2014/main" id="{82AD63B6-A060-37AC-AE10-A89553C98806}"/>
-              </a:ext>
-            </a:extLst>
-          </p:cNvPr>
-          <p:cNvSpPr txBox="1"/>
-          <p:nvPr/>
-        </p:nvSpPr>
-        <p:spPr>
-          <a:xfrm>
-            <a:off x="4481963" y="4204311"/>
-            <a:ext cx="1428296" cy="289438"/>
-          </a:xfrm>
-          <a:prstGeom prst="rect">
-            <a:avLst/>
-          </a:prstGeom>
-          <a:noFill/>
-        </p:spPr>
-        <p:txBody>
-          <a:bodyPr wrap="none" lIns="90000" rtlCol="0" anchor="t">
-            <a:spAutoFit/>
-          </a:bodyPr>
-          <a:lstStyle/>
-          <a:p>
-            <a:pPr algn="l">
-              <a:lnSpc>
-                <a:spcPct val="113000"/>
-              </a:lnSpc>
-            </a:pPr>
-            <a:r>
-              <a:rPr lang="en-US" sz="1200" b="1" dirty="0" err="1">
-                <a:solidFill>
-                  <a:srgbClr val="DF6837"/>
-                </a:solidFill>
-              </a:rPr>
-              <a:t>Low speed increase</a:t>
-            </a:r>
-          </a:p>
-        </p:txBody>
-      </p:sp>
-      <p:sp>
-        <p:nvSpPr>
-          <p:cNvPr id="77" name="TextBox 76">
-            <a:extLst>
-              <a:ext uri="{FF2B5EF4-FFF2-40B4-BE49-F238E27FC236}">
-                <a16:creationId xmlns:a16="http://schemas.microsoft.com/office/drawing/2014/main" id="{F7F66163-B57E-3B36-7B32-0E916195F142}"/>
-              </a:ext>
-            </a:extLst>
-          </p:cNvPr>
-          <p:cNvSpPr txBox="1"/>
-          <p:nvPr/>
-        </p:nvSpPr>
-        <p:spPr>
-          <a:xfrm>
-            <a:off x="4481963" y="5364737"/>
-            <a:ext cx="447387" cy="289438"/>
-          </a:xfrm>
-          <a:prstGeom prst="rect">
-            <a:avLst/>
-          </a:prstGeom>
-          <a:noFill/>
-        </p:spPr>
-        <p:txBody>
-          <a:bodyPr wrap="none" lIns="90000" rtlCol="0" anchor="t">
-            <a:spAutoFit/>
-          </a:bodyPr>
-          <a:lstStyle/>
-          <a:p>
-            <a:pPr algn="l">
-              <a:lnSpc>
-                <a:spcPct val="113000"/>
-              </a:lnSpc>
-            </a:pPr>
-            <a:r>
-              <a:rPr lang="en-US" sz="1200" b="1" dirty="0" err="1">
-                <a:solidFill>
-                  <a:srgbClr val="67E77F"/>
-                </a:solidFill>
-              </a:rPr>
-              <a:t>Low</a:t>
-            </a:r>
-          </a:p>
-        </p:txBody>
-      </p:sp>
-      <p:sp>
-        <p:nvSpPr>
-          <p:cNvPr id="78" name="TextBox 77">
-            <a:extLst>
-              <a:ext uri="{FF2B5EF4-FFF2-40B4-BE49-F238E27FC236}">
-                <a16:creationId xmlns:a16="http://schemas.microsoft.com/office/drawing/2014/main" id="{79A09521-B886-B7CE-C3F8-4A6CE0EC12AC}"/>
-              </a:ext>
-            </a:extLst>
-          </p:cNvPr>
-          <p:cNvSpPr txBox="1"/>
-          <p:nvPr/>
-        </p:nvSpPr>
-        <p:spPr>
-          <a:xfrm>
-            <a:off x="8212338" y="3056186"/>
-            <a:ext cx="476562" cy="289438"/>
-          </a:xfrm>
-          <a:prstGeom prst="rect">
-            <a:avLst/>
-          </a:prstGeom>
-          <a:noFill/>
-        </p:spPr>
-        <p:txBody>
-          <a:bodyPr wrap="none" lIns="90000" rtlCol="0" anchor="t">
-            <a:spAutoFit/>
-          </a:bodyPr>
-          <a:lstStyle/>
-          <a:p>
-            <a:pPr algn="r">
-              <a:lnSpc>
-                <a:spcPct val="113000"/>
-              </a:lnSpc>
-            </a:pPr>
-            <a:r>
-              <a:rPr lang="en-US" sz="1200" b="1" dirty="0" err="1">
-                <a:solidFill>
-                  <a:srgbClr val="E17526"/>
-                </a:solidFill>
-              </a:rPr>
-              <a:t>High</a:t>
-            </a:r>
-          </a:p>
-        </p:txBody>
-      </p:sp>
-      <p:sp>
-        <p:nvSpPr>
-          <p:cNvPr id="79" name="TextBox 78">
-            <a:extLst>
-              <a:ext uri="{FF2B5EF4-FFF2-40B4-BE49-F238E27FC236}">
-                <a16:creationId xmlns:a16="http://schemas.microsoft.com/office/drawing/2014/main" id="{3E171B44-7D55-3C69-AF53-2A643B381D0B}"/>
-              </a:ext>
-            </a:extLst>
-          </p:cNvPr>
-          <p:cNvSpPr txBox="1"/>
-          <p:nvPr/>
-        </p:nvSpPr>
-        <p:spPr>
-          <a:xfrm>
-            <a:off x="7231430" y="4204311"/>
-            <a:ext cx="1457470" cy="289438"/>
-          </a:xfrm>
-          <a:prstGeom prst="rect">
-            <a:avLst/>
-          </a:prstGeom>
-          <a:noFill/>
-        </p:spPr>
-        <p:txBody>
-          <a:bodyPr wrap="none" lIns="90000" rtlCol="0" anchor="t">
-            <a:spAutoFit/>
-          </a:bodyPr>
-          <a:lstStyle/>
-          <a:p>
-            <a:pPr algn="r">
-              <a:lnSpc>
-                <a:spcPct val="113000"/>
-              </a:lnSpc>
-            </a:pPr>
-            <a:r>
-              <a:rPr lang="en-US" sz="1200" b="1" dirty="0" err="1">
-                <a:solidFill>
-                  <a:srgbClr val="67E77F"/>
-                </a:solidFill>
-              </a:rPr>
-              <a:t>High speed increase</a:t>
-            </a:r>
-          </a:p>
-        </p:txBody>
-      </p:sp>
-      <p:sp>
-        <p:nvSpPr>
-          <p:cNvPr id="80" name="TextBox 79">
-            <a:extLst>
-              <a:ext uri="{FF2B5EF4-FFF2-40B4-BE49-F238E27FC236}">
-                <a16:creationId xmlns:a16="http://schemas.microsoft.com/office/drawing/2014/main" id="{F80FF2A0-2A6E-3FEB-983A-AF96E9799909}"/>
-              </a:ext>
-            </a:extLst>
-          </p:cNvPr>
-          <p:cNvSpPr txBox="1"/>
-          <p:nvPr/>
-        </p:nvSpPr>
-        <p:spPr>
-          <a:xfrm>
-            <a:off x="8212338" y="5364737"/>
-            <a:ext cx="476562" cy="289438"/>
-          </a:xfrm>
-          <a:prstGeom prst="rect">
-            <a:avLst/>
-          </a:prstGeom>
-          <a:noFill/>
-        </p:spPr>
-        <p:txBody>
-          <a:bodyPr wrap="none" lIns="90000" rtlCol="0" anchor="t">
-            <a:spAutoFit/>
-          </a:bodyPr>
-          <a:lstStyle/>
-          <a:p>
-            <a:pPr algn="r">
-              <a:lnSpc>
-                <a:spcPct val="113000"/>
-              </a:lnSpc>
-            </a:pPr>
-            <a:r>
-              <a:rPr lang="en-US" sz="1200" b="1" dirty="0" err="1">
-                <a:solidFill>
-                  <a:srgbClr val="E17526"/>
-                </a:solidFill>
-              </a:rPr>
-              <a:t>High</a:t>
-            </a:r>
-          </a:p>
-        </p:txBody>
-      </p:sp>
-      <p:sp>
-        <p:nvSpPr>
-          <p:cNvPr id="81" name="Freeform 80">
-            <a:extLst>
-              <a:ext uri="{FF2B5EF4-FFF2-40B4-BE49-F238E27FC236}">
-                <a16:creationId xmlns:a16="http://schemas.microsoft.com/office/drawing/2014/main" id="{659BC7AE-1850-9CF5-C1C7-5F5104F1B756}"/>
-              </a:ext>
-            </a:extLst>
-          </p:cNvPr>
-          <p:cNvSpPr/>
-          <p:nvPr/>
-        </p:nvSpPr>
-        <p:spPr>
-          <a:xfrm flipH="1">
-            <a:off x="4541614" y="1809446"/>
-            <a:ext cx="4083908" cy="14538"/>
-          </a:xfrm>
-          <a:custGeom>
-            <a:avLst/>
-            <a:gdLst>
-              <a:gd name="connsiteX0" fmla="*/ 4076642 w 4083908"/>
-              <a:gd name="connsiteY0" fmla="*/ 14538 h 14538"/>
-              <a:gd name="connsiteX1" fmla="*/ 4083909 w 4083908"/>
-              <a:gd name="connsiteY1" fmla="*/ 7269 h 14538"/>
-              <a:gd name="connsiteX2" fmla="*/ 4076642 w 4083908"/>
-              <a:gd name="connsiteY2" fmla="*/ 0 h 14538"/>
-              <a:gd name="connsiteX3" fmla="*/ 4076642 w 4083908"/>
-              <a:gd name="connsiteY3" fmla="*/ 14538 h 14538"/>
-              <a:gd name="connsiteX4" fmla="*/ 0 w 4083908"/>
-              <a:gd name="connsiteY4" fmla="*/ 14538 h 14538"/>
-              <a:gd name="connsiteX5" fmla="*/ 4076642 w 4083908"/>
-              <a:gd name="connsiteY5" fmla="*/ 14538 h 14538"/>
-              <a:gd name="connsiteX6" fmla="*/ 4076642 w 4083908"/>
-              <a:gd name="connsiteY6" fmla="*/ 0 h 14538"/>
-              <a:gd name="connsiteX7" fmla="*/ 0 w 4083908"/>
-              <a:gd name="connsiteY7" fmla="*/ 0 h 14538"/>
-              <a:gd name="connsiteX8" fmla="*/ 0 w 4083908"/>
-              <a:gd name="connsiteY8" fmla="*/ 14538 h 14538"/>
-            </a:gdLst>
-            <a:ahLst/>
-            <a:cxnLst>
-              <a:cxn ang="0">
-                <a:pos x="connsiteX0" y="connsiteY0"/>
-              </a:cxn>
-              <a:cxn ang="0">
-                <a:pos x="connsiteX1" y="connsiteY1"/>
-              </a:cxn>
-              <a:cxn ang="0">
-                <a:pos x="connsiteX2" y="connsiteY2"/>
-              </a:cxn>
-              <a:cxn ang="0">
-                <a:pos x="connsiteX3" y="connsiteY3"/>
-              </a:cxn>
-              <a:cxn ang="0">
-                <a:pos x="connsiteX4" y="connsiteY4"/>
-              </a:cxn>
-              <a:cxn ang="0">
-                <a:pos x="connsiteX5" y="connsiteY5"/>
-              </a:cxn>
-              <a:cxn ang="0">
-                <a:pos x="connsiteX6" y="connsiteY6"/>
-              </a:cxn>
-              <a:cxn ang="0">
-                <a:pos x="connsiteX7" y="connsiteY7"/>
-              </a:cxn>
-              <a:cxn ang="0">
-                <a:pos x="connsiteX8" y="connsiteY8"/>
-              </a:cxn>
-            </a:cxnLst>
-            <a:rect l="l" t="t" r="r" b="b"/>
-            <a:pathLst>
-              <a:path w="4083908" h="14538">
-                <a:moveTo>
-                  <a:pt x="4076642" y="14538"/>
-                </a:moveTo>
-                <a:cubicBezTo>
-                  <a:pt x="4080653" y="14538"/>
-                  <a:pt x="4083909" y="11282"/>
-                  <a:pt x="4083909" y="7269"/>
-                </a:cubicBezTo>
-                <a:cubicBezTo>
-                  <a:pt x="4083909" y="3257"/>
-                  <a:pt x="4080653" y="0"/>
-                  <a:pt x="4076642" y="0"/>
-                </a:cubicBezTo>
-                <a:lnTo>
-                  <a:pt x="4076642" y="14538"/>
-                </a:lnTo>
-                <a:close/>
-                <a:moveTo>
-                  <a:pt x="0" y="14538"/>
-                </a:moveTo>
-                <a:lnTo>
-                  <a:pt x="4076642" y="14538"/>
-                </a:lnTo>
-                <a:lnTo>
-                  <a:pt x="4076642" y="0"/>
-                </a:lnTo>
-                <a:lnTo>
-                  <a:pt x="0" y="0"/>
-                </a:lnTo>
-                <a:lnTo>
-                  <a:pt x="0" y="14538"/>
-                </a:lnTo>
-                <a:close/>
-              </a:path>
-            </a:pathLst>
-          </a:custGeom>
-          <a:gradFill>
-            <a:gsLst>
-              <a:gs pos="0">
-                <a:srgbClr val="DF6838"/>
-              </a:gs>
-              <a:gs pos="50000">
-                <a:srgbClr val="A3A75B"/>
-              </a:gs>
-              <a:gs pos="100000">
-                <a:srgbClr val="67E77F"/>
-              </a:gs>
-            </a:gsLst>
-            <a:lin ang="0" scaled="1"/>
-          </a:gradFill>
-          <a:ln w="7263" cap="flat">
-            <a:noFill/>
-            <a:prstDash val="solid"/>
-            <a:miter/>
-          </a:ln>
-        </p:spPr>
-        <p:txBody>
-          <a:bodyPr rtlCol="0" anchor="ctr"/>
-          <a:lstStyle/>
-          <a:p>
-            <a:endParaRPr lang="en-US"/>
-          </a:p>
-        </p:txBody>
-      </p:sp>
-      <p:sp>
-        <p:nvSpPr>
-          <p:cNvPr id="82" name="Freeform 81">
-            <a:extLst>
-              <a:ext uri="{FF2B5EF4-FFF2-40B4-BE49-F238E27FC236}">
-                <a16:creationId xmlns:a16="http://schemas.microsoft.com/office/drawing/2014/main" id="{A1436FEF-2734-3E85-C550-879300A56BB7}"/>
-              </a:ext>
-            </a:extLst>
-          </p:cNvPr>
-          <p:cNvSpPr/>
-          <p:nvPr/>
-        </p:nvSpPr>
-        <p:spPr>
-          <a:xfrm>
-            <a:off x="4399598" y="1595006"/>
-            <a:ext cx="378145" cy="301667"/>
-          </a:xfrm>
-          <a:custGeom>
-            <a:avLst/>
-            <a:gdLst>
-              <a:gd name="connsiteX0" fmla="*/ 184470 w 343768"/>
-              <a:gd name="connsiteY0" fmla="*/ 294400 h 301667"/>
-              <a:gd name="connsiteX1" fmla="*/ 159298 w 343768"/>
-              <a:gd name="connsiteY1" fmla="*/ 294400 h 301667"/>
-              <a:gd name="connsiteX2" fmla="*/ 1966 w 343768"/>
-              <a:gd name="connsiteY2" fmla="*/ 21807 h 301667"/>
-              <a:gd name="connsiteX3" fmla="*/ 14552 w 343768"/>
-              <a:gd name="connsiteY3" fmla="*/ 0 h 301667"/>
-              <a:gd name="connsiteX4" fmla="*/ 329216 w 343768"/>
-              <a:gd name="connsiteY4" fmla="*/ 0 h 301667"/>
-              <a:gd name="connsiteX5" fmla="*/ 341802 w 343768"/>
-              <a:gd name="connsiteY5" fmla="*/ 21807 h 301667"/>
-              <a:gd name="connsiteX6" fmla="*/ 184470 w 343768"/>
-              <a:gd name="connsiteY6" fmla="*/ 294400 h 301667"/>
-            </a:gdLst>
-            <a:ahLst/>
-            <a:cxnLst>
-              <a:cxn ang="0">
-                <a:pos x="connsiteX0" y="connsiteY0"/>
-              </a:cxn>
-              <a:cxn ang="0">
-                <a:pos x="connsiteX1" y="connsiteY1"/>
-              </a:cxn>
-              <a:cxn ang="0">
-                <a:pos x="connsiteX2" y="connsiteY2"/>
-              </a:cxn>
-              <a:cxn ang="0">
-                <a:pos x="connsiteX3" y="connsiteY3"/>
-              </a:cxn>
-              <a:cxn ang="0">
-                <a:pos x="connsiteX4" y="connsiteY4"/>
-              </a:cxn>
-              <a:cxn ang="0">
-                <a:pos x="connsiteX5" y="connsiteY5"/>
-              </a:cxn>
-              <a:cxn ang="0">
-                <a:pos x="connsiteX6" y="connsiteY6"/>
-              </a:cxn>
-            </a:cxnLst>
-            <a:rect l="l" t="t" r="r" b="b"/>
-            <a:pathLst>
-              <a:path w="343768" h="301667">
-                <a:moveTo>
-                  <a:pt x="184470" y="294400"/>
-                </a:moveTo>
-                <a:cubicBezTo>
-                  <a:pt x="178875" y="304090"/>
-                  <a:pt x="164893" y="304090"/>
-                  <a:pt x="159298" y="294400"/>
-                </a:cubicBezTo>
-                <a:lnTo>
-                  <a:pt x="1966" y="21807"/>
-                </a:lnTo>
-                <a:cubicBezTo>
-                  <a:pt x="-3622" y="12118"/>
-                  <a:pt x="3368" y="0"/>
-                  <a:pt x="14552" y="0"/>
-                </a:cubicBezTo>
-                <a:lnTo>
-                  <a:pt x="329216" y="0"/>
-                </a:lnTo>
-                <a:cubicBezTo>
-                  <a:pt x="340400" y="0"/>
-                  <a:pt x="347390" y="12118"/>
-                  <a:pt x="341802" y="21807"/>
-                </a:cubicBezTo>
-                <a:lnTo>
-                  <a:pt x="184470" y="294400"/>
-                </a:lnTo>
-                <a:close/>
-              </a:path>
-            </a:pathLst>
-          </a:custGeom>
-          <a:solidFill>
-            <a:srgbClr val="0066FF"/>
-          </a:solidFill>
-          <a:ln w="7263" cap="flat">
-            <a:noFill/>
-            <a:prstDash val="solid"/>
-            <a:miter/>
-          </a:ln>
-        </p:spPr>
-        <p:txBody>
-          <a:bodyPr lIns="0" rIns="0" rtlCol="0" anchor="ctr"/>
-          <a:lstStyle/>
-          <a:p>
-            <a:pPr algn="ctr"/>
-            <a:r>
-              <a:rPr lang="en-US" sz="1000" b="1">
-                <a:solidFill>
-                  <a:srgbClr val="0066FF"/>
-                </a:solidFill>
-              </a:rPr>
-              <a:t>MARKER_MODERNIZATION_VOLUME</a:t>
-            </a:r>
-          </a:p>
-        </p:txBody>
-      </p:sp>
-      <p:sp>
-        <p:nvSpPr>
-          <p:cNvPr id="83" name="TextBox 82">
-            <a:extLst>
-              <a:ext uri="{FF2B5EF4-FFF2-40B4-BE49-F238E27FC236}">
-                <a16:creationId xmlns:a16="http://schemas.microsoft.com/office/drawing/2014/main" id="{B4B64E5A-9179-448E-090A-5864C363F480}"/>
-              </a:ext>
-            </a:extLst>
-          </p:cNvPr>
-          <p:cNvSpPr txBox="1"/>
-          <p:nvPr/>
-        </p:nvSpPr>
-        <p:spPr>
-          <a:xfrm>
-            <a:off x="4481963" y="1818652"/>
-            <a:ext cx="591978" cy="322268"/>
-          </a:xfrm>
-          <a:prstGeom prst="rect">
-            <a:avLst/>
-          </a:prstGeom>
-          <a:noFill/>
-        </p:spPr>
-        <p:txBody>
-          <a:bodyPr wrap="none" lIns="90000" rtlCol="0" anchor="t">
-            <a:spAutoFit/>
-          </a:bodyPr>
-          <a:lstStyle/>
-          <a:p>
-            <a:pPr algn="l">
-              <a:lnSpc>
-                <a:spcPct val="113000"/>
-              </a:lnSpc>
-            </a:pPr>
-            <a:r>
-              <a:rPr lang="en-US" sz="1400" b="1" dirty="0" err="1">
-                <a:solidFill>
-                  <a:srgbClr val="67E77F"/>
-                </a:solidFill>
-              </a:rPr>
-              <a:t>Small</a:t>
-            </a:r>
-          </a:p>
-        </p:txBody>
-      </p:sp>
-      <p:sp>
-        <p:nvSpPr>
-          <p:cNvPr id="84" name="TextBox 83">
-            <a:extLst>
-              <a:ext uri="{FF2B5EF4-FFF2-40B4-BE49-F238E27FC236}">
-                <a16:creationId xmlns:a16="http://schemas.microsoft.com/office/drawing/2014/main" id="{02B9148E-E5DB-E38E-63D0-559E35AAA3C9}"/>
-              </a:ext>
-            </a:extLst>
-          </p:cNvPr>
-          <p:cNvSpPr txBox="1"/>
-          <p:nvPr/>
-        </p:nvSpPr>
-        <p:spPr>
-          <a:xfrm>
-            <a:off x="8107374" y="1818652"/>
-            <a:ext cx="581526" cy="322268"/>
-          </a:xfrm>
-          <a:prstGeom prst="rect">
-            <a:avLst/>
-          </a:prstGeom>
-          <a:noFill/>
-        </p:spPr>
-        <p:txBody>
-          <a:bodyPr wrap="none" lIns="90000" rtlCol="0" anchor="t">
-            <a:spAutoFit/>
-          </a:bodyPr>
-          <a:lstStyle/>
-          <a:p>
-            <a:pPr algn="r">
-              <a:lnSpc>
-                <a:spcPct val="113000"/>
-              </a:lnSpc>
-            </a:pPr>
-            <a:r>
-              <a:rPr lang="en-US" sz="1400" b="1" dirty="0" err="1">
-                <a:solidFill>
-                  <a:srgbClr val="E17526"/>
-                </a:solidFill>
-              </a:rPr>
-              <a:t>Large</a:t>
-            </a:r>
-          </a:p>
-        </p:txBody>
-      </p:sp>
+          </p:spPr>
+          <p:txBody>
+            <a:bodyPr wrap="none" lIns="90000" rtlCol="0" anchor="t">
+              <a:spAutoFit/>
+            </a:bodyPr>
+            <a:lstStyle/>
+            <a:p>
+              <a:pPr algn="r">
+                <a:lnSpc>
+                  <a:spcPct val="113000"/>
+                </a:lnSpc>
+              </a:pPr>
+              <a:r>
+                <a:rPr lang="en-US" sz="1400" b="1" dirty="0" err="1">
+                  <a:solidFill>
+                    <a:srgbClr val="E17526"/>
+                  </a:solidFill>
+                </a:rPr>
+                <a:t>Large</a:t>
+              </a:r>
+            </a:p>
+          </p:txBody>
+        </p:sp>
+      </p:grpSp>
       <p:cxnSp>
         <p:nvCxnSpPr>
           <p:cNvPr id="86" name="Straight Arrow Connector 85">
@@ -32885,7 +32275,7 @@
         </p:nvCxnSpPr>
         <p:spPr>
           <a:xfrm>
-            <a:off x="4578340" y="6141022"/>
+            <a:off x="4578340" y="5430348"/>
             <a:ext cx="4103685" cy="0"/>
           </a:xfrm>
           <a:prstGeom prst="straightConnector1">
@@ -32929,7 +32319,7 @@
         </p:nvSpPr>
         <p:spPr>
           <a:xfrm>
-            <a:off x="4585214" y="6148250"/>
+            <a:off x="4585214" y="5437576"/>
             <a:ext cx="4076641" cy="273023"/>
           </a:xfrm>
           <a:prstGeom prst="rect">
@@ -33106,14 +32496,14 @@
           <p:nvPr>
             <p:extLst>
               <p:ext uri="{D42A27DB-BD31-4B8C-83A1-F6EECF244321}">
-                <p14:modId xmlns:p14="http://schemas.microsoft.com/office/powerpoint/2010/main" val="787610961"/>
+                <p14:modId xmlns:p14="http://schemas.microsoft.com/office/powerpoint/2010/main" val="471822899"/>
               </p:ext>
             </p:extLst>
           </p:nvPr>
         </p:nvGraphicFramePr>
         <p:xfrm>
-          <a:off x="514800" y="1466791"/>
-          <a:ext cx="11230868" cy="17341920"/>
+          <a:off x="937766" y="1466791"/>
+          <a:ext cx="10316468" cy="17341920"/>
         </p:xfrm>
         <a:graphic>
           <a:graphicData uri="http://schemas.openxmlformats.org/drawingml/2006/table">
@@ -33155,13 +32545,6 @@
                   <a:extLst>
                     <a:ext uri="{9D8B030D-6E8A-4147-A177-3AD203B41FA5}">
                       <a16:colId xmlns:a16="http://schemas.microsoft.com/office/drawing/2014/main" val="424750286"/>
-                    </a:ext>
-                  </a:extLst>
-                </a:gridCol>
-                <a:gridCol w="914400">
-                  <a:extLst>
-                    <a:ext uri="{9D8B030D-6E8A-4147-A177-3AD203B41FA5}">
-                      <a16:colId xmlns:a16="http://schemas.microsoft.com/office/drawing/2014/main" val="2479566624"/>
                     </a:ext>
                   </a:extLst>
                 </a:gridCol>
@@ -33522,56 +32905,6 @@
                           <a:latin typeface="+mn-lt"/>
                           <a:cs typeface="TheSans B4 SemiLight"/>
                         </a:rPr>
-                        <a:t>Technical debt</a:t>
-                      </a:r>
-                    </a:p>
-                  </a:txBody>
-                  <a:tcPr marL="108000" marR="108000" marT="90000" marB="90000" anchor="ctr">
-                    <a:lnL>
-                      <a:noFill/>
-                    </a:lnL>
-                    <a:lnR w="9525" cap="flat" cmpd="sng" algn="ctr">
-                      <a:noFill/>
-                      <a:prstDash val="solid"/>
-                    </a:lnR>
-                    <a:lnT w="9525" cap="flat" cmpd="sng" algn="ctr">
-                      <a:noFill/>
-                      <a:prstDash val="solid"/>
-                    </a:lnT>
-                    <a:lnB w="19050" cap="flat" cmpd="sng" algn="ctr">
-                      <a:noFill/>
-                      <a:prstDash val="sysDot"/>
-                      <a:round/>
-                      <a:headEnd type="none" w="med" len="med"/>
-                      <a:tailEnd type="none" w="med" len="med"/>
-                    </a:lnB>
-                    <a:lnTlToBr w="12700" cmpd="sng">
-                      <a:noFill/>
-                      <a:prstDash val="solid"/>
-                    </a:lnTlToBr>
-                    <a:lnBlToTr w="12700" cmpd="sng">
-                      <a:noFill/>
-                      <a:prstDash val="solid"/>
-                    </a:lnBlToTr>
-                    <a:solidFill>
-                      <a:schemeClr val="tx2"/>
-                    </a:solidFill>
-                  </a:tcPr>
-                </a:tc>
-                <a:tc>
-                  <a:txBody>
-                    <a:bodyPr/>
-                    <a:lstStyle/>
-                    <a:p>
-                      <a:pPr algn="ctr"/>
-                      <a:r>
-                        <a:rPr lang="nl-NL" sz="1400" b="1" i="0" noProof="0">
-                          <a:solidFill>
-                            <a:schemeClr val="bg1"/>
-                          </a:solidFill>
-                          <a:latin typeface="+mn-lt"/>
-                          <a:cs typeface="TheSans B4 SemiLight"/>
-                        </a:rPr>
                         <a:t>Scenario</a:t>
                       </a:r>
                     </a:p>
@@ -34044,64 +33377,6 @@
                     <a:p>
                       <a:pPr algn="ctr" fontAlgn="b"/>
                       <a:r>
-                        <a:rPr lang="en-US" sz="1400" b="0" i="0" u="none" strike="noStrike" dirty="0">
-                          <a:solidFill>
-                            <a:schemeClr val="tx2"/>
-                          </a:solidFill>
-                          <a:effectLst/>
-                          <a:latin typeface="Calibri Regular"/>
-                        </a:rPr>
-                        <a:t>MODERNIZATION_TECHNICAL_DEBT_1</a:t>
-                      </a:r>
-                    </a:p>
-                  </a:txBody>
-                  <a:tcPr marL="108000" marR="108000" marT="90000" marB="90000">
-                    <a:lnL>
-                      <a:noFill/>
-                    </a:lnL>
-                    <a:lnR w="9525" cap="flat" cmpd="sng" algn="ctr">
-                      <a:noFill/>
-                      <a:prstDash val="solid"/>
-                    </a:lnR>
-                    <a:lnT w="19050" cap="flat" cmpd="sng" algn="ctr">
-                      <a:noFill/>
-                      <a:prstDash val="sysDot"/>
-                      <a:round/>
-                      <a:headEnd type="none" w="med" len="med"/>
-                      <a:tailEnd type="none" w="med" len="med"/>
-                    </a:lnT>
-                    <a:lnB w="12700" cap="flat" cmpd="sng" algn="ctr">
-                      <a:solidFill>
-                        <a:schemeClr val="tx1">
-                          <a:lumMod val="40000"/>
-                          <a:lumOff val="60000"/>
-                        </a:schemeClr>
-                      </a:solidFill>
-                      <a:prstDash val="sysDot"/>
-                      <a:round/>
-                      <a:headEnd type="none" w="med" len="med"/>
-                      <a:tailEnd type="none" w="med" len="med"/>
-                    </a:lnB>
-                    <a:lnTlToBr w="12700" cmpd="sng">
-                      <a:noFill/>
-                      <a:prstDash val="solid"/>
-                    </a:lnTlToBr>
-                    <a:lnBlToTr w="12700" cmpd="sng">
-                      <a:noFill/>
-                      <a:prstDash val="solid"/>
-                    </a:lnBlToTr>
-                    <a:solidFill>
-                      <a:schemeClr val="bg1"/>
-                    </a:solidFill>
-                  </a:tcPr>
-                </a:tc>
-                <a:tc>
-                  <a:txBody>
-                    <a:bodyPr/>
-                    <a:lstStyle/>
-                    <a:p>
-                      <a:pPr algn="ctr" fontAlgn="b"/>
-                      <a:r>
                         <a:rPr lang="en-US" sz="1400" b="1" i="0" u="none" strike="noStrike" dirty="0">
                           <a:solidFill>
                             <a:schemeClr val="accent3"/>
@@ -34678,85 +33953,6 @@
                         <a:defRPr/>
                       </a:pPr>
                       <a:r>
-                        <a:rPr lang="en-US" sz="1400" b="0" i="0" u="none" strike="noStrike" dirty="0">
-                          <a:solidFill>
-                            <a:schemeClr val="tx2"/>
-                          </a:solidFill>
-                          <a:effectLst/>
-                          <a:latin typeface="Calibri Regular"/>
-                        </a:rPr>
-                        <a:t>MODERNIZATION_TECHNICAL_DEBT_2</a:t>
-                      </a:r>
-                    </a:p>
-                  </a:txBody>
-                  <a:tcPr marL="108000" marR="108000" marT="90000" marB="90000">
-                    <a:lnL>
-                      <a:noFill/>
-                    </a:lnL>
-                    <a:lnR w="9525" cap="flat" cmpd="sng" algn="ctr">
-                      <a:noFill/>
-                      <a:prstDash val="solid"/>
-                    </a:lnR>
-                    <a:lnT w="12700" cap="flat" cmpd="sng" algn="ctr">
-                      <a:solidFill>
-                        <a:schemeClr val="tx1">
-                          <a:lumMod val="40000"/>
-                          <a:lumOff val="60000"/>
-                        </a:schemeClr>
-                      </a:solidFill>
-                      <a:prstDash val="sysDot"/>
-                      <a:round/>
-                      <a:headEnd type="none" w="med" len="med"/>
-                      <a:tailEnd type="none" w="med" len="med"/>
-                    </a:lnT>
-                    <a:lnB w="12700" cap="flat" cmpd="sng" algn="ctr">
-                      <a:solidFill>
-                        <a:schemeClr val="tx1">
-                          <a:lumMod val="40000"/>
-                          <a:lumOff val="60000"/>
-                        </a:schemeClr>
-                      </a:solidFill>
-                      <a:prstDash val="sysDot"/>
-                      <a:round/>
-                      <a:headEnd type="none" w="med" len="med"/>
-                      <a:tailEnd type="none" w="med" len="med"/>
-                    </a:lnB>
-                    <a:lnTlToBr w="12700" cmpd="sng">
-                      <a:noFill/>
-                      <a:prstDash val="solid"/>
-                    </a:lnTlToBr>
-                    <a:lnBlToTr w="12700" cmpd="sng">
-                      <a:noFill/>
-                      <a:prstDash val="solid"/>
-                    </a:lnBlToTr>
-                    <a:solidFill>
-                      <a:schemeClr val="bg1"/>
-                    </a:solidFill>
-                  </a:tcPr>
-                </a:tc>
-                <a:tc>
-                  <a:txBody>
-                    <a:bodyPr/>
-                    <a:lstStyle/>
-                    <a:p>
-                      <a:pPr marL="0" marR="0" lvl="0" indent="0" algn="ctr" defTabSz="914400" rtl="0" eaLnBrk="1" fontAlgn="b" latinLnBrk="0" hangingPunct="1">
-                        <a:lnSpc>
-                          <a:spcPct val="100000"/>
-                        </a:lnSpc>
-                        <a:spcBef>
-                          <a:spcPts val="0"/>
-                        </a:spcBef>
-                        <a:spcAft>
-                          <a:spcPts val="0"/>
-                        </a:spcAft>
-                        <a:buClrTx/>
-                        <a:buSzTx/>
-                        <a:buFontTx/>
-                        <a:buNone/>
-                        <a:tabLst/>
-                        <a:defRPr/>
-                      </a:pPr>
-                      <a:r>
                         <a:rPr lang="en-US" sz="1400" b="1" i="0" u="none" strike="noStrike" dirty="0">
                           <a:solidFill>
                             <a:schemeClr val="accent3"/>
@@ -35364,85 +34560,6 @@
                         <a:defRPr/>
                       </a:pPr>
                       <a:r>
-                        <a:rPr lang="en-US" sz="1400" b="0" i="0" u="none" strike="noStrike" dirty="0">
-                          <a:solidFill>
-                            <a:schemeClr val="tx2"/>
-                          </a:solidFill>
-                          <a:effectLst/>
-                          <a:latin typeface="Calibri Regular"/>
-                        </a:rPr>
-                        <a:t>MODERNIZATION_TECHNICAL_DEBT_3</a:t>
-                      </a:r>
-                    </a:p>
-                  </a:txBody>
-                  <a:tcPr marL="108000" marR="108000" marT="90000" marB="90000">
-                    <a:lnL>
-                      <a:noFill/>
-                    </a:lnL>
-                    <a:lnR w="9525" cap="flat" cmpd="sng" algn="ctr">
-                      <a:noFill/>
-                      <a:prstDash val="solid"/>
-                    </a:lnR>
-                    <a:lnT w="12700" cap="flat" cmpd="sng" algn="ctr">
-                      <a:solidFill>
-                        <a:schemeClr val="tx1">
-                          <a:lumMod val="40000"/>
-                          <a:lumOff val="60000"/>
-                        </a:schemeClr>
-                      </a:solidFill>
-                      <a:prstDash val="sysDot"/>
-                      <a:round/>
-                      <a:headEnd type="none" w="med" len="med"/>
-                      <a:tailEnd type="none" w="med" len="med"/>
-                    </a:lnT>
-                    <a:lnB w="12700" cap="flat" cmpd="sng" algn="ctr">
-                      <a:solidFill>
-                        <a:schemeClr val="tx1">
-                          <a:lumMod val="40000"/>
-                          <a:lumOff val="60000"/>
-                        </a:schemeClr>
-                      </a:solidFill>
-                      <a:prstDash val="sysDot"/>
-                      <a:round/>
-                      <a:headEnd type="none" w="med" len="med"/>
-                      <a:tailEnd type="none" w="med" len="med"/>
-                    </a:lnB>
-                    <a:lnTlToBr w="12700" cmpd="sng">
-                      <a:noFill/>
-                      <a:prstDash val="solid"/>
-                    </a:lnTlToBr>
-                    <a:lnBlToTr w="12700" cmpd="sng">
-                      <a:noFill/>
-                      <a:prstDash val="solid"/>
-                    </a:lnBlToTr>
-                    <a:solidFill>
-                      <a:schemeClr val="bg1"/>
-                    </a:solidFill>
-                  </a:tcPr>
-                </a:tc>
-                <a:tc>
-                  <a:txBody>
-                    <a:bodyPr/>
-                    <a:lstStyle/>
-                    <a:p>
-                      <a:pPr marL="0" marR="0" lvl="0" indent="0" algn="ctr" defTabSz="914400" rtl="0" eaLnBrk="1" fontAlgn="b" latinLnBrk="0" hangingPunct="1">
-                        <a:lnSpc>
-                          <a:spcPct val="100000"/>
-                        </a:lnSpc>
-                        <a:spcBef>
-                          <a:spcPts val="0"/>
-                        </a:spcBef>
-                        <a:spcAft>
-                          <a:spcPts val="0"/>
-                        </a:spcAft>
-                        <a:buClrTx/>
-                        <a:buSzTx/>
-                        <a:buFontTx/>
-                        <a:buNone/>
-                        <a:tabLst/>
-                        <a:defRPr/>
-                      </a:pPr>
-                      <a:r>
                         <a:rPr lang="en-US" sz="1400" b="1" i="0" u="none" strike="noStrike" dirty="0">
                           <a:solidFill>
                             <a:schemeClr val="accent3"/>
@@ -36050,85 +35167,6 @@
                         <a:defRPr/>
                       </a:pPr>
                       <a:r>
-                        <a:rPr lang="en-US" sz="1400" b="0" i="0" u="none" strike="noStrike" dirty="0">
-                          <a:solidFill>
-                            <a:schemeClr val="tx2"/>
-                          </a:solidFill>
-                          <a:effectLst/>
-                          <a:latin typeface="Calibri Regular"/>
-                        </a:rPr>
-                        <a:t>MODERNIZATION_TECHNICAL_DEBT_4</a:t>
-                      </a:r>
-                    </a:p>
-                  </a:txBody>
-                  <a:tcPr marL="108000" marR="108000" marT="90000" marB="90000">
-                    <a:lnL>
-                      <a:noFill/>
-                    </a:lnL>
-                    <a:lnR w="9525" cap="flat" cmpd="sng" algn="ctr">
-                      <a:noFill/>
-                      <a:prstDash val="solid"/>
-                    </a:lnR>
-                    <a:lnT w="12700" cap="flat" cmpd="sng" algn="ctr">
-                      <a:solidFill>
-                        <a:schemeClr val="tx1">
-                          <a:lumMod val="40000"/>
-                          <a:lumOff val="60000"/>
-                        </a:schemeClr>
-                      </a:solidFill>
-                      <a:prstDash val="sysDot"/>
-                      <a:round/>
-                      <a:headEnd type="none" w="med" len="med"/>
-                      <a:tailEnd type="none" w="med" len="med"/>
-                    </a:lnT>
-                    <a:lnB w="12700" cap="flat" cmpd="sng" algn="ctr">
-                      <a:solidFill>
-                        <a:schemeClr val="tx1">
-                          <a:lumMod val="40000"/>
-                          <a:lumOff val="60000"/>
-                        </a:schemeClr>
-                      </a:solidFill>
-                      <a:prstDash val="sysDot"/>
-                      <a:round/>
-                      <a:headEnd type="none" w="med" len="med"/>
-                      <a:tailEnd type="none" w="med" len="med"/>
-                    </a:lnB>
-                    <a:lnTlToBr w="12700" cmpd="sng">
-                      <a:noFill/>
-                      <a:prstDash val="solid"/>
-                    </a:lnTlToBr>
-                    <a:lnBlToTr w="12700" cmpd="sng">
-                      <a:noFill/>
-                      <a:prstDash val="solid"/>
-                    </a:lnBlToTr>
-                    <a:solidFill>
-                      <a:schemeClr val="bg1"/>
-                    </a:solidFill>
-                  </a:tcPr>
-                </a:tc>
-                <a:tc>
-                  <a:txBody>
-                    <a:bodyPr/>
-                    <a:lstStyle/>
-                    <a:p>
-                      <a:pPr marL="0" marR="0" lvl="0" indent="0" algn="ctr" defTabSz="914400" rtl="0" eaLnBrk="1" fontAlgn="b" latinLnBrk="0" hangingPunct="1">
-                        <a:lnSpc>
-                          <a:spcPct val="100000"/>
-                        </a:lnSpc>
-                        <a:spcBef>
-                          <a:spcPts val="0"/>
-                        </a:spcBef>
-                        <a:spcAft>
-                          <a:spcPts val="0"/>
-                        </a:spcAft>
-                        <a:buClrTx/>
-                        <a:buSzTx/>
-                        <a:buFontTx/>
-                        <a:buNone/>
-                        <a:tabLst/>
-                        <a:defRPr/>
-                      </a:pPr>
-                      <a:r>
                         <a:rPr lang="en-US" sz="1400" b="1" i="0" u="none" strike="noStrike" dirty="0">
                           <a:solidFill>
                             <a:schemeClr val="accent3"/>
@@ -36736,85 +35774,6 @@
                         <a:defRPr/>
                       </a:pPr>
                       <a:r>
-                        <a:rPr lang="en-US" sz="1400" b="0" i="0" u="none" strike="noStrike" dirty="0">
-                          <a:solidFill>
-                            <a:schemeClr val="tx2"/>
-                          </a:solidFill>
-                          <a:effectLst/>
-                          <a:latin typeface="Calibri Regular"/>
-                        </a:rPr>
-                        <a:t>MODERNIZATION_TECHNICAL_DEBT_5</a:t>
-                      </a:r>
-                    </a:p>
-                  </a:txBody>
-                  <a:tcPr marL="108000" marR="108000" marT="90000" marB="90000">
-                    <a:lnL>
-                      <a:noFill/>
-                    </a:lnL>
-                    <a:lnR w="9525" cap="flat" cmpd="sng" algn="ctr">
-                      <a:noFill/>
-                      <a:prstDash val="solid"/>
-                    </a:lnR>
-                    <a:lnT w="12700" cap="flat" cmpd="sng" algn="ctr">
-                      <a:solidFill>
-                        <a:schemeClr val="tx1">
-                          <a:lumMod val="40000"/>
-                          <a:lumOff val="60000"/>
-                        </a:schemeClr>
-                      </a:solidFill>
-                      <a:prstDash val="sysDot"/>
-                      <a:round/>
-                      <a:headEnd type="none" w="med" len="med"/>
-                      <a:tailEnd type="none" w="med" len="med"/>
-                    </a:lnT>
-                    <a:lnB w="12700" cap="flat" cmpd="sng" algn="ctr">
-                      <a:solidFill>
-                        <a:schemeClr val="tx1">
-                          <a:lumMod val="40000"/>
-                          <a:lumOff val="60000"/>
-                        </a:schemeClr>
-                      </a:solidFill>
-                      <a:prstDash val="sysDot"/>
-                      <a:round/>
-                      <a:headEnd type="none" w="med" len="med"/>
-                      <a:tailEnd type="none" w="med" len="med"/>
-                    </a:lnB>
-                    <a:lnTlToBr w="12700" cmpd="sng">
-                      <a:noFill/>
-                      <a:prstDash val="solid"/>
-                    </a:lnTlToBr>
-                    <a:lnBlToTr w="12700" cmpd="sng">
-                      <a:noFill/>
-                      <a:prstDash val="solid"/>
-                    </a:lnBlToTr>
-                    <a:solidFill>
-                      <a:schemeClr val="bg1"/>
-                    </a:solidFill>
-                  </a:tcPr>
-                </a:tc>
-                <a:tc>
-                  <a:txBody>
-                    <a:bodyPr/>
-                    <a:lstStyle/>
-                    <a:p>
-                      <a:pPr marL="0" marR="0" lvl="0" indent="0" algn="ctr" defTabSz="914400" rtl="0" eaLnBrk="1" fontAlgn="b" latinLnBrk="0" hangingPunct="1">
-                        <a:lnSpc>
-                          <a:spcPct val="100000"/>
-                        </a:lnSpc>
-                        <a:spcBef>
-                          <a:spcPts val="0"/>
-                        </a:spcBef>
-                        <a:spcAft>
-                          <a:spcPts val="0"/>
-                        </a:spcAft>
-                        <a:buClrTx/>
-                        <a:buSzTx/>
-                        <a:buFontTx/>
-                        <a:buNone/>
-                        <a:tabLst/>
-                        <a:defRPr/>
-                      </a:pPr>
-                      <a:r>
                         <a:rPr lang="en-US" sz="1400" b="1" i="0" u="none" strike="noStrike" dirty="0">
                           <a:solidFill>
                             <a:schemeClr val="accent3"/>
@@ -37454,85 +36413,6 @@
                         <a:defRPr/>
                       </a:pPr>
                       <a:r>
-                        <a:rPr lang="en-US" sz="1400" b="0" i="0" u="none" strike="noStrike" dirty="0">
-                          <a:solidFill>
-                            <a:schemeClr val="tx2"/>
-                          </a:solidFill>
-                          <a:effectLst/>
-                          <a:latin typeface="Calibri Regular"/>
-                        </a:rPr>
-                        <a:t>MODERNIZATION_TECHNICAL_DEBT_6</a:t>
-                      </a:r>
-                    </a:p>
-                  </a:txBody>
-                  <a:tcPr marL="108000" marR="108000" marT="90000" marB="90000">
-                    <a:lnL>
-                      <a:noFill/>
-                    </a:lnL>
-                    <a:lnR w="9525" cap="flat" cmpd="sng" algn="ctr">
-                      <a:noFill/>
-                      <a:prstDash val="solid"/>
-                    </a:lnR>
-                    <a:lnT w="12700" cap="flat" cmpd="sng" algn="ctr">
-                      <a:solidFill>
-                        <a:schemeClr val="tx1">
-                          <a:lumMod val="40000"/>
-                          <a:lumOff val="60000"/>
-                        </a:schemeClr>
-                      </a:solidFill>
-                      <a:prstDash val="sysDot"/>
-                      <a:round/>
-                      <a:headEnd type="none" w="med" len="med"/>
-                      <a:tailEnd type="none" w="med" len="med"/>
-                    </a:lnT>
-                    <a:lnB w="12700" cap="flat" cmpd="sng" algn="ctr">
-                      <a:solidFill>
-                        <a:schemeClr val="tx1">
-                          <a:lumMod val="40000"/>
-                          <a:lumOff val="60000"/>
-                        </a:schemeClr>
-                      </a:solidFill>
-                      <a:prstDash val="sysDot"/>
-                      <a:round/>
-                      <a:headEnd type="none" w="med" len="med"/>
-                      <a:tailEnd type="none" w="med" len="med"/>
-                    </a:lnB>
-                    <a:lnTlToBr w="12700" cmpd="sng">
-                      <a:noFill/>
-                      <a:prstDash val="solid"/>
-                    </a:lnTlToBr>
-                    <a:lnBlToTr w="12700" cmpd="sng">
-                      <a:noFill/>
-                      <a:prstDash val="solid"/>
-                    </a:lnBlToTr>
-                    <a:solidFill>
-                      <a:schemeClr val="bg1"/>
-                    </a:solidFill>
-                  </a:tcPr>
-                </a:tc>
-                <a:tc>
-                  <a:txBody>
-                    <a:bodyPr/>
-                    <a:lstStyle/>
-                    <a:p>
-                      <a:pPr marL="0" marR="0" lvl="0" indent="0" algn="ctr" defTabSz="914400" rtl="0" eaLnBrk="1" fontAlgn="b" latinLnBrk="0" hangingPunct="1">
-                        <a:lnSpc>
-                          <a:spcPct val="100000"/>
-                        </a:lnSpc>
-                        <a:spcBef>
-                          <a:spcPts val="0"/>
-                        </a:spcBef>
-                        <a:spcAft>
-                          <a:spcPts val="0"/>
-                        </a:spcAft>
-                        <a:buClrTx/>
-                        <a:buSzTx/>
-                        <a:buFontTx/>
-                        <a:buNone/>
-                        <a:tabLst/>
-                        <a:defRPr/>
-                      </a:pPr>
-                      <a:r>
                         <a:rPr lang="en-US" sz="1400" b="1" i="0" u="none" strike="noStrike" dirty="0">
                           <a:solidFill>
                             <a:schemeClr val="accent3"/>
@@ -38172,85 +37052,6 @@
                         <a:defRPr/>
                       </a:pPr>
                       <a:r>
-                        <a:rPr lang="en-US" sz="1400" b="0" i="0" u="none" strike="noStrike" dirty="0">
-                          <a:solidFill>
-                            <a:schemeClr val="tx2"/>
-                          </a:solidFill>
-                          <a:effectLst/>
-                          <a:latin typeface="Calibri Regular"/>
-                        </a:rPr>
-                        <a:t>MODERNIZATION_TECHNICAL_DEBT_7</a:t>
-                      </a:r>
-                    </a:p>
-                  </a:txBody>
-                  <a:tcPr marL="108000" marR="108000" marT="90000" marB="90000">
-                    <a:lnL>
-                      <a:noFill/>
-                    </a:lnL>
-                    <a:lnR w="9525" cap="flat" cmpd="sng" algn="ctr">
-                      <a:noFill/>
-                      <a:prstDash val="solid"/>
-                    </a:lnR>
-                    <a:lnT w="12700" cap="flat" cmpd="sng" algn="ctr">
-                      <a:solidFill>
-                        <a:schemeClr val="tx1">
-                          <a:lumMod val="40000"/>
-                          <a:lumOff val="60000"/>
-                        </a:schemeClr>
-                      </a:solidFill>
-                      <a:prstDash val="sysDot"/>
-                      <a:round/>
-                      <a:headEnd type="none" w="med" len="med"/>
-                      <a:tailEnd type="none" w="med" len="med"/>
-                    </a:lnT>
-                    <a:lnB w="12700" cap="flat" cmpd="sng" algn="ctr">
-                      <a:solidFill>
-                        <a:schemeClr val="tx1">
-                          <a:lumMod val="40000"/>
-                          <a:lumOff val="60000"/>
-                        </a:schemeClr>
-                      </a:solidFill>
-                      <a:prstDash val="sysDot"/>
-                      <a:round/>
-                      <a:headEnd type="none" w="med" len="med"/>
-                      <a:tailEnd type="none" w="med" len="med"/>
-                    </a:lnB>
-                    <a:lnTlToBr w="12700" cmpd="sng">
-                      <a:noFill/>
-                      <a:prstDash val="solid"/>
-                    </a:lnTlToBr>
-                    <a:lnBlToTr w="12700" cmpd="sng">
-                      <a:noFill/>
-                      <a:prstDash val="solid"/>
-                    </a:lnBlToTr>
-                    <a:solidFill>
-                      <a:schemeClr val="bg1"/>
-                    </a:solidFill>
-                  </a:tcPr>
-                </a:tc>
-                <a:tc>
-                  <a:txBody>
-                    <a:bodyPr/>
-                    <a:lstStyle/>
-                    <a:p>
-                      <a:pPr marL="0" marR="0" lvl="0" indent="0" algn="ctr" defTabSz="914400" rtl="0" eaLnBrk="1" fontAlgn="b" latinLnBrk="0" hangingPunct="1">
-                        <a:lnSpc>
-                          <a:spcPct val="100000"/>
-                        </a:lnSpc>
-                        <a:spcBef>
-                          <a:spcPts val="0"/>
-                        </a:spcBef>
-                        <a:spcAft>
-                          <a:spcPts val="0"/>
-                        </a:spcAft>
-                        <a:buClrTx/>
-                        <a:buSzTx/>
-                        <a:buFontTx/>
-                        <a:buNone/>
-                        <a:tabLst/>
-                        <a:defRPr/>
-                      </a:pPr>
-                      <a:r>
                         <a:rPr lang="en-US" sz="1400" b="1" i="0" u="none" strike="noStrike" dirty="0">
                           <a:solidFill>
                             <a:schemeClr val="accent3"/>
@@ -38890,85 +37691,6 @@
                         <a:defRPr/>
                       </a:pPr>
                       <a:r>
-                        <a:rPr lang="en-US" sz="1400" b="0" i="0" u="none" strike="noStrike" dirty="0">
-                          <a:solidFill>
-                            <a:schemeClr val="tx2"/>
-                          </a:solidFill>
-                          <a:effectLst/>
-                          <a:latin typeface="Calibri Regular"/>
-                        </a:rPr>
-                        <a:t>MODERNIZATION_TECHNICAL_DEBT_8</a:t>
-                      </a:r>
-                    </a:p>
-                  </a:txBody>
-                  <a:tcPr marL="108000" marR="108000" marT="90000" marB="90000">
-                    <a:lnL>
-                      <a:noFill/>
-                    </a:lnL>
-                    <a:lnR w="9525" cap="flat" cmpd="sng" algn="ctr">
-                      <a:noFill/>
-                      <a:prstDash val="solid"/>
-                    </a:lnR>
-                    <a:lnT w="12700" cap="flat" cmpd="sng" algn="ctr">
-                      <a:solidFill>
-                        <a:schemeClr val="tx1">
-                          <a:lumMod val="40000"/>
-                          <a:lumOff val="60000"/>
-                        </a:schemeClr>
-                      </a:solidFill>
-                      <a:prstDash val="sysDot"/>
-                      <a:round/>
-                      <a:headEnd type="none" w="med" len="med"/>
-                      <a:tailEnd type="none" w="med" len="med"/>
-                    </a:lnT>
-                    <a:lnB w="12700" cap="flat" cmpd="sng" algn="ctr">
-                      <a:solidFill>
-                        <a:schemeClr val="tx1">
-                          <a:lumMod val="40000"/>
-                          <a:lumOff val="60000"/>
-                        </a:schemeClr>
-                      </a:solidFill>
-                      <a:prstDash val="sysDot"/>
-                      <a:round/>
-                      <a:headEnd type="none" w="med" len="med"/>
-                      <a:tailEnd type="none" w="med" len="med"/>
-                    </a:lnB>
-                    <a:lnTlToBr w="12700" cmpd="sng">
-                      <a:noFill/>
-                      <a:prstDash val="solid"/>
-                    </a:lnTlToBr>
-                    <a:lnBlToTr w="12700" cmpd="sng">
-                      <a:noFill/>
-                      <a:prstDash val="solid"/>
-                    </a:lnBlToTr>
-                    <a:solidFill>
-                      <a:schemeClr val="bg1"/>
-                    </a:solidFill>
-                  </a:tcPr>
-                </a:tc>
-                <a:tc>
-                  <a:txBody>
-                    <a:bodyPr/>
-                    <a:lstStyle/>
-                    <a:p>
-                      <a:pPr marL="0" marR="0" lvl="0" indent="0" algn="ctr" defTabSz="914400" rtl="0" eaLnBrk="1" fontAlgn="b" latinLnBrk="0" hangingPunct="1">
-                        <a:lnSpc>
-                          <a:spcPct val="100000"/>
-                        </a:lnSpc>
-                        <a:spcBef>
-                          <a:spcPts val="0"/>
-                        </a:spcBef>
-                        <a:spcAft>
-                          <a:spcPts val="0"/>
-                        </a:spcAft>
-                        <a:buClrTx/>
-                        <a:buSzTx/>
-                        <a:buFontTx/>
-                        <a:buNone/>
-                        <a:tabLst/>
-                        <a:defRPr/>
-                      </a:pPr>
-                      <a:r>
                         <a:rPr lang="en-US" sz="1400" b="1" i="0" u="none" strike="noStrike" dirty="0">
                           <a:solidFill>
                             <a:schemeClr val="accent3"/>
@@ -39608,85 +38330,6 @@
                         <a:defRPr/>
                       </a:pPr>
                       <a:r>
-                        <a:rPr lang="en-US" sz="1400" b="0" i="0" u="none" strike="noStrike" dirty="0">
-                          <a:solidFill>
-                            <a:schemeClr val="tx2"/>
-                          </a:solidFill>
-                          <a:effectLst/>
-                          <a:latin typeface="Calibri Regular"/>
-                        </a:rPr>
-                        <a:t>MODERNIZATION_TECHNICAL_DEBT_9</a:t>
-                      </a:r>
-                    </a:p>
-                  </a:txBody>
-                  <a:tcPr marL="108000" marR="108000" marT="90000" marB="90000">
-                    <a:lnL>
-                      <a:noFill/>
-                    </a:lnL>
-                    <a:lnR w="9525" cap="flat" cmpd="sng" algn="ctr">
-                      <a:noFill/>
-                      <a:prstDash val="solid"/>
-                    </a:lnR>
-                    <a:lnT w="12700" cap="flat" cmpd="sng" algn="ctr">
-                      <a:solidFill>
-                        <a:schemeClr val="tx1">
-                          <a:lumMod val="40000"/>
-                          <a:lumOff val="60000"/>
-                        </a:schemeClr>
-                      </a:solidFill>
-                      <a:prstDash val="sysDot"/>
-                      <a:round/>
-                      <a:headEnd type="none" w="med" len="med"/>
-                      <a:tailEnd type="none" w="med" len="med"/>
-                    </a:lnT>
-                    <a:lnB w="12700" cap="flat" cmpd="sng" algn="ctr">
-                      <a:solidFill>
-                        <a:schemeClr val="tx1">
-                          <a:lumMod val="40000"/>
-                          <a:lumOff val="60000"/>
-                        </a:schemeClr>
-                      </a:solidFill>
-                      <a:prstDash val="sysDot"/>
-                      <a:round/>
-                      <a:headEnd type="none" w="med" len="med"/>
-                      <a:tailEnd type="none" w="med" len="med"/>
-                    </a:lnB>
-                    <a:lnTlToBr w="12700" cmpd="sng">
-                      <a:noFill/>
-                      <a:prstDash val="solid"/>
-                    </a:lnTlToBr>
-                    <a:lnBlToTr w="12700" cmpd="sng">
-                      <a:noFill/>
-                      <a:prstDash val="solid"/>
-                    </a:lnBlToTr>
-                    <a:solidFill>
-                      <a:schemeClr val="bg1"/>
-                    </a:solidFill>
-                  </a:tcPr>
-                </a:tc>
-                <a:tc>
-                  <a:txBody>
-                    <a:bodyPr/>
-                    <a:lstStyle/>
-                    <a:p>
-                      <a:pPr marL="0" marR="0" lvl="0" indent="0" algn="ctr" defTabSz="914400" rtl="0" eaLnBrk="1" fontAlgn="b" latinLnBrk="0" hangingPunct="1">
-                        <a:lnSpc>
-                          <a:spcPct val="100000"/>
-                        </a:lnSpc>
-                        <a:spcBef>
-                          <a:spcPts val="0"/>
-                        </a:spcBef>
-                        <a:spcAft>
-                          <a:spcPts val="0"/>
-                        </a:spcAft>
-                        <a:buClrTx/>
-                        <a:buSzTx/>
-                        <a:buFontTx/>
-                        <a:buNone/>
-                        <a:tabLst/>
-                        <a:defRPr/>
-                      </a:pPr>
-                      <a:r>
                         <a:rPr lang="en-US" sz="1400" b="1" i="0" u="none" strike="noStrike" dirty="0">
                           <a:solidFill>
                             <a:schemeClr val="accent3"/>
@@ -40235,80 +38878,6 @@
                           <a:latin typeface="Calibri Regular"/>
                         </a:rPr>
                         <a:t>MODERNIZATION_ACTIVITY_10</a:t>
-                      </a:r>
-                    </a:p>
-                  </a:txBody>
-                  <a:tcPr marL="108000" marR="108000" marT="90000" marB="90000">
-                    <a:lnL>
-                      <a:noFill/>
-                    </a:lnL>
-                    <a:lnR w="9525" cap="flat" cmpd="sng" algn="ctr">
-                      <a:noFill/>
-                      <a:prstDash val="solid"/>
-                    </a:lnR>
-                    <a:lnT w="12700" cap="flat" cmpd="sng" algn="ctr">
-                      <a:solidFill>
-                        <a:schemeClr val="tx1">
-                          <a:lumMod val="40000"/>
-                          <a:lumOff val="60000"/>
-                        </a:schemeClr>
-                      </a:solidFill>
-                      <a:prstDash val="sysDot"/>
-                      <a:round/>
-                      <a:headEnd type="none" w="med" len="med"/>
-                      <a:tailEnd type="none" w="med" len="med"/>
-                    </a:lnT>
-                    <a:lnB w="12700" cap="flat" cmpd="sng" algn="ctr">
-                      <a:noFill/>
-                      <a:prstDash val="sysDot"/>
-                      <a:round/>
-                      <a:headEnd type="none" w="med" len="med"/>
-                      <a:tailEnd type="none" w="med" len="med"/>
-                    </a:lnB>
-                    <a:lnTlToBr w="12700" cmpd="sng">
-                      <a:noFill/>
-                      <a:prstDash val="solid"/>
-                    </a:lnTlToBr>
-                    <a:lnBlToTr w="12700" cmpd="sng">
-                      <a:noFill/>
-                      <a:prstDash val="solid"/>
-                    </a:lnBlToTr>
-                    <a:solidFill>
-                      <a:schemeClr val="bg1"/>
-                    </a:solidFill>
-                  </a:tcPr>
-                </a:tc>
-                <a:tc>
-                  <a:txBody>
-                    <a:bodyPr/>
-                    <a:lstStyle/>
-                    <a:p>
-                      <a:pPr marL="0" marR="0" lvl="0" indent="0" algn="ctr" defTabSz="914400" rtl="0" eaLnBrk="1" fontAlgn="b" latinLnBrk="0" hangingPunct="1">
-                        <a:lnSpc>
-                          <a:spcPct val="100000"/>
-                        </a:lnSpc>
-                        <a:spcBef>
-                          <a:spcPts val="0"/>
-                        </a:spcBef>
-                        <a:spcAft>
-                          <a:spcPts val="0"/>
-                        </a:spcAft>
-                        <a:buClrTx/>
-                        <a:buSzTx/>
-                        <a:buFontTx/>
-                        <a:buNone/>
-                        <a:tabLst/>
-                        <a:defRPr/>
-                      </a:pPr>
-                      <a:r>
-                        <a:rPr lang="en-US" sz="1400" b="0" i="0" u="none" strike="noStrike" dirty="0">
-                          <a:solidFill>
-                            <a:schemeClr val="tx2"/>
-                          </a:solidFill>
-                          <a:effectLst/>
-                          <a:latin typeface="Calibri Regular"/>
-                        </a:rPr>
-                        <a:t>MODERNIZATION_TECHNICAL_DEBT_10</a:t>
                       </a:r>
                     </a:p>
                   </a:txBody>
@@ -41031,7 +39600,7 @@
       </p:sp>
       <p:graphicFrame>
         <p:nvGraphicFramePr>
-          <p:cNvPr id="8" name="Chart 7">
+          <p:cNvPr id="8" name="TECHNICAL_DEBT_SYSTEMS_CHART&#13;&#10;">
             <a:extLst>
               <a:ext uri="{FF2B5EF4-FFF2-40B4-BE49-F238E27FC236}">
                 <a16:creationId xmlns:a16="http://schemas.microsoft.com/office/drawing/2014/main" id="{220D7F51-72F0-DC6F-B733-E9F269FA92FE}"/>
@@ -41042,7 +39611,7 @@
           <p:nvPr>
             <p:extLst>
               <p:ext uri="{D42A27DB-BD31-4B8C-83A1-F6EECF244321}">
-                <p14:modId xmlns:p14="http://schemas.microsoft.com/office/powerpoint/2010/main" val="1447979476"/>
+                <p14:modId xmlns:p14="http://schemas.microsoft.com/office/powerpoint/2010/main" val="94991413"/>
               </p:ext>
             </p:extLst>
           </p:nvPr>
@@ -41309,55 +39878,6 @@
       </p:sp>
       <p:sp>
         <p:nvSpPr>
-          <p:cNvPr id="6" name="TextBox 5">
-            <a:extLst>
-              <a:ext uri="{FF2B5EF4-FFF2-40B4-BE49-F238E27FC236}">
-                <a16:creationId xmlns:a16="http://schemas.microsoft.com/office/drawing/2014/main" id="{009D56D2-B9FA-4135-E5E1-F63E2C139CCE}"/>
-              </a:ext>
-            </a:extLst>
-          </p:cNvPr>
-          <p:cNvSpPr txBox="1"/>
-          <p:nvPr/>
-        </p:nvSpPr>
-        <p:spPr>
-          <a:xfrm>
-            <a:off x="10058400" y="-373182"/>
-            <a:ext cx="3648263" cy="355162"/>
-          </a:xfrm>
-          <a:prstGeom prst="rect">
-            <a:avLst/>
-          </a:prstGeom>
-          <a:noFill/>
-        </p:spPr>
-        <p:txBody>
-          <a:bodyPr wrap="none" lIns="90000" rtlCol="0" anchor="t">
-            <a:spAutoFit/>
-          </a:bodyPr>
-          <a:lstStyle/>
-          <a:p>
-            <a:pPr algn="l">
-              <a:lnSpc>
-                <a:spcPct val="113000"/>
-              </a:lnSpc>
-            </a:pPr>
-            <a:r>
-              <a:rPr lang="en-US" sz="1600" dirty="0" err="1">
-                <a:solidFill>
-                  <a:schemeClr val="tx2"/>
-                </a:solidFill>
-              </a:rPr>
-              <a:t>MODERNIZATION_SCATTER_PLOT_CHART</a:t>
-            </a:r>
-            <a:endParaRPr lang="en-US" sz="1600" dirty="0">
-              <a:solidFill>
-                <a:schemeClr val="tx2"/>
-              </a:solidFill>
-            </a:endParaRPr>
-          </a:p>
-        </p:txBody>
-      </p:sp>
-      <p:sp>
-        <p:nvSpPr>
           <p:cNvPr id="7" name="TextBox 6">
             <a:extLst>
               <a:ext uri="{FF2B5EF4-FFF2-40B4-BE49-F238E27FC236}">
@@ -41505,7 +40025,7 @@
       </p:sp>
       <p:graphicFrame>
         <p:nvGraphicFramePr>
-          <p:cNvPr id="10" name="Chart 9">
+          <p:cNvPr id="10" name="MODERNIZATION_SCATTER_PLOT_CHART&#13;&#10;">
             <a:extLst>
               <a:ext uri="{FF2B5EF4-FFF2-40B4-BE49-F238E27FC236}">
                 <a16:creationId xmlns:a16="http://schemas.microsoft.com/office/drawing/2014/main" id="{FA04012A-8076-57D9-16E6-FD4DB5AABD99}"/>
@@ -41516,7 +40036,7 @@
           <p:nvPr>
             <p:extLst>
               <p:ext uri="{D42A27DB-BD31-4B8C-83A1-F6EECF244321}">
-                <p14:modId xmlns:p14="http://schemas.microsoft.com/office/powerpoint/2010/main" val="1381336464"/>
+                <p14:modId xmlns:p14="http://schemas.microsoft.com/office/powerpoint/2010/main" val="1380179552"/>
               </p:ext>
             </p:extLst>
           </p:nvPr>
@@ -42666,6 +41186,26 @@
 </file>
 
 <file path=customXml/item1.xml><?xml version="1.0" encoding="utf-8"?>
+<p:properties xmlns:p="http://schemas.microsoft.com/office/2006/metadata/properties" xmlns:xsi="http://www.w3.org/2001/XMLSchema-instance" xmlns:pc="http://schemas.microsoft.com/office/infopath/2007/PartnerControls">
+  <documentManagement>
+    <lcf76f155ced4ddcb4097134ff3c332f xmlns="fa937df2-abe2-4d38-b5f4-c228acba3827">
+      <Terms xmlns="http://schemas.microsoft.com/office/infopath/2007/PartnerControls"/>
+    </lcf76f155ced4ddcb4097134ff3c332f>
+    <TaxCatchAll xmlns="bc8ba18a-4a58-4ad2-bfc0-6516af8e7dc2" xsi:nil="true"/>
+  </documentManagement>
+</p:properties>
+</file>
+
+<file path=customXml/item2.xml><?xml version="1.0" encoding="utf-8"?>
+<?mso-contentType ?>
+<FormTemplates xmlns="http://schemas.microsoft.com/sharepoint/v3/contenttype/forms">
+  <Display>DocumentLibraryForm</Display>
+  <Edit>DocumentLibraryForm</Edit>
+  <New>DocumentLibraryForm</New>
+</FormTemplates>
+</file>
+
+<file path=customXml/item3.xml><?xml version="1.0" encoding="utf-8"?>
 <ct:contentTypeSchema xmlns:ct="http://schemas.microsoft.com/office/2006/metadata/contentType" xmlns:ma="http://schemas.microsoft.com/office/2006/metadata/properties/metaAttributes" ct:_="" ma:_="" ma:contentTypeName="Document" ma:contentTypeID="0x010100398B4EB28540854BB4092730D7F67224" ma:contentTypeVersion="13" ma:contentTypeDescription="Create a new document." ma:contentTypeScope="" ma:versionID="07d6997c7358ecc3b6f0d78039f1ac55">
   <xsd:schema xmlns:xsd="http://www.w3.org/2001/XMLSchema" xmlns:xs="http://www.w3.org/2001/XMLSchema" xmlns:p="http://schemas.microsoft.com/office/2006/metadata/properties" xmlns:ns2="fa937df2-abe2-4d38-b5f4-c228acba3827" xmlns:ns3="bc8ba18a-4a58-4ad2-bfc0-6516af8e7dc2" targetNamespace="http://schemas.microsoft.com/office/2006/metadata/properties" ma:root="true" ma:fieldsID="a7d20d2c9a349b6838acf4b79389f2fd" ns2:_="" ns3:_="">
     <xsd:import namespace="fa937df2-abe2-4d38-b5f4-c228acba3827"/>
@@ -42888,27 +41428,32 @@
 </ct:contentTypeSchema>
 </file>
 
-<file path=customXml/item2.xml><?xml version="1.0" encoding="utf-8"?>
-<?mso-contentType ?>
-<FormTemplates xmlns="http://schemas.microsoft.com/sharepoint/v3/contenttype/forms">
-  <Display>DocumentLibraryForm</Display>
-  <Edit>DocumentLibraryForm</Edit>
-  <New>DocumentLibraryForm</New>
-</FormTemplates>
+<file path=customXml/itemProps1.xml><?xml version="1.0" encoding="utf-8"?>
+<ds:datastoreItem xmlns:ds="http://schemas.openxmlformats.org/officeDocument/2006/customXml" ds:itemID="{4B629362-CF15-4610-8FAC-A8E699942233}">
+  <ds:schemaRefs>
+    <ds:schemaRef ds:uri="http://schemas.microsoft.com/office/2006/documentManagement/types"/>
+    <ds:schemaRef ds:uri="http://purl.org/dc/elements/1.1/"/>
+    <ds:schemaRef ds:uri="bc8ba18a-4a58-4ad2-bfc0-6516af8e7dc2"/>
+    <ds:schemaRef ds:uri="http://purl.org/dc/terms/"/>
+    <ds:schemaRef ds:uri="http://www.w3.org/XML/1998/namespace"/>
+    <ds:schemaRef ds:uri="http://schemas.microsoft.com/office/2006/metadata/properties"/>
+    <ds:schemaRef ds:uri="http://schemas.microsoft.com/office/infopath/2007/PartnerControls"/>
+    <ds:schemaRef ds:uri="http://schemas.openxmlformats.org/package/2006/metadata/core-properties"/>
+    <ds:schemaRef ds:uri="fa937df2-abe2-4d38-b5f4-c228acba3827"/>
+    <ds:schemaRef ds:uri="http://purl.org/dc/dcmitype/"/>
+  </ds:schemaRefs>
+</ds:datastoreItem>
 </file>
 
-<file path=customXml/item3.xml><?xml version="1.0" encoding="utf-8"?>
-<p:properties xmlns:p="http://schemas.microsoft.com/office/2006/metadata/properties" xmlns:xsi="http://www.w3.org/2001/XMLSchema-instance" xmlns:pc="http://schemas.microsoft.com/office/infopath/2007/PartnerControls">
-  <documentManagement>
-    <lcf76f155ced4ddcb4097134ff3c332f xmlns="fa937df2-abe2-4d38-b5f4-c228acba3827">
-      <Terms xmlns="http://schemas.microsoft.com/office/infopath/2007/PartnerControls"/>
-    </lcf76f155ced4ddcb4097134ff3c332f>
-    <TaxCatchAll xmlns="bc8ba18a-4a58-4ad2-bfc0-6516af8e7dc2" xsi:nil="true"/>
-  </documentManagement>
-</p:properties>
+<file path=customXml/itemProps2.xml><?xml version="1.0" encoding="utf-8"?>
+<ds:datastoreItem xmlns:ds="http://schemas.openxmlformats.org/officeDocument/2006/customXml" ds:itemID="{570928F0-D7CA-4732-B7F3-1F945720D0AA}">
+  <ds:schemaRefs>
+    <ds:schemaRef ds:uri="http://schemas.microsoft.com/sharepoint/v3/contenttype/forms"/>
+  </ds:schemaRefs>
+</ds:datastoreItem>
 </file>
 
-<file path=customXml/itemProps1.xml><?xml version="1.0" encoding="utf-8"?>
+<file path=customXml/itemProps3.xml><?xml version="1.0" encoding="utf-8"?>
 <ds:datastoreItem xmlns:ds="http://schemas.openxmlformats.org/officeDocument/2006/customXml" ds:itemID="{06E6923A-C221-4753-B75B-BA213EEB7564}">
   <ds:schemaRefs>
     <ds:schemaRef ds:uri="bc8ba18a-4a58-4ad2-bfc0-6516af8e7dc2"/>
@@ -42925,29 +41470,4 @@
     <ds:schemaRef ds:uri="http://www.w3.org/2001/XMLSchema"/>
   </ds:schemaRefs>
 </ds:datastoreItem>
-</file>
-
-<file path=customXml/itemProps2.xml><?xml version="1.0" encoding="utf-8"?>
-<ds:datastoreItem xmlns:ds="http://schemas.openxmlformats.org/officeDocument/2006/customXml" ds:itemID="{570928F0-D7CA-4732-B7F3-1F945720D0AA}">
-  <ds:schemaRefs>
-    <ds:schemaRef ds:uri="http://schemas.microsoft.com/sharepoint/v3/contenttype/forms"/>
-  </ds:schemaRefs>
-</ds:datastoreItem>
-</file>
-
-<file path=customXml/itemProps3.xml><?xml version="1.0" encoding="utf-8"?>
-<ds:datastoreItem xmlns:ds="http://schemas.openxmlformats.org/officeDocument/2006/customXml" ds:itemID="{4B629362-CF15-4610-8FAC-A8E699942233}">
-  <ds:schemaRefs>
-    <ds:schemaRef ds:uri="http://schemas.microsoft.com/office/2006/documentManagement/types"/>
-    <ds:schemaRef ds:uri="http://purl.org/dc/elements/1.1/"/>
-    <ds:schemaRef ds:uri="bc8ba18a-4a58-4ad2-bfc0-6516af8e7dc2"/>
-    <ds:schemaRef ds:uri="http://purl.org/dc/terms/"/>
-    <ds:schemaRef ds:uri="http://www.w3.org/XML/1998/namespace"/>
-    <ds:schemaRef ds:uri="http://schemas.microsoft.com/office/2006/metadata/properties"/>
-    <ds:schemaRef ds:uri="http://schemas.microsoft.com/office/infopath/2007/PartnerControls"/>
-    <ds:schemaRef ds:uri="http://schemas.openxmlformats.org/package/2006/metadata/core-properties"/>
-    <ds:schemaRef ds:uri="fa937df2-abe2-4d38-b5f4-c228acba3827"/>
-    <ds:schemaRef ds:uri="http://purl.org/dc/dcmitype/"/>
-  </ds:schemaRefs>
-</ds:datastoreItem>
 </file>